--- a/12 bis - Exercice-Kafka-Spark-Streaming.pptx
+++ b/12 bis - Exercice-Kafka-Spark-Streaming.pptx
@@ -24705,7 +24705,7 @@
         <p:spPr>
           <a:xfrm>
             <a:off x="809625" y="1171575"/>
-            <a:ext cx="7620000" cy="638175"/>
+            <a:ext cx="8152452" cy="288593"/>
           </a:xfrm>
           <a:prstGeom prst="rect">
             <a:avLst/>
@@ -24732,7 +24732,7 @@
               </a:defRPr>
             </a:pPr>
             <a:r>
-              <a:rPr sz="1350" b="0">
+              <a:rPr sz="1350" b="0" dirty="0" err="1">
                 <a:solidFill>
                   <a:srgbClr val="222222"/>
                 </a:solidFill>
@@ -24740,22 +24740,21 @@
                 <a:ea typeface="Calibri"/>
                 <a:cs typeface="Calibri"/>
               </a:rPr>
-              <a:t>Créer Dockerfile.spark à côté de docker-compose.yml.</a:t>
-            </a:r>
-          </a:p>
-          <a:p>
-            <a:pPr>
-              <a:defRPr sz="1350" b="0">
+              <a:t>Créer</a:t>
+            </a:r>
+            <a:r>
+              <a:rPr sz="1350" b="0" dirty="0">
                 <a:solidFill>
                   <a:srgbClr val="222222"/>
                 </a:solidFill>
                 <a:latin typeface="Calibri"/>
                 <a:ea typeface="Calibri"/>
                 <a:cs typeface="Calibri"/>
-              </a:defRPr>
-            </a:pPr>
-            <a:r>
-              <a:rPr sz="1350" b="0">
+              </a:rPr>
+              <a:t> </a:t>
+            </a:r>
+            <a:r>
+              <a:rPr sz="1350" b="0" dirty="0" err="1">
                 <a:solidFill>
                   <a:srgbClr val="222222"/>
                 </a:solidFill>
@@ -24763,7 +24762,62 @@
                 <a:ea typeface="Calibri"/>
                 <a:cs typeface="Calibri"/>
               </a:rPr>
-              <a:t>Cette variante fixe Python 3.11, Java 17 et PySpark 3.5.6.</a:t>
+              <a:t>Dockerfile.spark</a:t>
+            </a:r>
+            <a:r>
+              <a:rPr sz="1350" b="0" dirty="0">
+                <a:solidFill>
+                  <a:srgbClr val="222222"/>
+                </a:solidFill>
+                <a:latin typeface="Calibri"/>
+                <a:ea typeface="Calibri"/>
+                <a:cs typeface="Calibri"/>
+              </a:rPr>
+              <a:t> à </a:t>
+            </a:r>
+            <a:r>
+              <a:rPr sz="1350" b="0" dirty="0" err="1">
+                <a:solidFill>
+                  <a:srgbClr val="222222"/>
+                </a:solidFill>
+                <a:latin typeface="Calibri"/>
+                <a:ea typeface="Calibri"/>
+                <a:cs typeface="Calibri"/>
+              </a:rPr>
+              <a:t>côté</a:t>
+            </a:r>
+            <a:r>
+              <a:rPr sz="1350" b="0" dirty="0">
+                <a:solidFill>
+                  <a:srgbClr val="222222"/>
+                </a:solidFill>
+                <a:latin typeface="Calibri"/>
+                <a:ea typeface="Calibri"/>
+                <a:cs typeface="Calibri"/>
+              </a:rPr>
+              <a:t> de docker-</a:t>
+            </a:r>
+            <a:r>
+              <a:rPr sz="1350" b="0" dirty="0" err="1">
+                <a:solidFill>
+                  <a:srgbClr val="222222"/>
+                </a:solidFill>
+                <a:latin typeface="Calibri"/>
+                <a:ea typeface="Calibri"/>
+                <a:cs typeface="Calibri"/>
+              </a:rPr>
+              <a:t>compose.yml</a:t>
+            </a:r>
+            <a:r>
+              <a:rPr sz="1350" b="0" dirty="0">
+                <a:solidFill>
+                  <a:srgbClr val="222222"/>
+                </a:solidFill>
+                <a:latin typeface="Calibri"/>
+                <a:ea typeface="Calibri"/>
+                <a:cs typeface="Calibri"/>
+              </a:rPr>
+              <a:t>.</a:t>
             </a:r>
           </a:p>
         </p:txBody>
@@ -24784,8 +24838,8 @@
         </p:nvSpPr>
         <p:spPr>
           <a:xfrm>
-            <a:off x="809625" y="1885950"/>
-            <a:ext cx="7620000" cy="2476500"/>
+            <a:off x="1020271" y="1480813"/>
+            <a:ext cx="6711435" cy="3662687"/>
           </a:xfrm>
           <a:prstGeom prst="rect">
             <a:avLst/>
@@ -24814,7 +24868,7 @@
               </a:defRPr>
             </a:pPr>
             <a:r>
-              <a:rPr sz="1275" b="0">
+              <a:rPr lang="fr-FR" sz="1000" b="0" dirty="0">
                 <a:solidFill>
                   <a:srgbClr val="EEEEEE"/>
                 </a:solidFill>
@@ -24822,8 +24876,49 @@
                 <a:ea typeface="Consolas"/>
                 <a:cs typeface="Consolas"/>
               </a:rPr>
-              <a:t>FROM jupyter/scipy-notebook:latest</a:t>
-            </a:r>
+              <a:t>FROM </a:t>
+            </a:r>
+            <a:r>
+              <a:rPr lang="fr-FR" sz="1000" b="0" dirty="0" err="1">
+                <a:solidFill>
+                  <a:srgbClr val="EEEEEE"/>
+                </a:solidFill>
+                <a:latin typeface="Consolas"/>
+                <a:ea typeface="Consolas"/>
+                <a:cs typeface="Consolas"/>
+              </a:rPr>
+              <a:t>jupyter</a:t>
+            </a:r>
+            <a:r>
+              <a:rPr lang="fr-FR" sz="1000" b="0" dirty="0">
+                <a:solidFill>
+                  <a:srgbClr val="EEEEEE"/>
+                </a:solidFill>
+                <a:latin typeface="Consolas"/>
+                <a:ea typeface="Consolas"/>
+                <a:cs typeface="Consolas"/>
+              </a:rPr>
+              <a:t>/</a:t>
+            </a:r>
+            <a:r>
+              <a:rPr lang="fr-FR" sz="1000" b="0" dirty="0" err="1">
+                <a:solidFill>
+                  <a:srgbClr val="EEEEEE"/>
+                </a:solidFill>
+                <a:latin typeface="Consolas"/>
+                <a:ea typeface="Consolas"/>
+                <a:cs typeface="Consolas"/>
+              </a:rPr>
+              <a:t>scipy-notebook:latest</a:t>
+            </a:r>
+            <a:endParaRPr lang="fr-FR" sz="1000" b="0" dirty="0">
+              <a:solidFill>
+                <a:srgbClr val="EEEEEE"/>
+              </a:solidFill>
+              <a:latin typeface="Consolas"/>
+              <a:ea typeface="Consolas"/>
+              <a:cs typeface="Consolas"/>
+            </a:endParaRPr>
           </a:p>
           <a:p>
             <a:pPr>
@@ -24836,17 +24931,14 @@
                 <a:cs typeface="Consolas"/>
               </a:defRPr>
             </a:pPr>
-            <a:r>
-              <a:rPr sz="1275" b="0">
-                <a:solidFill>
-                  <a:srgbClr val="EEEEEE"/>
-                </a:solidFill>
-                <a:latin typeface="Consolas"/>
-                <a:ea typeface="Consolas"/>
-                <a:cs typeface="Consolas"/>
-              </a:rPr>
-              <a:t>RUN conda install -y python=3.11 openjdk=17 &amp;&amp; \</a:t>
-            </a:r>
+            <a:endParaRPr lang="fr-FR" sz="1000" b="0" dirty="0">
+              <a:solidFill>
+                <a:srgbClr val="EEEEEE"/>
+              </a:solidFill>
+              <a:latin typeface="Consolas"/>
+              <a:ea typeface="Consolas"/>
+              <a:cs typeface="Consolas"/>
+            </a:endParaRPr>
           </a:p>
           <a:p>
             <a:pPr>
@@ -24860,7 +24952,7 @@
               </a:defRPr>
             </a:pPr>
             <a:r>
-              <a:rPr sz="1275" b="0">
+              <a:rPr lang="fr-FR" sz="1000" b="0" dirty="0">
                 <a:solidFill>
                   <a:srgbClr val="EEEEEE"/>
                 </a:solidFill>
@@ -24868,7 +24960,7 @@
                 <a:ea typeface="Consolas"/>
                 <a:cs typeface="Consolas"/>
               </a:rPr>
-              <a:t>    conda clean -afy</a:t>
+              <a:t>USER root</a:t>
             </a:r>
           </a:p>
           <a:p>
@@ -24882,17 +24974,14 @@
                 <a:cs typeface="Consolas"/>
               </a:defRPr>
             </a:pPr>
-            <a:r>
-              <a:rPr sz="1275" b="0">
-                <a:solidFill>
-                  <a:srgbClr val="EEEEEE"/>
-                </a:solidFill>
-                <a:latin typeface="Consolas"/>
-                <a:ea typeface="Consolas"/>
-                <a:cs typeface="Consolas"/>
-              </a:rPr>
-              <a:t>RUN pip install --no-cache-dir pyspark==3.5.6</a:t>
-            </a:r>
+            <a:endParaRPr lang="fr-FR" sz="1000" b="0" dirty="0">
+              <a:solidFill>
+                <a:srgbClr val="EEEEEE"/>
+              </a:solidFill>
+              <a:latin typeface="Consolas"/>
+              <a:ea typeface="Consolas"/>
+              <a:cs typeface="Consolas"/>
+            </a:endParaRPr>
           </a:p>
           <a:p>
             <a:pPr>
@@ -24906,7 +24995,7 @@
               </a:defRPr>
             </a:pPr>
             <a:r>
-              <a:rPr sz="1275" b="0">
+              <a:rPr lang="fr-FR" sz="1000" b="0" dirty="0">
                 <a:solidFill>
                   <a:srgbClr val="EEEEEE"/>
                 </a:solidFill>
@@ -24914,8 +25003,957 @@
                 <a:ea typeface="Consolas"/>
                 <a:cs typeface="Consolas"/>
               </a:rPr>
-              <a:t>ENV JAVA_HOME=/opt/conda</a:t>
-            </a:r>
+              <a:t># Installer Java sans recalculer l'environnement Conda</a:t>
+            </a:r>
+          </a:p>
+          <a:p>
+            <a:pPr>
+              <a:defRPr sz="1275" b="0">
+                <a:solidFill>
+                  <a:srgbClr val="EEEEEE"/>
+                </a:solidFill>
+                <a:latin typeface="Consolas"/>
+                <a:ea typeface="Consolas"/>
+                <a:cs typeface="Consolas"/>
+              </a:defRPr>
+            </a:pPr>
+            <a:r>
+              <a:rPr lang="fr-FR" sz="1000" b="0" dirty="0">
+                <a:solidFill>
+                  <a:srgbClr val="EEEEEE"/>
+                </a:solidFill>
+                <a:latin typeface="Consolas"/>
+                <a:ea typeface="Consolas"/>
+                <a:cs typeface="Consolas"/>
+              </a:rPr>
+              <a:t>RUN apt-get update \</a:t>
+            </a:r>
+          </a:p>
+          <a:p>
+            <a:pPr>
+              <a:defRPr sz="1275" b="0">
+                <a:solidFill>
+                  <a:srgbClr val="EEEEEE"/>
+                </a:solidFill>
+                <a:latin typeface="Consolas"/>
+                <a:ea typeface="Consolas"/>
+                <a:cs typeface="Consolas"/>
+              </a:defRPr>
+            </a:pPr>
+            <a:r>
+              <a:rPr lang="fr-FR" sz="1000" b="0" dirty="0">
+                <a:solidFill>
+                  <a:srgbClr val="EEEEEE"/>
+                </a:solidFill>
+                <a:latin typeface="Consolas"/>
+                <a:ea typeface="Consolas"/>
+                <a:cs typeface="Consolas"/>
+              </a:rPr>
+              <a:t>    &amp;&amp; apt-get </a:t>
+            </a:r>
+            <a:r>
+              <a:rPr lang="fr-FR" sz="1000" b="0" dirty="0" err="1">
+                <a:solidFill>
+                  <a:srgbClr val="EEEEEE"/>
+                </a:solidFill>
+                <a:latin typeface="Consolas"/>
+                <a:ea typeface="Consolas"/>
+                <a:cs typeface="Consolas"/>
+              </a:rPr>
+              <a:t>install</a:t>
+            </a:r>
+            <a:r>
+              <a:rPr lang="fr-FR" sz="1000" b="0" dirty="0">
+                <a:solidFill>
+                  <a:srgbClr val="EEEEEE"/>
+                </a:solidFill>
+                <a:latin typeface="Consolas"/>
+                <a:ea typeface="Consolas"/>
+                <a:cs typeface="Consolas"/>
+              </a:rPr>
+              <a:t> -y --no-</a:t>
+            </a:r>
+            <a:r>
+              <a:rPr lang="fr-FR" sz="1000" b="0" dirty="0" err="1">
+                <a:solidFill>
+                  <a:srgbClr val="EEEEEE"/>
+                </a:solidFill>
+                <a:latin typeface="Consolas"/>
+                <a:ea typeface="Consolas"/>
+                <a:cs typeface="Consolas"/>
+              </a:rPr>
+              <a:t>install</a:t>
+            </a:r>
+            <a:r>
+              <a:rPr lang="fr-FR" sz="1000" b="0" dirty="0">
+                <a:solidFill>
+                  <a:srgbClr val="EEEEEE"/>
+                </a:solidFill>
+                <a:latin typeface="Consolas"/>
+                <a:ea typeface="Consolas"/>
+                <a:cs typeface="Consolas"/>
+              </a:rPr>
+              <a:t>-</a:t>
+            </a:r>
+            <a:r>
+              <a:rPr lang="fr-FR" sz="1000" b="0" dirty="0" err="1">
+                <a:solidFill>
+                  <a:srgbClr val="EEEEEE"/>
+                </a:solidFill>
+                <a:latin typeface="Consolas"/>
+                <a:ea typeface="Consolas"/>
+                <a:cs typeface="Consolas"/>
+              </a:rPr>
+              <a:t>recommends</a:t>
+            </a:r>
+            <a:r>
+              <a:rPr lang="fr-FR" sz="1000" b="0" dirty="0">
+                <a:solidFill>
+                  <a:srgbClr val="EEEEEE"/>
+                </a:solidFill>
+                <a:latin typeface="Consolas"/>
+                <a:ea typeface="Consolas"/>
+                <a:cs typeface="Consolas"/>
+              </a:rPr>
+              <a:t> openjdk-17-jre-headless \</a:t>
+            </a:r>
+          </a:p>
+          <a:p>
+            <a:pPr>
+              <a:defRPr sz="1275" b="0">
+                <a:solidFill>
+                  <a:srgbClr val="EEEEEE"/>
+                </a:solidFill>
+                <a:latin typeface="Consolas"/>
+                <a:ea typeface="Consolas"/>
+                <a:cs typeface="Consolas"/>
+              </a:defRPr>
+            </a:pPr>
+            <a:r>
+              <a:rPr lang="fr-FR" sz="1000" b="0" dirty="0">
+                <a:solidFill>
+                  <a:srgbClr val="EEEEEE"/>
+                </a:solidFill>
+                <a:latin typeface="Consolas"/>
+                <a:ea typeface="Consolas"/>
+                <a:cs typeface="Consolas"/>
+              </a:rPr>
+              <a:t>    &amp;&amp; ln -s "$(</a:t>
+            </a:r>
+            <a:r>
+              <a:rPr lang="fr-FR" sz="1000" b="0" dirty="0" err="1">
+                <a:solidFill>
+                  <a:srgbClr val="EEEEEE"/>
+                </a:solidFill>
+                <a:latin typeface="Consolas"/>
+                <a:ea typeface="Consolas"/>
+                <a:cs typeface="Consolas"/>
+              </a:rPr>
+              <a:t>dirname</a:t>
+            </a:r>
+            <a:r>
+              <a:rPr lang="fr-FR" sz="1000" b="0" dirty="0">
+                <a:solidFill>
+                  <a:srgbClr val="EEEEEE"/>
+                </a:solidFill>
+                <a:latin typeface="Consolas"/>
+                <a:ea typeface="Consolas"/>
+                <a:cs typeface="Consolas"/>
+              </a:rPr>
+              <a:t> "$(</a:t>
+            </a:r>
+            <a:r>
+              <a:rPr lang="fr-FR" sz="1000" b="0" dirty="0" err="1">
+                <a:solidFill>
+                  <a:srgbClr val="EEEEEE"/>
+                </a:solidFill>
+                <a:latin typeface="Consolas"/>
+                <a:ea typeface="Consolas"/>
+                <a:cs typeface="Consolas"/>
+              </a:rPr>
+              <a:t>dirname</a:t>
+            </a:r>
+            <a:r>
+              <a:rPr lang="fr-FR" sz="1000" b="0" dirty="0">
+                <a:solidFill>
+                  <a:srgbClr val="EEEEEE"/>
+                </a:solidFill>
+                <a:latin typeface="Consolas"/>
+                <a:ea typeface="Consolas"/>
+                <a:cs typeface="Consolas"/>
+              </a:rPr>
+              <a:t> "$(</a:t>
+            </a:r>
+            <a:r>
+              <a:rPr lang="fr-FR" sz="1000" b="0" dirty="0" err="1">
+                <a:solidFill>
+                  <a:srgbClr val="EEEEEE"/>
+                </a:solidFill>
+                <a:latin typeface="Consolas"/>
+                <a:ea typeface="Consolas"/>
+                <a:cs typeface="Consolas"/>
+              </a:rPr>
+              <a:t>readlink</a:t>
+            </a:r>
+            <a:r>
+              <a:rPr lang="fr-FR" sz="1000" b="0" dirty="0">
+                <a:solidFill>
+                  <a:srgbClr val="EEEEEE"/>
+                </a:solidFill>
+                <a:latin typeface="Consolas"/>
+                <a:ea typeface="Consolas"/>
+                <a:cs typeface="Consolas"/>
+              </a:rPr>
+              <a:t> -f /</a:t>
+            </a:r>
+            <a:r>
+              <a:rPr lang="fr-FR" sz="1000" b="0" dirty="0" err="1">
+                <a:solidFill>
+                  <a:srgbClr val="EEEEEE"/>
+                </a:solidFill>
+                <a:latin typeface="Consolas"/>
+                <a:ea typeface="Consolas"/>
+                <a:cs typeface="Consolas"/>
+              </a:rPr>
+              <a:t>usr</a:t>
+            </a:r>
+            <a:r>
+              <a:rPr lang="fr-FR" sz="1000" b="0" dirty="0">
+                <a:solidFill>
+                  <a:srgbClr val="EEEEEE"/>
+                </a:solidFill>
+                <a:latin typeface="Consolas"/>
+                <a:ea typeface="Consolas"/>
+                <a:cs typeface="Consolas"/>
+              </a:rPr>
+              <a:t>/bin/java)")")" /</a:t>
+            </a:r>
+            <a:r>
+              <a:rPr lang="fr-FR" sz="1000" b="0" dirty="0" err="1">
+                <a:solidFill>
+                  <a:srgbClr val="EEEEEE"/>
+                </a:solidFill>
+                <a:latin typeface="Consolas"/>
+                <a:ea typeface="Consolas"/>
+                <a:cs typeface="Consolas"/>
+              </a:rPr>
+              <a:t>opt</a:t>
+            </a:r>
+            <a:r>
+              <a:rPr lang="fr-FR" sz="1000" b="0" dirty="0">
+                <a:solidFill>
+                  <a:srgbClr val="EEEEEE"/>
+                </a:solidFill>
+                <a:latin typeface="Consolas"/>
+                <a:ea typeface="Consolas"/>
+                <a:cs typeface="Consolas"/>
+              </a:rPr>
+              <a:t>/java-home \</a:t>
+            </a:r>
+          </a:p>
+          <a:p>
+            <a:pPr>
+              <a:defRPr sz="1275" b="0">
+                <a:solidFill>
+                  <a:srgbClr val="EEEEEE"/>
+                </a:solidFill>
+                <a:latin typeface="Consolas"/>
+                <a:ea typeface="Consolas"/>
+                <a:cs typeface="Consolas"/>
+              </a:defRPr>
+            </a:pPr>
+            <a:r>
+              <a:rPr lang="fr-FR" sz="1000" b="0" dirty="0">
+                <a:solidFill>
+                  <a:srgbClr val="EEEEEE"/>
+                </a:solidFill>
+                <a:latin typeface="Consolas"/>
+                <a:ea typeface="Consolas"/>
+                <a:cs typeface="Consolas"/>
+              </a:rPr>
+              <a:t>    &amp;&amp; </a:t>
+            </a:r>
+            <a:r>
+              <a:rPr lang="fr-FR" sz="1000" b="0" dirty="0" err="1">
+                <a:solidFill>
+                  <a:srgbClr val="EEEEEE"/>
+                </a:solidFill>
+                <a:latin typeface="Consolas"/>
+                <a:ea typeface="Consolas"/>
+                <a:cs typeface="Consolas"/>
+              </a:rPr>
+              <a:t>rm</a:t>
+            </a:r>
+            <a:r>
+              <a:rPr lang="fr-FR" sz="1000" b="0" dirty="0">
+                <a:solidFill>
+                  <a:srgbClr val="EEEEEE"/>
+                </a:solidFill>
+                <a:latin typeface="Consolas"/>
+                <a:ea typeface="Consolas"/>
+                <a:cs typeface="Consolas"/>
+              </a:rPr>
+              <a:t> -</a:t>
+            </a:r>
+            <a:r>
+              <a:rPr lang="fr-FR" sz="1000" b="0" dirty="0" err="1">
+                <a:solidFill>
+                  <a:srgbClr val="EEEEEE"/>
+                </a:solidFill>
+                <a:latin typeface="Consolas"/>
+                <a:ea typeface="Consolas"/>
+                <a:cs typeface="Consolas"/>
+              </a:rPr>
+              <a:t>rf</a:t>
+            </a:r>
+            <a:r>
+              <a:rPr lang="fr-FR" sz="1000" b="0" dirty="0">
+                <a:solidFill>
+                  <a:srgbClr val="EEEEEE"/>
+                </a:solidFill>
+                <a:latin typeface="Consolas"/>
+                <a:ea typeface="Consolas"/>
+                <a:cs typeface="Consolas"/>
+              </a:rPr>
+              <a:t> /var/lib/</a:t>
+            </a:r>
+            <a:r>
+              <a:rPr lang="fr-FR" sz="1000" b="0" dirty="0" err="1">
+                <a:solidFill>
+                  <a:srgbClr val="EEEEEE"/>
+                </a:solidFill>
+                <a:latin typeface="Consolas"/>
+                <a:ea typeface="Consolas"/>
+                <a:cs typeface="Consolas"/>
+              </a:rPr>
+              <a:t>apt</a:t>
+            </a:r>
+            <a:r>
+              <a:rPr lang="fr-FR" sz="1000" b="0" dirty="0">
+                <a:solidFill>
+                  <a:srgbClr val="EEEEEE"/>
+                </a:solidFill>
+                <a:latin typeface="Consolas"/>
+                <a:ea typeface="Consolas"/>
+                <a:cs typeface="Consolas"/>
+              </a:rPr>
+              <a:t>/</a:t>
+            </a:r>
+            <a:r>
+              <a:rPr lang="fr-FR" sz="1000" b="0" dirty="0" err="1">
+                <a:solidFill>
+                  <a:srgbClr val="EEEEEE"/>
+                </a:solidFill>
+                <a:latin typeface="Consolas"/>
+                <a:ea typeface="Consolas"/>
+                <a:cs typeface="Consolas"/>
+              </a:rPr>
+              <a:t>lists</a:t>
+            </a:r>
+            <a:r>
+              <a:rPr lang="fr-FR" sz="1000" b="0" dirty="0">
+                <a:solidFill>
+                  <a:srgbClr val="EEEEEE"/>
+                </a:solidFill>
+                <a:latin typeface="Consolas"/>
+                <a:ea typeface="Consolas"/>
+                <a:cs typeface="Consolas"/>
+              </a:rPr>
+              <a:t>/*</a:t>
+            </a:r>
+          </a:p>
+          <a:p>
+            <a:pPr>
+              <a:defRPr sz="1275" b="0">
+                <a:solidFill>
+                  <a:srgbClr val="EEEEEE"/>
+                </a:solidFill>
+                <a:latin typeface="Consolas"/>
+                <a:ea typeface="Consolas"/>
+                <a:cs typeface="Consolas"/>
+              </a:defRPr>
+            </a:pPr>
+            <a:endParaRPr lang="fr-FR" sz="1000" b="0" dirty="0">
+              <a:solidFill>
+                <a:srgbClr val="EEEEEE"/>
+              </a:solidFill>
+              <a:latin typeface="Consolas"/>
+              <a:ea typeface="Consolas"/>
+              <a:cs typeface="Consolas"/>
+            </a:endParaRPr>
+          </a:p>
+          <a:p>
+            <a:pPr>
+              <a:defRPr sz="1275" b="0">
+                <a:solidFill>
+                  <a:srgbClr val="EEEEEE"/>
+                </a:solidFill>
+                <a:latin typeface="Consolas"/>
+                <a:ea typeface="Consolas"/>
+                <a:cs typeface="Consolas"/>
+              </a:defRPr>
+            </a:pPr>
+            <a:r>
+              <a:rPr lang="fr-FR" sz="1000" b="0" dirty="0">
+                <a:solidFill>
+                  <a:srgbClr val="EEEEEE"/>
+                </a:solidFill>
+                <a:latin typeface="Consolas"/>
+                <a:ea typeface="Consolas"/>
+                <a:cs typeface="Consolas"/>
+              </a:rPr>
+              <a:t>ENV JAVA_HOME=/</a:t>
+            </a:r>
+            <a:r>
+              <a:rPr lang="fr-FR" sz="1000" b="0" dirty="0" err="1">
+                <a:solidFill>
+                  <a:srgbClr val="EEEEEE"/>
+                </a:solidFill>
+                <a:latin typeface="Consolas"/>
+                <a:ea typeface="Consolas"/>
+                <a:cs typeface="Consolas"/>
+              </a:rPr>
+              <a:t>opt</a:t>
+            </a:r>
+            <a:r>
+              <a:rPr lang="fr-FR" sz="1000" b="0" dirty="0">
+                <a:solidFill>
+                  <a:srgbClr val="EEEEEE"/>
+                </a:solidFill>
+                <a:latin typeface="Consolas"/>
+                <a:ea typeface="Consolas"/>
+                <a:cs typeface="Consolas"/>
+              </a:rPr>
+              <a:t>/java-home</a:t>
+            </a:r>
+          </a:p>
+          <a:p>
+            <a:pPr>
+              <a:defRPr sz="1275" b="0">
+                <a:solidFill>
+                  <a:srgbClr val="EEEEEE"/>
+                </a:solidFill>
+                <a:latin typeface="Consolas"/>
+                <a:ea typeface="Consolas"/>
+                <a:cs typeface="Consolas"/>
+              </a:defRPr>
+            </a:pPr>
+            <a:endParaRPr lang="fr-FR" sz="1000" b="0" dirty="0">
+              <a:solidFill>
+                <a:srgbClr val="EEEEEE"/>
+              </a:solidFill>
+              <a:latin typeface="Consolas"/>
+              <a:ea typeface="Consolas"/>
+              <a:cs typeface="Consolas"/>
+            </a:endParaRPr>
+          </a:p>
+          <a:p>
+            <a:pPr>
+              <a:defRPr sz="1275" b="0">
+                <a:solidFill>
+                  <a:srgbClr val="EEEEEE"/>
+                </a:solidFill>
+                <a:latin typeface="Consolas"/>
+                <a:ea typeface="Consolas"/>
+                <a:cs typeface="Consolas"/>
+              </a:defRPr>
+            </a:pPr>
+            <a:r>
+              <a:rPr lang="fr-FR" sz="1000" b="0" dirty="0">
+                <a:solidFill>
+                  <a:srgbClr val="EEEEEE"/>
+                </a:solidFill>
+                <a:latin typeface="Consolas"/>
+                <a:ea typeface="Consolas"/>
+                <a:cs typeface="Consolas"/>
+              </a:rPr>
+              <a:t>USER ${NB_UID}</a:t>
+            </a:r>
+          </a:p>
+          <a:p>
+            <a:pPr>
+              <a:defRPr sz="1275" b="0">
+                <a:solidFill>
+                  <a:srgbClr val="EEEEEE"/>
+                </a:solidFill>
+                <a:latin typeface="Consolas"/>
+                <a:ea typeface="Consolas"/>
+                <a:cs typeface="Consolas"/>
+              </a:defRPr>
+            </a:pPr>
+            <a:endParaRPr lang="fr-FR" sz="1000" b="0" dirty="0">
+              <a:solidFill>
+                <a:srgbClr val="EEEEEE"/>
+              </a:solidFill>
+              <a:latin typeface="Consolas"/>
+              <a:ea typeface="Consolas"/>
+              <a:cs typeface="Consolas"/>
+            </a:endParaRPr>
+          </a:p>
+          <a:p>
+            <a:pPr>
+              <a:defRPr sz="1275" b="0">
+                <a:solidFill>
+                  <a:srgbClr val="EEEEEE"/>
+                </a:solidFill>
+                <a:latin typeface="Consolas"/>
+                <a:ea typeface="Consolas"/>
+                <a:cs typeface="Consolas"/>
+              </a:defRPr>
+            </a:pPr>
+            <a:r>
+              <a:rPr lang="fr-FR" sz="1000" b="0" dirty="0">
+                <a:solidFill>
+                  <a:srgbClr val="EEEEEE"/>
+                </a:solidFill>
+                <a:latin typeface="Consolas"/>
+                <a:ea typeface="Consolas"/>
+                <a:cs typeface="Consolas"/>
+              </a:rPr>
+              <a:t># Vérifier que l'image de base utilise bien Python 3.11</a:t>
+            </a:r>
+          </a:p>
+          <a:p>
+            <a:pPr>
+              <a:defRPr sz="1275" b="0">
+                <a:solidFill>
+                  <a:srgbClr val="EEEEEE"/>
+                </a:solidFill>
+                <a:latin typeface="Consolas"/>
+                <a:ea typeface="Consolas"/>
+                <a:cs typeface="Consolas"/>
+              </a:defRPr>
+            </a:pPr>
+            <a:r>
+              <a:rPr lang="fr-FR" sz="1000" b="0" dirty="0">
+                <a:solidFill>
+                  <a:srgbClr val="EEEEEE"/>
+                </a:solidFill>
+                <a:latin typeface="Consolas"/>
+                <a:ea typeface="Consolas"/>
+                <a:cs typeface="Consolas"/>
+              </a:rPr>
+              <a:t>RUN python -c "import </a:t>
+            </a:r>
+            <a:r>
+              <a:rPr lang="fr-FR" sz="1000" b="0" dirty="0" err="1">
+                <a:solidFill>
+                  <a:srgbClr val="EEEEEE"/>
+                </a:solidFill>
+                <a:latin typeface="Consolas"/>
+                <a:ea typeface="Consolas"/>
+                <a:cs typeface="Consolas"/>
+              </a:rPr>
+              <a:t>sys</a:t>
+            </a:r>
+            <a:r>
+              <a:rPr lang="fr-FR" sz="1000" b="0" dirty="0">
+                <a:solidFill>
+                  <a:srgbClr val="EEEEEE"/>
+                </a:solidFill>
+                <a:latin typeface="Consolas"/>
+                <a:ea typeface="Consolas"/>
+                <a:cs typeface="Consolas"/>
+              </a:rPr>
+              <a:t>; </a:t>
+            </a:r>
+            <a:r>
+              <a:rPr lang="fr-FR" sz="1000" b="0" dirty="0" err="1">
+                <a:solidFill>
+                  <a:srgbClr val="EEEEEE"/>
+                </a:solidFill>
+                <a:latin typeface="Consolas"/>
+                <a:ea typeface="Consolas"/>
+                <a:cs typeface="Consolas"/>
+              </a:rPr>
+              <a:t>assert</a:t>
+            </a:r>
+            <a:r>
+              <a:rPr lang="fr-FR" sz="1000" b="0" dirty="0">
+                <a:solidFill>
+                  <a:srgbClr val="EEEEEE"/>
+                </a:solidFill>
+                <a:latin typeface="Consolas"/>
+                <a:ea typeface="Consolas"/>
+                <a:cs typeface="Consolas"/>
+              </a:rPr>
+              <a:t> </a:t>
+            </a:r>
+            <a:r>
+              <a:rPr lang="fr-FR" sz="1000" b="0" dirty="0" err="1">
+                <a:solidFill>
+                  <a:srgbClr val="EEEEEE"/>
+                </a:solidFill>
+                <a:latin typeface="Consolas"/>
+                <a:ea typeface="Consolas"/>
+                <a:cs typeface="Consolas"/>
+              </a:rPr>
+              <a:t>sys.version_info</a:t>
+            </a:r>
+            <a:r>
+              <a:rPr lang="fr-FR" sz="1000" b="0" dirty="0">
+                <a:solidFill>
+                  <a:srgbClr val="EEEEEE"/>
+                </a:solidFill>
+                <a:latin typeface="Consolas"/>
+                <a:ea typeface="Consolas"/>
+                <a:cs typeface="Consolas"/>
+              </a:rPr>
+              <a:t>[:2] == (3, 11), </a:t>
+            </a:r>
+            <a:r>
+              <a:rPr lang="fr-FR" sz="1000" b="0" dirty="0" err="1">
+                <a:solidFill>
+                  <a:srgbClr val="EEEEEE"/>
+                </a:solidFill>
+                <a:latin typeface="Consolas"/>
+                <a:ea typeface="Consolas"/>
+                <a:cs typeface="Consolas"/>
+              </a:rPr>
+              <a:t>sys.version</a:t>
+            </a:r>
+            <a:r>
+              <a:rPr lang="fr-FR" sz="1000" b="0" dirty="0">
+                <a:solidFill>
+                  <a:srgbClr val="EEEEEE"/>
+                </a:solidFill>
+                <a:latin typeface="Consolas"/>
+                <a:ea typeface="Consolas"/>
+                <a:cs typeface="Consolas"/>
+              </a:rPr>
+              <a:t>"</a:t>
+            </a:r>
+          </a:p>
+          <a:p>
+            <a:pPr>
+              <a:defRPr sz="1275" b="0">
+                <a:solidFill>
+                  <a:srgbClr val="EEEEEE"/>
+                </a:solidFill>
+                <a:latin typeface="Consolas"/>
+                <a:ea typeface="Consolas"/>
+                <a:cs typeface="Consolas"/>
+              </a:defRPr>
+            </a:pPr>
+            <a:endParaRPr lang="fr-FR" sz="1000" b="0" dirty="0">
+              <a:solidFill>
+                <a:srgbClr val="EEEEEE"/>
+              </a:solidFill>
+              <a:latin typeface="Consolas"/>
+              <a:ea typeface="Consolas"/>
+              <a:cs typeface="Consolas"/>
+            </a:endParaRPr>
+          </a:p>
+          <a:p>
+            <a:pPr>
+              <a:defRPr sz="1275" b="0">
+                <a:solidFill>
+                  <a:srgbClr val="EEEEEE"/>
+                </a:solidFill>
+                <a:latin typeface="Consolas"/>
+                <a:ea typeface="Consolas"/>
+                <a:cs typeface="Consolas"/>
+              </a:defRPr>
+            </a:pPr>
+            <a:r>
+              <a:rPr lang="fr-FR" sz="1000" b="0" dirty="0">
+                <a:solidFill>
+                  <a:srgbClr val="EEEEEE"/>
+                </a:solidFill>
+                <a:latin typeface="Consolas"/>
+                <a:ea typeface="Consolas"/>
+                <a:cs typeface="Consolas"/>
+              </a:rPr>
+              <a:t>RUN python -m </a:t>
+            </a:r>
+            <a:r>
+              <a:rPr lang="fr-FR" sz="1000" b="0" dirty="0" err="1">
+                <a:solidFill>
+                  <a:srgbClr val="EEEEEE"/>
+                </a:solidFill>
+                <a:latin typeface="Consolas"/>
+                <a:ea typeface="Consolas"/>
+                <a:cs typeface="Consolas"/>
+              </a:rPr>
+              <a:t>pip</a:t>
+            </a:r>
+            <a:r>
+              <a:rPr lang="fr-FR" sz="1000" b="0" dirty="0">
+                <a:solidFill>
+                  <a:srgbClr val="EEEEEE"/>
+                </a:solidFill>
+                <a:latin typeface="Consolas"/>
+                <a:ea typeface="Consolas"/>
+                <a:cs typeface="Consolas"/>
+              </a:rPr>
+              <a:t> </a:t>
+            </a:r>
+            <a:r>
+              <a:rPr lang="fr-FR" sz="1000" b="0" dirty="0" err="1">
+                <a:solidFill>
+                  <a:srgbClr val="EEEEEE"/>
+                </a:solidFill>
+                <a:latin typeface="Consolas"/>
+                <a:ea typeface="Consolas"/>
+                <a:cs typeface="Consolas"/>
+              </a:rPr>
+              <a:t>install</a:t>
+            </a:r>
+            <a:r>
+              <a:rPr lang="fr-FR" sz="1000" b="0" dirty="0">
+                <a:solidFill>
+                  <a:srgbClr val="EEEEEE"/>
+                </a:solidFill>
+                <a:latin typeface="Consolas"/>
+                <a:ea typeface="Consolas"/>
+                <a:cs typeface="Consolas"/>
+              </a:rPr>
+              <a:t> --no-cache-</a:t>
+            </a:r>
+            <a:r>
+              <a:rPr lang="fr-FR" sz="1000" b="0" dirty="0" err="1">
+                <a:solidFill>
+                  <a:srgbClr val="EEEEEE"/>
+                </a:solidFill>
+                <a:latin typeface="Consolas"/>
+                <a:ea typeface="Consolas"/>
+                <a:cs typeface="Consolas"/>
+              </a:rPr>
+              <a:t>dir</a:t>
+            </a:r>
+            <a:r>
+              <a:rPr lang="fr-FR" sz="1000" b="0" dirty="0">
+                <a:solidFill>
+                  <a:srgbClr val="EEEEEE"/>
+                </a:solidFill>
+                <a:latin typeface="Consolas"/>
+                <a:ea typeface="Consolas"/>
+                <a:cs typeface="Consolas"/>
+              </a:rPr>
+              <a:t> \</a:t>
+            </a:r>
+          </a:p>
+          <a:p>
+            <a:pPr>
+              <a:defRPr sz="1275" b="0">
+                <a:solidFill>
+                  <a:srgbClr val="EEEEEE"/>
+                </a:solidFill>
+                <a:latin typeface="Consolas"/>
+                <a:ea typeface="Consolas"/>
+                <a:cs typeface="Consolas"/>
+              </a:defRPr>
+            </a:pPr>
+            <a:r>
+              <a:rPr lang="fr-FR" sz="1000" b="0" dirty="0">
+                <a:solidFill>
+                  <a:srgbClr val="EEEEEE"/>
+                </a:solidFill>
+                <a:latin typeface="Consolas"/>
+                <a:ea typeface="Consolas"/>
+                <a:cs typeface="Consolas"/>
+              </a:rPr>
+              <a:t>    </a:t>
+            </a:r>
+            <a:r>
+              <a:rPr lang="fr-FR" sz="1000" b="0" dirty="0" err="1">
+                <a:solidFill>
+                  <a:srgbClr val="EEEEEE"/>
+                </a:solidFill>
+                <a:latin typeface="Consolas"/>
+                <a:ea typeface="Consolas"/>
+                <a:cs typeface="Consolas"/>
+              </a:rPr>
+              <a:t>pyspark</a:t>
+            </a:r>
+            <a:r>
+              <a:rPr lang="fr-FR" sz="1000" b="0" dirty="0">
+                <a:solidFill>
+                  <a:srgbClr val="EEEEEE"/>
+                </a:solidFill>
+                <a:latin typeface="Consolas"/>
+                <a:ea typeface="Consolas"/>
+                <a:cs typeface="Consolas"/>
+              </a:rPr>
+              <a:t>==3.5.6 \</a:t>
+            </a:r>
+          </a:p>
+          <a:p>
+            <a:pPr>
+              <a:defRPr sz="1275" b="0">
+                <a:solidFill>
+                  <a:srgbClr val="EEEEEE"/>
+                </a:solidFill>
+                <a:latin typeface="Consolas"/>
+                <a:ea typeface="Consolas"/>
+                <a:cs typeface="Consolas"/>
+              </a:defRPr>
+            </a:pPr>
+            <a:r>
+              <a:rPr lang="fr-FR" sz="1000" b="0" dirty="0">
+                <a:solidFill>
+                  <a:srgbClr val="EEEEEE"/>
+                </a:solidFill>
+                <a:latin typeface="Consolas"/>
+                <a:ea typeface="Consolas"/>
+                <a:cs typeface="Consolas"/>
+              </a:rPr>
+              <a:t>    </a:t>
+            </a:r>
+            <a:r>
+              <a:rPr lang="fr-FR" sz="1000" b="0" dirty="0" err="1">
+                <a:solidFill>
+                  <a:srgbClr val="EEEEEE"/>
+                </a:solidFill>
+                <a:latin typeface="Consolas"/>
+                <a:ea typeface="Consolas"/>
+                <a:cs typeface="Consolas"/>
+              </a:rPr>
+              <a:t>kafka</a:t>
+            </a:r>
+            <a:r>
+              <a:rPr lang="fr-FR" sz="1000" b="0" dirty="0">
+                <a:solidFill>
+                  <a:srgbClr val="EEEEEE"/>
+                </a:solidFill>
+                <a:latin typeface="Consolas"/>
+                <a:ea typeface="Consolas"/>
+                <a:cs typeface="Consolas"/>
+              </a:rPr>
+              <a:t>-python \</a:t>
+            </a:r>
+          </a:p>
+          <a:p>
+            <a:pPr>
+              <a:defRPr sz="1275" b="0">
+                <a:solidFill>
+                  <a:srgbClr val="EEEEEE"/>
+                </a:solidFill>
+                <a:latin typeface="Consolas"/>
+                <a:ea typeface="Consolas"/>
+                <a:cs typeface="Consolas"/>
+              </a:defRPr>
+            </a:pPr>
+            <a:r>
+              <a:rPr lang="fr-FR" sz="1000" b="0" dirty="0">
+                <a:solidFill>
+                  <a:srgbClr val="EEEEEE"/>
+                </a:solidFill>
+                <a:latin typeface="Consolas"/>
+                <a:ea typeface="Consolas"/>
+                <a:cs typeface="Consolas"/>
+              </a:rPr>
+              <a:t>    </a:t>
+            </a:r>
+            <a:r>
+              <a:rPr lang="fr-FR" sz="1000" b="0" dirty="0" err="1">
+                <a:solidFill>
+                  <a:srgbClr val="EEEEEE"/>
+                </a:solidFill>
+                <a:latin typeface="Consolas"/>
+                <a:ea typeface="Consolas"/>
+                <a:cs typeface="Consolas"/>
+              </a:rPr>
+              <a:t>fastapi</a:t>
+            </a:r>
+            <a:r>
+              <a:rPr lang="fr-FR" sz="1000" b="0" dirty="0">
+                <a:solidFill>
+                  <a:srgbClr val="EEEEEE"/>
+                </a:solidFill>
+                <a:latin typeface="Consolas"/>
+                <a:ea typeface="Consolas"/>
+                <a:cs typeface="Consolas"/>
+              </a:rPr>
+              <a:t> \</a:t>
+            </a:r>
+          </a:p>
+          <a:p>
+            <a:pPr>
+              <a:defRPr sz="1275" b="0">
+                <a:solidFill>
+                  <a:srgbClr val="EEEEEE"/>
+                </a:solidFill>
+                <a:latin typeface="Consolas"/>
+                <a:ea typeface="Consolas"/>
+                <a:cs typeface="Consolas"/>
+              </a:defRPr>
+            </a:pPr>
+            <a:r>
+              <a:rPr lang="fr-FR" sz="1000" b="0" dirty="0">
+                <a:solidFill>
+                  <a:srgbClr val="EEEEEE"/>
+                </a:solidFill>
+                <a:latin typeface="Consolas"/>
+                <a:ea typeface="Consolas"/>
+                <a:cs typeface="Consolas"/>
+              </a:rPr>
+              <a:t>    </a:t>
+            </a:r>
+            <a:r>
+              <a:rPr lang="fr-FR" sz="1000" b="0" dirty="0" err="1">
+                <a:solidFill>
+                  <a:srgbClr val="EEEEEE"/>
+                </a:solidFill>
+                <a:latin typeface="Consolas"/>
+                <a:ea typeface="Consolas"/>
+                <a:cs typeface="Consolas"/>
+              </a:rPr>
+              <a:t>uvicorn</a:t>
+            </a:r>
+            <a:r>
+              <a:rPr lang="fr-FR" sz="1000" b="0" dirty="0">
+                <a:solidFill>
+                  <a:srgbClr val="EEEEEE"/>
+                </a:solidFill>
+                <a:latin typeface="Consolas"/>
+                <a:ea typeface="Consolas"/>
+                <a:cs typeface="Consolas"/>
+              </a:rPr>
+              <a:t> \</a:t>
+            </a:r>
+          </a:p>
+          <a:p>
+            <a:pPr>
+              <a:defRPr sz="1275" b="0">
+                <a:solidFill>
+                  <a:srgbClr val="EEEEEE"/>
+                </a:solidFill>
+                <a:latin typeface="Consolas"/>
+                <a:ea typeface="Consolas"/>
+                <a:cs typeface="Consolas"/>
+              </a:defRPr>
+            </a:pPr>
+            <a:r>
+              <a:rPr lang="fr-FR" sz="1000" b="0" dirty="0">
+                <a:solidFill>
+                  <a:srgbClr val="EEEEEE"/>
+                </a:solidFill>
+                <a:latin typeface="Consolas"/>
+                <a:ea typeface="Consolas"/>
+                <a:cs typeface="Consolas"/>
+              </a:rPr>
+              <a:t>    </a:t>
+            </a:r>
+            <a:r>
+              <a:rPr lang="fr-FR" sz="1000" b="0" dirty="0" err="1">
+                <a:solidFill>
+                  <a:srgbClr val="EEEEEE"/>
+                </a:solidFill>
+                <a:latin typeface="Consolas"/>
+                <a:ea typeface="Consolas"/>
+                <a:cs typeface="Consolas"/>
+              </a:rPr>
+              <a:t>joblib</a:t>
+            </a:r>
+            <a:endParaRPr sz="1000" b="0" dirty="0">
+              <a:solidFill>
+                <a:srgbClr val="EEEEEE"/>
+              </a:solidFill>
+              <a:latin typeface="Consolas"/>
+              <a:ea typeface="Consolas"/>
+              <a:cs typeface="Consolas"/>
+            </a:endParaRPr>
           </a:p>
         </p:txBody>
       </p:sp>
@@ -24935,8 +25973,8 @@
         </p:nvSpPr>
         <p:spPr>
           <a:xfrm>
-            <a:off x="809625" y="4505325"/>
-            <a:ext cx="7715250" cy="514350"/>
+            <a:off x="7731706" y="2786635"/>
+            <a:ext cx="1230371" cy="1244385"/>
           </a:xfrm>
           <a:prstGeom prst="rect">
             <a:avLst/>
@@ -24963,7 +26001,7 @@
               </a:defRPr>
             </a:pPr>
             <a:r>
-              <a:rPr sz="1200" b="0">
+              <a:rPr sz="1200" b="0" dirty="0">
                 <a:solidFill>
                   <a:srgbClr val="555555"/>
                 </a:solidFill>
@@ -24971,7 +26009,73 @@
                 <a:ea typeface="Calibri"/>
                 <a:cs typeface="Calibri"/>
               </a:rPr>
-              <a:t>Construction avec accès Internet. Pour figer aussi la base, conserver son digest.</a:t>
+              <a:t>Construction avec </a:t>
+            </a:r>
+            <a:r>
+              <a:rPr sz="1200" b="0" dirty="0" err="1">
+                <a:solidFill>
+                  <a:srgbClr val="555555"/>
+                </a:solidFill>
+                <a:latin typeface="Calibri"/>
+                <a:ea typeface="Calibri"/>
+                <a:cs typeface="Calibri"/>
+              </a:rPr>
+              <a:t>accès</a:t>
+            </a:r>
+            <a:r>
+              <a:rPr sz="1200" b="0" dirty="0">
+                <a:solidFill>
+                  <a:srgbClr val="555555"/>
+                </a:solidFill>
+                <a:latin typeface="Calibri"/>
+                <a:ea typeface="Calibri"/>
+                <a:cs typeface="Calibri"/>
+              </a:rPr>
+              <a:t> Internet. Pour </a:t>
+            </a:r>
+            <a:r>
+              <a:rPr sz="1200" b="0" dirty="0" err="1">
+                <a:solidFill>
+                  <a:srgbClr val="555555"/>
+                </a:solidFill>
+                <a:latin typeface="Calibri"/>
+                <a:ea typeface="Calibri"/>
+                <a:cs typeface="Calibri"/>
+              </a:rPr>
+              <a:t>figer</a:t>
+            </a:r>
+            <a:r>
+              <a:rPr sz="1200" b="0" dirty="0">
+                <a:solidFill>
+                  <a:srgbClr val="555555"/>
+                </a:solidFill>
+                <a:latin typeface="Calibri"/>
+                <a:ea typeface="Calibri"/>
+                <a:cs typeface="Calibri"/>
+              </a:rPr>
+              <a:t> </a:t>
+            </a:r>
+            <a:r>
+              <a:rPr sz="1200" b="0" dirty="0" err="1">
+                <a:solidFill>
+                  <a:srgbClr val="555555"/>
+                </a:solidFill>
+                <a:latin typeface="Calibri"/>
+                <a:ea typeface="Calibri"/>
+                <a:cs typeface="Calibri"/>
+              </a:rPr>
+              <a:t>aussi</a:t>
+            </a:r>
+            <a:r>
+              <a:rPr sz="1200" b="0" dirty="0">
+                <a:solidFill>
+                  <a:srgbClr val="555555"/>
+                </a:solidFill>
+                <a:latin typeface="Calibri"/>
+                <a:ea typeface="Calibri"/>
+                <a:cs typeface="Calibri"/>
+              </a:rPr>
+              <a:t> la base, conserver son digest.</a:t>
             </a:r>
           </a:p>
         </p:txBody>
@@ -25995,7 +27099,7 @@
               </a:defRPr>
             </a:pPr>
             <a:r>
-              <a:rPr sz="1275" b="0">
+              <a:rPr lang="fr-FR" sz="1275" b="0" dirty="0">
                 <a:solidFill>
                   <a:srgbClr val="EEEEEE"/>
                 </a:solidFill>
@@ -26003,7 +27107,7 @@
                 <a:ea typeface="Consolas"/>
                 <a:cs typeface="Consolas"/>
               </a:rPr>
-              <a:t>    build:</a:t>
+              <a:t> ml-notebook:</a:t>
             </a:r>
           </a:p>
           <a:p>
@@ -26018,7 +27122,7 @@
               </a:defRPr>
             </a:pPr>
             <a:r>
-              <a:rPr sz="1275" b="0">
+              <a:rPr lang="fr-FR" sz="1275" b="0" dirty="0">
                 <a:solidFill>
                   <a:srgbClr val="EEEEEE"/>
                 </a:solidFill>
@@ -26026,7 +27130,29 @@
                 <a:ea typeface="Consolas"/>
                 <a:cs typeface="Consolas"/>
               </a:rPr>
-              <a:t>      context: .</a:t>
+              <a:t>    </a:t>
+            </a:r>
+            <a:r>
+              <a:rPr lang="fr-FR" sz="1275" b="0" dirty="0" err="1">
+                <a:solidFill>
+                  <a:srgbClr val="EEEEEE"/>
+                </a:solidFill>
+                <a:latin typeface="Consolas"/>
+                <a:ea typeface="Consolas"/>
+                <a:cs typeface="Consolas"/>
+              </a:rPr>
+              <a:t>build</a:t>
+            </a:r>
+            <a:r>
+              <a:rPr lang="fr-FR" sz="1275" b="0" dirty="0">
+                <a:solidFill>
+                  <a:srgbClr val="EEEEEE"/>
+                </a:solidFill>
+                <a:latin typeface="Consolas"/>
+                <a:ea typeface="Consolas"/>
+                <a:cs typeface="Consolas"/>
+              </a:rPr>
+              <a:t>:</a:t>
             </a:r>
           </a:p>
           <a:p>
@@ -26041,7 +27167,7 @@
               </a:defRPr>
             </a:pPr>
             <a:r>
-              <a:rPr sz="1275" b="0">
+              <a:rPr lang="fr-FR" sz="1275" b="0" dirty="0">
                 <a:solidFill>
                   <a:srgbClr val="EEEEEE"/>
                 </a:solidFill>
@@ -26049,7 +27175,29 @@
                 <a:ea typeface="Consolas"/>
                 <a:cs typeface="Consolas"/>
               </a:rPr>
-              <a:t>      dockerfile: Dockerfile.spark</a:t>
+              <a:t>      </a:t>
+            </a:r>
+            <a:r>
+              <a:rPr lang="fr-FR" sz="1275" b="0" dirty="0" err="1">
+                <a:solidFill>
+                  <a:srgbClr val="EEEEEE"/>
+                </a:solidFill>
+                <a:latin typeface="Consolas"/>
+                <a:ea typeface="Consolas"/>
+                <a:cs typeface="Consolas"/>
+              </a:rPr>
+              <a:t>context</a:t>
+            </a:r>
+            <a:r>
+              <a:rPr lang="fr-FR" sz="1275" b="0" dirty="0">
+                <a:solidFill>
+                  <a:srgbClr val="EEEEEE"/>
+                </a:solidFill>
+                <a:latin typeface="Consolas"/>
+                <a:ea typeface="Consolas"/>
+                <a:cs typeface="Consolas"/>
+              </a:rPr>
+              <a:t>: .</a:t>
             </a:r>
           </a:p>
           <a:p>
@@ -26064,7 +27212,7 @@
               </a:defRPr>
             </a:pPr>
             <a:r>
-              <a:rPr sz="1275" b="0">
+              <a:rPr lang="fr-FR" sz="1275" b="0" dirty="0">
                 <a:solidFill>
                   <a:srgbClr val="EEEEEE"/>
                 </a:solidFill>
@@ -26072,11 +27220,42 @@
                 <a:ea typeface="Consolas"/>
                 <a:cs typeface="Consolas"/>
               </a:rPr>
-              <a:t>    image: mgt/scipy-spark:3.5.6</a:t>
-            </a:r>
-          </a:p>
-          <a:p>
-            <a:endParaRPr sz="1275" b="0">
+              <a:t>      </a:t>
+            </a:r>
+            <a:r>
+              <a:rPr lang="fr-FR" sz="1275" b="0" dirty="0" err="1">
+                <a:solidFill>
+                  <a:srgbClr val="EEEEEE"/>
+                </a:solidFill>
+                <a:latin typeface="Consolas"/>
+                <a:ea typeface="Consolas"/>
+                <a:cs typeface="Consolas"/>
+              </a:rPr>
+              <a:t>dockerfile</a:t>
+            </a:r>
+            <a:r>
+              <a:rPr lang="fr-FR" sz="1275" b="0" dirty="0">
+                <a:solidFill>
+                  <a:srgbClr val="EEEEEE"/>
+                </a:solidFill>
+                <a:latin typeface="Consolas"/>
+                <a:ea typeface="Consolas"/>
+                <a:cs typeface="Consolas"/>
+              </a:rPr>
+              <a:t>: </a:t>
+            </a:r>
+            <a:r>
+              <a:rPr lang="fr-FR" sz="1275" b="0" dirty="0" err="1">
+                <a:solidFill>
+                  <a:srgbClr val="EEEEEE"/>
+                </a:solidFill>
+                <a:latin typeface="Consolas"/>
+                <a:ea typeface="Consolas"/>
+                <a:cs typeface="Consolas"/>
+              </a:rPr>
+              <a:t>Dockerfile.spark</a:t>
+            </a:r>
+            <a:endParaRPr lang="fr-FR" sz="1275" b="0" dirty="0">
               <a:solidFill>
                 <a:srgbClr val="EEEEEE"/>
               </a:solidFill>
@@ -26097,7 +27276,7 @@
               </a:defRPr>
             </a:pPr>
             <a:r>
-              <a:rPr sz="1275" b="0">
+              <a:rPr lang="fr-FR" sz="1275" b="0" dirty="0">
                 <a:solidFill>
                   <a:srgbClr val="EEEEEE"/>
                 </a:solidFill>
@@ -26105,7 +27284,29 @@
                 <a:ea typeface="Consolas"/>
                 <a:cs typeface="Consolas"/>
               </a:rPr>
-              <a:t># Dans le terminal du serveur, répertoire ~/kafka :</a:t>
+              <a:t>    image: </a:t>
+            </a:r>
+            <a:r>
+              <a:rPr lang="fr-FR" sz="1275" b="0" dirty="0" err="1">
+                <a:solidFill>
+                  <a:srgbClr val="EEEEEE"/>
+                </a:solidFill>
+                <a:latin typeface="Consolas"/>
+                <a:ea typeface="Consolas"/>
+                <a:cs typeface="Consolas"/>
+              </a:rPr>
+              <a:t>mgt</a:t>
+            </a:r>
+            <a:r>
+              <a:rPr lang="fr-FR" sz="1275" b="0" dirty="0">
+                <a:solidFill>
+                  <a:srgbClr val="EEEEEE"/>
+                </a:solidFill>
+                <a:latin typeface="Consolas"/>
+                <a:ea typeface="Consolas"/>
+                <a:cs typeface="Consolas"/>
+              </a:rPr>
+              <a:t>/scipy-spark:3.5.6</a:t>
             </a:r>
           </a:p>
           <a:p>
@@ -26119,17 +27320,310 @@
                 <a:cs typeface="Consolas"/>
               </a:defRPr>
             </a:pPr>
-            <a:r>
-              <a:rPr sz="1275" b="0">
+            <a:endParaRPr sz="1275" b="0" dirty="0">
+              <a:solidFill>
+                <a:srgbClr val="EEEEEE"/>
+              </a:solidFill>
+              <a:latin typeface="Consolas"/>
+              <a:ea typeface="Consolas"/>
+              <a:cs typeface="Consolas"/>
+            </a:endParaRPr>
+          </a:p>
+          <a:p>
+            <a:pPr>
+              <a:defRPr sz="1275" b="0">
                 <a:solidFill>
                   <a:srgbClr val="EEEEEE"/>
                 </a:solidFill>
                 <a:latin typeface="Consolas"/>
                 <a:ea typeface="Consolas"/>
                 <a:cs typeface="Consolas"/>
-              </a:rPr>
-              <a:t>docker compose up -d --build ml-notebook</a:t>
-            </a:r>
+              </a:defRPr>
+            </a:pPr>
+            <a:r>
+              <a:rPr sz="1275" b="0" dirty="0">
+                <a:solidFill>
+                  <a:srgbClr val="EEEEEE"/>
+                </a:solidFill>
+                <a:latin typeface="Consolas"/>
+                <a:ea typeface="Consolas"/>
+                <a:cs typeface="Consolas"/>
+              </a:rPr>
+              <a:t># Dans le terminal du </a:t>
+            </a:r>
+            <a:r>
+              <a:rPr sz="1275" b="0" dirty="0" err="1">
+                <a:solidFill>
+                  <a:srgbClr val="EEEEEE"/>
+                </a:solidFill>
+                <a:latin typeface="Consolas"/>
+                <a:ea typeface="Consolas"/>
+                <a:cs typeface="Consolas"/>
+              </a:rPr>
+              <a:t>serveur</a:t>
+            </a:r>
+            <a:r>
+              <a:rPr sz="1275" b="0" dirty="0">
+                <a:solidFill>
+                  <a:srgbClr val="EEEEEE"/>
+                </a:solidFill>
+                <a:latin typeface="Consolas"/>
+                <a:ea typeface="Consolas"/>
+                <a:cs typeface="Consolas"/>
+              </a:rPr>
+              <a:t>, </a:t>
+            </a:r>
+            <a:r>
+              <a:rPr sz="1275" b="0" dirty="0" err="1">
+                <a:solidFill>
+                  <a:srgbClr val="EEEEEE"/>
+                </a:solidFill>
+                <a:latin typeface="Consolas"/>
+                <a:ea typeface="Consolas"/>
+                <a:cs typeface="Consolas"/>
+              </a:rPr>
+              <a:t>répertoire</a:t>
+            </a:r>
+            <a:r>
+              <a:rPr sz="1275" b="0" dirty="0">
+                <a:solidFill>
+                  <a:srgbClr val="EEEEEE"/>
+                </a:solidFill>
+                <a:latin typeface="Consolas"/>
+                <a:ea typeface="Consolas"/>
+                <a:cs typeface="Consolas"/>
+              </a:rPr>
+              <a:t> ~/</a:t>
+            </a:r>
+            <a:r>
+              <a:rPr sz="1275" b="0" dirty="0" err="1">
+                <a:solidFill>
+                  <a:srgbClr val="EEEEEE"/>
+                </a:solidFill>
+                <a:latin typeface="Consolas"/>
+                <a:ea typeface="Consolas"/>
+                <a:cs typeface="Consolas"/>
+              </a:rPr>
+              <a:t>kafka</a:t>
+            </a:r>
+            <a:r>
+              <a:rPr sz="1275" b="0" dirty="0">
+                <a:solidFill>
+                  <a:srgbClr val="EEEEEE"/>
+                </a:solidFill>
+                <a:latin typeface="Consolas"/>
+                <a:ea typeface="Consolas"/>
+                <a:cs typeface="Consolas"/>
+              </a:rPr>
+              <a:t> :</a:t>
+            </a:r>
+          </a:p>
+          <a:p>
+            <a:pPr>
+              <a:defRPr sz="1275" b="0">
+                <a:solidFill>
+                  <a:srgbClr val="EEEEEE"/>
+                </a:solidFill>
+                <a:latin typeface="Consolas"/>
+                <a:ea typeface="Consolas"/>
+                <a:cs typeface="Consolas"/>
+              </a:defRPr>
+            </a:pPr>
+            <a:r>
+              <a:rPr lang="en-US" sz="1275" dirty="0">
+                <a:solidFill>
+                  <a:srgbClr val="EEEEEE"/>
+                </a:solidFill>
+                <a:latin typeface="Consolas"/>
+                <a:ea typeface="Consolas"/>
+                <a:cs typeface="Consolas"/>
+              </a:rPr>
+              <a:t>docker compose --progress plain build ml-notebook</a:t>
+            </a:r>
+          </a:p>
+          <a:p>
+            <a:pPr>
+              <a:defRPr sz="1275" b="0">
+                <a:solidFill>
+                  <a:srgbClr val="EEEEEE"/>
+                </a:solidFill>
+                <a:latin typeface="Consolas"/>
+                <a:ea typeface="Consolas"/>
+                <a:cs typeface="Consolas"/>
+              </a:defRPr>
+            </a:pPr>
+            <a:r>
+              <a:rPr lang="en-US" sz="1275" dirty="0">
+                <a:solidFill>
+                  <a:srgbClr val="EEEEEE"/>
+                </a:solidFill>
+                <a:latin typeface="Consolas"/>
+                <a:ea typeface="Consolas"/>
+                <a:cs typeface="Consolas"/>
+              </a:rPr>
+              <a:t>docker compose up -d --no-deps ml-notebook</a:t>
+            </a:r>
+          </a:p>
+          <a:p>
+            <a:pPr>
+              <a:defRPr sz="1275" b="0">
+                <a:solidFill>
+                  <a:srgbClr val="EEEEEE"/>
+                </a:solidFill>
+                <a:latin typeface="Consolas"/>
+                <a:ea typeface="Consolas"/>
+                <a:cs typeface="Consolas"/>
+              </a:defRPr>
+            </a:pPr>
+            <a:r>
+              <a:rPr lang="en-US" sz="1275" dirty="0">
+                <a:solidFill>
+                  <a:srgbClr val="EEEEEE"/>
+                </a:solidFill>
+                <a:latin typeface="Consolas"/>
+                <a:ea typeface="Consolas"/>
+                <a:cs typeface="Consolas"/>
+              </a:rPr>
+              <a:t>#</a:t>
+            </a:r>
+            <a:r>
+              <a:rPr lang="en-US" sz="1275" b="0" dirty="0">
+                <a:solidFill>
+                  <a:srgbClr val="EEEEEE"/>
+                </a:solidFill>
+                <a:latin typeface="Consolas"/>
+                <a:ea typeface="Consolas"/>
+                <a:cs typeface="Consolas"/>
+              </a:rPr>
+              <a:t> verifier </a:t>
+            </a:r>
+            <a:r>
+              <a:rPr lang="en-US" sz="1275" b="0" dirty="0" err="1">
+                <a:solidFill>
+                  <a:srgbClr val="EEEEEE"/>
+                </a:solidFill>
+                <a:latin typeface="Consolas"/>
+                <a:ea typeface="Consolas"/>
+                <a:cs typeface="Consolas"/>
+              </a:rPr>
+              <a:t>que</a:t>
+            </a:r>
+            <a:r>
+              <a:rPr lang="en-US" sz="1275" b="0" dirty="0">
+                <a:solidFill>
+                  <a:srgbClr val="EEEEEE"/>
+                </a:solidFill>
+                <a:latin typeface="Consolas"/>
+                <a:ea typeface="Consolas"/>
+                <a:cs typeface="Consolas"/>
+              </a:rPr>
+              <a:t> les services </a:t>
+            </a:r>
+            <a:r>
+              <a:rPr lang="en-US" sz="1275" b="0" dirty="0" err="1">
+                <a:solidFill>
+                  <a:srgbClr val="EEEEEE"/>
+                </a:solidFill>
+                <a:latin typeface="Consolas"/>
+                <a:ea typeface="Consolas"/>
+                <a:cs typeface="Consolas"/>
+              </a:rPr>
+              <a:t>sont</a:t>
+            </a:r>
+            <a:r>
+              <a:rPr lang="en-US" sz="1275" b="0" dirty="0">
+                <a:solidFill>
+                  <a:srgbClr val="EEEEEE"/>
+                </a:solidFill>
+                <a:latin typeface="Consolas"/>
+                <a:ea typeface="Consolas"/>
+                <a:cs typeface="Consolas"/>
+              </a:rPr>
+              <a:t> </a:t>
+            </a:r>
+            <a:r>
+              <a:rPr lang="en-US" sz="1275" dirty="0">
+                <a:solidFill>
+                  <a:srgbClr val="EEEEEE"/>
+                </a:solidFill>
+                <a:latin typeface="Consolas"/>
+                <a:ea typeface="Consolas"/>
+                <a:cs typeface="Consolas"/>
+              </a:rPr>
+              <a:t>bien </a:t>
+            </a:r>
+            <a:r>
+              <a:rPr lang="en-US" sz="1275" dirty="0" err="1">
+                <a:solidFill>
+                  <a:srgbClr val="EEEEEE"/>
+                </a:solidFill>
+                <a:latin typeface="Consolas"/>
+                <a:ea typeface="Consolas"/>
+                <a:cs typeface="Consolas"/>
+              </a:rPr>
+              <a:t>démarrés</a:t>
+            </a:r>
+            <a:endParaRPr lang="en-US" sz="1275" dirty="0">
+              <a:solidFill>
+                <a:srgbClr val="EEEEEE"/>
+              </a:solidFill>
+              <a:latin typeface="Consolas"/>
+              <a:ea typeface="Consolas"/>
+              <a:cs typeface="Consolas"/>
+            </a:endParaRPr>
+          </a:p>
+          <a:p>
+            <a:pPr>
+              <a:defRPr sz="1275" b="0">
+                <a:solidFill>
+                  <a:srgbClr val="EEEEEE"/>
+                </a:solidFill>
+                <a:latin typeface="Consolas"/>
+                <a:ea typeface="Consolas"/>
+                <a:cs typeface="Consolas"/>
+              </a:defRPr>
+            </a:pPr>
+            <a:r>
+              <a:rPr lang="en-US" sz="1275" dirty="0">
+                <a:solidFill>
+                  <a:srgbClr val="EEEEEE"/>
+                </a:solidFill>
+                <a:latin typeface="Consolas"/>
+                <a:ea typeface="Consolas"/>
+                <a:cs typeface="Consolas"/>
+              </a:rPr>
+              <a:t>d</a:t>
+            </a:r>
+            <a:r>
+              <a:rPr lang="en-US" sz="1275" b="0" dirty="0">
+                <a:solidFill>
+                  <a:srgbClr val="EEEEEE"/>
+                </a:solidFill>
+                <a:latin typeface="Consolas"/>
+                <a:ea typeface="Consolas"/>
+                <a:cs typeface="Consolas"/>
+              </a:rPr>
+              <a:t>ocker </a:t>
+            </a:r>
+            <a:r>
+              <a:rPr lang="en-US" sz="1275" b="0" dirty="0" err="1">
+                <a:solidFill>
+                  <a:srgbClr val="EEEEEE"/>
+                </a:solidFill>
+                <a:latin typeface="Consolas"/>
+                <a:ea typeface="Consolas"/>
+                <a:cs typeface="Consolas"/>
+              </a:rPr>
+              <a:t>ps</a:t>
+            </a:r>
+            <a:endParaRPr sz="1275" b="0" dirty="0">
+              <a:solidFill>
+                <a:srgbClr val="EEEEEE"/>
+              </a:solidFill>
+              <a:latin typeface="Consolas"/>
+              <a:ea typeface="Consolas"/>
+              <a:cs typeface="Consolas"/>
+            </a:endParaRPr>
           </a:p>
         </p:txBody>
       </p:sp>
@@ -26558,7 +28052,7 @@
               </a:defRPr>
             </a:pPr>
             <a:r>
-              <a:rPr sz="1350" b="0">
+              <a:rPr lang="fr-FR" sz="1350" b="0" dirty="0">
                 <a:solidFill>
                   <a:srgbClr val="222222"/>
                 </a:solidFill>
@@ -26566,7 +28060,51 @@
                 <a:ea typeface="Calibri"/>
                 <a:cs typeface="Calibri"/>
               </a:rPr>
-              <a:t>Ouvrir Consumer_Spark.ipynb avec un nouveau kernel Python.</a:t>
+              <a:t>Créer </a:t>
+            </a:r>
+            <a:r>
+              <a:rPr lang="fr-FR" sz="1350" b="0">
+                <a:solidFill>
+                  <a:srgbClr val="222222"/>
+                </a:solidFill>
+                <a:latin typeface="Calibri"/>
+                <a:ea typeface="Calibri"/>
+                <a:cs typeface="Calibri"/>
+              </a:rPr>
+              <a:t>un notebook:</a:t>
+            </a:r>
+            <a:r>
+              <a:rPr sz="1350" b="0">
+                <a:solidFill>
+                  <a:srgbClr val="222222"/>
+                </a:solidFill>
+                <a:latin typeface="Calibri"/>
+                <a:ea typeface="Calibri"/>
+                <a:cs typeface="Calibri"/>
+              </a:rPr>
+              <a:t> </a:t>
+            </a:r>
+            <a:r>
+              <a:rPr sz="1350" b="0" dirty="0" err="1">
+                <a:solidFill>
+                  <a:srgbClr val="222222"/>
+                </a:solidFill>
+                <a:latin typeface="Calibri"/>
+                <a:ea typeface="Calibri"/>
+                <a:cs typeface="Calibri"/>
+              </a:rPr>
+              <a:t>Consumer_Spark.ipynb</a:t>
+            </a:r>
+            <a:r>
+              <a:rPr sz="1350" b="0" dirty="0">
+                <a:solidFill>
+                  <a:srgbClr val="222222"/>
+                </a:solidFill>
+                <a:latin typeface="Calibri"/>
+                <a:ea typeface="Calibri"/>
+                <a:cs typeface="Calibri"/>
+              </a:rPr>
+              <a:t> avec un nouveau kernel Python.</a:t>
             </a:r>
           </a:p>
           <a:p>
@@ -26581,7 +28119,7 @@
               </a:defRPr>
             </a:pPr>
             <a:r>
-              <a:rPr sz="1350" b="0">
+              <a:rPr sz="1350" b="0" dirty="0" err="1">
                 <a:solidFill>
                   <a:srgbClr val="222222"/>
                 </a:solidFill>
@@ -26589,7 +28127,84 @@
                 <a:ea typeface="Calibri"/>
                 <a:cs typeface="Calibri"/>
               </a:rPr>
-              <a:t>Exécuter cette première cellule avant toute création de SparkSession.</a:t>
+              <a:t>Exécuter</a:t>
+            </a:r>
+            <a:r>
+              <a:rPr sz="1350" b="0" dirty="0">
+                <a:solidFill>
+                  <a:srgbClr val="222222"/>
+                </a:solidFill>
+                <a:latin typeface="Calibri"/>
+                <a:ea typeface="Calibri"/>
+                <a:cs typeface="Calibri"/>
+              </a:rPr>
+              <a:t> </a:t>
+            </a:r>
+            <a:r>
+              <a:rPr sz="1350" b="0" dirty="0" err="1">
+                <a:solidFill>
+                  <a:srgbClr val="222222"/>
+                </a:solidFill>
+                <a:latin typeface="Calibri"/>
+                <a:ea typeface="Calibri"/>
+                <a:cs typeface="Calibri"/>
+              </a:rPr>
+              <a:t>cette</a:t>
+            </a:r>
+            <a:r>
+              <a:rPr sz="1350" b="0" dirty="0">
+                <a:solidFill>
+                  <a:srgbClr val="222222"/>
+                </a:solidFill>
+                <a:latin typeface="Calibri"/>
+                <a:ea typeface="Calibri"/>
+                <a:cs typeface="Calibri"/>
+              </a:rPr>
+              <a:t> première cellule avant toute </a:t>
+            </a:r>
+            <a:r>
+              <a:rPr sz="1350" b="0" dirty="0" err="1">
+                <a:solidFill>
+                  <a:srgbClr val="222222"/>
+                </a:solidFill>
+                <a:latin typeface="Calibri"/>
+                <a:ea typeface="Calibri"/>
+                <a:cs typeface="Calibri"/>
+              </a:rPr>
+              <a:t>création</a:t>
+            </a:r>
+            <a:r>
+              <a:rPr sz="1350" b="0" dirty="0">
+                <a:solidFill>
+                  <a:srgbClr val="222222"/>
+                </a:solidFill>
+                <a:latin typeface="Calibri"/>
+                <a:ea typeface="Calibri"/>
+                <a:cs typeface="Calibri"/>
+              </a:rPr>
+              <a:t> de </a:t>
+            </a:r>
+            <a:r>
+              <a:rPr sz="1350" b="0" dirty="0" err="1">
+                <a:solidFill>
+                  <a:srgbClr val="222222"/>
+                </a:solidFill>
+                <a:latin typeface="Calibri"/>
+                <a:ea typeface="Calibri"/>
+                <a:cs typeface="Calibri"/>
+              </a:rPr>
+              <a:t>SparkSession</a:t>
+            </a:r>
+            <a:r>
+              <a:rPr sz="1350" b="0" dirty="0">
+                <a:solidFill>
+                  <a:srgbClr val="222222"/>
+                </a:solidFill>
+                <a:latin typeface="Calibri"/>
+                <a:ea typeface="Calibri"/>
+                <a:cs typeface="Calibri"/>
+              </a:rPr>
+              <a:t>.</a:t>
             </a:r>
           </a:p>
         </p:txBody>
@@ -26640,7 +28255,7 @@
               </a:defRPr>
             </a:pPr>
             <a:r>
-              <a:rPr sz="1275" b="0">
+              <a:rPr sz="1275" b="0" dirty="0">
                 <a:solidFill>
                   <a:srgbClr val="EEEEEE"/>
                 </a:solidFill>
@@ -26648,80 +28263,20 @@
                 <a:ea typeface="Consolas"/>
                 <a:cs typeface="Consolas"/>
               </a:rPr>
-              <a:t>import sys, subprocess, pyspark</a:t>
-            </a:r>
-          </a:p>
-          <a:p>
-            <a:pPr>
-              <a:defRPr sz="1275" b="0">
+              <a:t>import sys, subprocess, </a:t>
+            </a:r>
+            <a:r>
+              <a:rPr sz="1275" b="0" dirty="0" err="1">
                 <a:solidFill>
                   <a:srgbClr val="EEEEEE"/>
                 </a:solidFill>
                 <a:latin typeface="Consolas"/>
                 <a:ea typeface="Consolas"/>
                 <a:cs typeface="Consolas"/>
-              </a:defRPr>
-            </a:pPr>
-            <a:r>
-              <a:rPr sz="1275" b="0">
-                <a:solidFill>
-                  <a:srgbClr val="EEEEEE"/>
-                </a:solidFill>
-                <a:latin typeface="Consolas"/>
-                <a:ea typeface="Consolas"/>
-                <a:cs typeface="Consolas"/>
-              </a:rPr>
-              <a:t>print("Python :", sys.version)</a:t>
-            </a:r>
-          </a:p>
-          <a:p>
-            <a:pPr>
-              <a:defRPr sz="1275" b="0">
-                <a:solidFill>
-                  <a:srgbClr val="EEEEEE"/>
-                </a:solidFill>
-                <a:latin typeface="Consolas"/>
-                <a:ea typeface="Consolas"/>
-                <a:cs typeface="Consolas"/>
-              </a:defRPr>
-            </a:pPr>
-            <a:r>
-              <a:rPr sz="1275" b="0">
-                <a:solidFill>
-                  <a:srgbClr val="EEEEEE"/>
-                </a:solidFill>
-                <a:latin typeface="Consolas"/>
-                <a:ea typeface="Consolas"/>
-                <a:cs typeface="Consolas"/>
-              </a:rPr>
-              <a:t>print("PySpark :", pyspark.__version__)</a:t>
-            </a:r>
-          </a:p>
-          <a:p>
-            <a:pPr>
-              <a:defRPr sz="1275" b="0">
-                <a:solidFill>
-                  <a:srgbClr val="EEEEEE"/>
-                </a:solidFill>
-                <a:latin typeface="Consolas"/>
-                <a:ea typeface="Consolas"/>
-                <a:cs typeface="Consolas"/>
-              </a:defRPr>
-            </a:pPr>
-            <a:r>
-              <a:rPr sz="1275" b="0">
-                <a:solidFill>
-                  <a:srgbClr val="EEEEEE"/>
-                </a:solidFill>
-                <a:latin typeface="Consolas"/>
-                <a:ea typeface="Consolas"/>
-                <a:cs typeface="Consolas"/>
-              </a:rPr>
-              <a:t>subprocess.run(["java", "-version"], check=True)</a:t>
-            </a:r>
-          </a:p>
-          <a:p>
-            <a:endParaRPr sz="1275" b="0">
+              </a:rPr>
+              <a:t>pyspark</a:t>
+            </a:r>
+            <a:endParaRPr sz="1275" b="0" dirty="0">
               <a:solidFill>
                 <a:srgbClr val="EEEEEE"/>
               </a:solidFill>
@@ -26742,7 +28297,7 @@
               </a:defRPr>
             </a:pPr>
             <a:r>
-              <a:rPr sz="1275" b="0">
+              <a:rPr sz="1275" b="0" dirty="0">
                 <a:solidFill>
                   <a:srgbClr val="EEEEEE"/>
                 </a:solidFill>
@@ -26750,7 +28305,29 @@
                 <a:ea typeface="Consolas"/>
                 <a:cs typeface="Consolas"/>
               </a:rPr>
-              <a:t>BOOTSTRAP_SERVERS = "kafka-broker:9092"</a:t>
+              <a:t>print("Python :", </a:t>
+            </a:r>
+            <a:r>
+              <a:rPr sz="1275" b="0" dirty="0" err="1">
+                <a:solidFill>
+                  <a:srgbClr val="EEEEEE"/>
+                </a:solidFill>
+                <a:latin typeface="Consolas"/>
+                <a:ea typeface="Consolas"/>
+                <a:cs typeface="Consolas"/>
+              </a:rPr>
+              <a:t>sys.version</a:t>
+            </a:r>
+            <a:r>
+              <a:rPr sz="1275" b="0" dirty="0">
+                <a:solidFill>
+                  <a:srgbClr val="EEEEEE"/>
+                </a:solidFill>
+                <a:latin typeface="Consolas"/>
+                <a:ea typeface="Consolas"/>
+                <a:cs typeface="Consolas"/>
+              </a:rPr>
+              <a:t>)</a:t>
             </a:r>
           </a:p>
           <a:p>
@@ -26765,7 +28342,141 @@
               </a:defRPr>
             </a:pPr>
             <a:r>
-              <a:rPr sz="1275" b="0">
+              <a:rPr sz="1275" b="0" dirty="0">
+                <a:solidFill>
+                  <a:srgbClr val="EEEEEE"/>
+                </a:solidFill>
+                <a:latin typeface="Consolas"/>
+                <a:ea typeface="Consolas"/>
+                <a:cs typeface="Consolas"/>
+              </a:rPr>
+              <a:t>print("</a:t>
+            </a:r>
+            <a:r>
+              <a:rPr sz="1275" b="0" dirty="0" err="1">
+                <a:solidFill>
+                  <a:srgbClr val="EEEEEE"/>
+                </a:solidFill>
+                <a:latin typeface="Consolas"/>
+                <a:ea typeface="Consolas"/>
+                <a:cs typeface="Consolas"/>
+              </a:rPr>
+              <a:t>PySpark</a:t>
+            </a:r>
+            <a:r>
+              <a:rPr sz="1275" b="0" dirty="0">
+                <a:solidFill>
+                  <a:srgbClr val="EEEEEE"/>
+                </a:solidFill>
+                <a:latin typeface="Consolas"/>
+                <a:ea typeface="Consolas"/>
+                <a:cs typeface="Consolas"/>
+              </a:rPr>
+              <a:t> :", </a:t>
+            </a:r>
+            <a:r>
+              <a:rPr sz="1275" b="0" dirty="0" err="1">
+                <a:solidFill>
+                  <a:srgbClr val="EEEEEE"/>
+                </a:solidFill>
+                <a:latin typeface="Consolas"/>
+                <a:ea typeface="Consolas"/>
+                <a:cs typeface="Consolas"/>
+              </a:rPr>
+              <a:t>pyspark</a:t>
+            </a:r>
+            <a:r>
+              <a:rPr sz="1275" b="0" dirty="0">
+                <a:solidFill>
+                  <a:srgbClr val="EEEEEE"/>
+                </a:solidFill>
+                <a:latin typeface="Consolas"/>
+                <a:ea typeface="Consolas"/>
+                <a:cs typeface="Consolas"/>
+              </a:rPr>
+              <a:t>.__version__)</a:t>
+            </a:r>
+          </a:p>
+          <a:p>
+            <a:pPr>
+              <a:defRPr sz="1275" b="0">
+                <a:solidFill>
+                  <a:srgbClr val="EEEEEE"/>
+                </a:solidFill>
+                <a:latin typeface="Consolas"/>
+                <a:ea typeface="Consolas"/>
+                <a:cs typeface="Consolas"/>
+              </a:defRPr>
+            </a:pPr>
+            <a:r>
+              <a:rPr sz="1275" b="0" dirty="0" err="1">
+                <a:solidFill>
+                  <a:srgbClr val="EEEEEE"/>
+                </a:solidFill>
+                <a:latin typeface="Consolas"/>
+                <a:ea typeface="Consolas"/>
+                <a:cs typeface="Consolas"/>
+              </a:rPr>
+              <a:t>subprocess.run</a:t>
+            </a:r>
+            <a:r>
+              <a:rPr sz="1275" b="0" dirty="0">
+                <a:solidFill>
+                  <a:srgbClr val="EEEEEE"/>
+                </a:solidFill>
+                <a:latin typeface="Consolas"/>
+                <a:ea typeface="Consolas"/>
+                <a:cs typeface="Consolas"/>
+              </a:rPr>
+              <a:t>(["java", "-version"], check=True)</a:t>
+            </a:r>
+          </a:p>
+          <a:p>
+            <a:endParaRPr sz="1275" b="0" dirty="0">
+              <a:solidFill>
+                <a:srgbClr val="EEEEEE"/>
+              </a:solidFill>
+              <a:latin typeface="Consolas"/>
+              <a:ea typeface="Consolas"/>
+              <a:cs typeface="Consolas"/>
+            </a:endParaRPr>
+          </a:p>
+          <a:p>
+            <a:pPr>
+              <a:defRPr sz="1275" b="0">
+                <a:solidFill>
+                  <a:srgbClr val="EEEEEE"/>
+                </a:solidFill>
+                <a:latin typeface="Consolas"/>
+                <a:ea typeface="Consolas"/>
+                <a:cs typeface="Consolas"/>
+              </a:defRPr>
+            </a:pPr>
+            <a:r>
+              <a:rPr sz="1275" b="0" dirty="0">
+                <a:solidFill>
+                  <a:srgbClr val="EEEEEE"/>
+                </a:solidFill>
+                <a:latin typeface="Consolas"/>
+                <a:ea typeface="Consolas"/>
+                <a:cs typeface="Consolas"/>
+              </a:rPr>
+              <a:t>BOOTSTRAP_SERVERS = "kafka-broker:9092"</a:t>
+            </a:r>
+          </a:p>
+          <a:p>
+            <a:pPr>
+              <a:defRPr sz="1275" b="0">
+                <a:solidFill>
+                  <a:srgbClr val="EEEEEE"/>
+                </a:solidFill>
+                <a:latin typeface="Consolas"/>
+                <a:ea typeface="Consolas"/>
+                <a:cs typeface="Consolas"/>
+              </a:defRPr>
+            </a:pPr>
+            <a:r>
+              <a:rPr sz="1275" b="0" dirty="0">
                 <a:solidFill>
                   <a:srgbClr val="EEEEEE"/>
                 </a:solidFill>
@@ -27262,7 +28973,7 @@
               </a:defRPr>
             </a:pPr>
             <a:r>
-              <a:rPr sz="1275" b="0">
+              <a:rPr sz="1275" b="0" dirty="0">
                 <a:solidFill>
                   <a:srgbClr val="EEEEEE"/>
                 </a:solidFill>
@@ -27270,7 +28981,51 @@
                 <a:ea typeface="Consolas"/>
                 <a:cs typeface="Consolas"/>
               </a:rPr>
-              <a:t>from pyspark.sql import SparkSession, functions as F</a:t>
+              <a:t>from </a:t>
+            </a:r>
+            <a:r>
+              <a:rPr sz="1275" b="0" dirty="0" err="1">
+                <a:solidFill>
+                  <a:srgbClr val="EEEEEE"/>
+                </a:solidFill>
+                <a:latin typeface="Consolas"/>
+                <a:ea typeface="Consolas"/>
+                <a:cs typeface="Consolas"/>
+              </a:rPr>
+              <a:t>pyspark.sql</a:t>
+            </a:r>
+            <a:r>
+              <a:rPr sz="1275" b="0" dirty="0">
+                <a:solidFill>
+                  <a:srgbClr val="EEEEEE"/>
+                </a:solidFill>
+                <a:latin typeface="Consolas"/>
+                <a:ea typeface="Consolas"/>
+                <a:cs typeface="Consolas"/>
+              </a:rPr>
+              <a:t> import </a:t>
+            </a:r>
+            <a:r>
+              <a:rPr sz="1275" b="0" dirty="0" err="1">
+                <a:solidFill>
+                  <a:srgbClr val="EEEEEE"/>
+                </a:solidFill>
+                <a:latin typeface="Consolas"/>
+                <a:ea typeface="Consolas"/>
+                <a:cs typeface="Consolas"/>
+              </a:rPr>
+              <a:t>SparkSession</a:t>
+            </a:r>
+            <a:r>
+              <a:rPr sz="1275" b="0" dirty="0">
+                <a:solidFill>
+                  <a:srgbClr val="EEEEEE"/>
+                </a:solidFill>
+                <a:latin typeface="Consolas"/>
+                <a:ea typeface="Consolas"/>
+                <a:cs typeface="Consolas"/>
+              </a:rPr>
+              <a:t>, functions as F</a:t>
             </a:r>
           </a:p>
           <a:p>
@@ -27285,7 +29040,7 @@
               </a:defRPr>
             </a:pPr>
             <a:r>
-              <a:rPr sz="1275" b="0">
+              <a:rPr sz="1275" b="0" dirty="0">
                 <a:solidFill>
                   <a:srgbClr val="EEEEEE"/>
                 </a:solidFill>
@@ -27293,7 +29048,29 @@
                 <a:ea typeface="Consolas"/>
                 <a:cs typeface="Consolas"/>
               </a:rPr>
-              <a:t>from pyspark.sql.types import (</a:t>
+              <a:t>from </a:t>
+            </a:r>
+            <a:r>
+              <a:rPr sz="1275" b="0" dirty="0" err="1">
+                <a:solidFill>
+                  <a:srgbClr val="EEEEEE"/>
+                </a:solidFill>
+                <a:latin typeface="Consolas"/>
+                <a:ea typeface="Consolas"/>
+                <a:cs typeface="Consolas"/>
+              </a:rPr>
+              <a:t>pyspark.sql.types</a:t>
+            </a:r>
+            <a:r>
+              <a:rPr sz="1275" b="0" dirty="0">
+                <a:solidFill>
+                  <a:srgbClr val="EEEEEE"/>
+                </a:solidFill>
+                <a:latin typeface="Consolas"/>
+                <a:ea typeface="Consolas"/>
+                <a:cs typeface="Consolas"/>
+              </a:rPr>
+              <a:t> import (</a:t>
             </a:r>
           </a:p>
           <a:p>
@@ -27308,7 +29085,7 @@
               </a:defRPr>
             </a:pPr>
             <a:r>
-              <a:rPr sz="1275" b="0">
+              <a:rPr sz="1275" b="0" dirty="0">
                 <a:solidFill>
                   <a:srgbClr val="EEEEEE"/>
                 </a:solidFill>
@@ -27316,11 +29093,99 @@
                 <a:ea typeface="Consolas"/>
                 <a:cs typeface="Consolas"/>
               </a:rPr>
-              <a:t>    StructType, StructField, ArrayType, DoubleType, IntegerType)</a:t>
-            </a:r>
-          </a:p>
-          <a:p>
-            <a:endParaRPr sz="1275" b="0">
+              <a:t>    StructType, </a:t>
+            </a:r>
+            <a:r>
+              <a:rPr sz="1275" b="0" dirty="0" err="1">
+                <a:solidFill>
+                  <a:srgbClr val="EEEEEE"/>
+                </a:solidFill>
+                <a:latin typeface="Consolas"/>
+                <a:ea typeface="Consolas"/>
+                <a:cs typeface="Consolas"/>
+              </a:rPr>
+              <a:t>StructField</a:t>
+            </a:r>
+            <a:r>
+              <a:rPr sz="1275" b="0" dirty="0">
+                <a:solidFill>
+                  <a:srgbClr val="EEEEEE"/>
+                </a:solidFill>
+                <a:latin typeface="Consolas"/>
+                <a:ea typeface="Consolas"/>
+                <a:cs typeface="Consolas"/>
+              </a:rPr>
+              <a:t>, </a:t>
+            </a:r>
+            <a:r>
+              <a:rPr sz="1275" b="0" dirty="0" err="1">
+                <a:solidFill>
+                  <a:srgbClr val="EEEEEE"/>
+                </a:solidFill>
+                <a:latin typeface="Consolas"/>
+                <a:ea typeface="Consolas"/>
+                <a:cs typeface="Consolas"/>
+              </a:rPr>
+              <a:t>ArrayType</a:t>
+            </a:r>
+            <a:r>
+              <a:rPr sz="1275" b="0" dirty="0">
+                <a:solidFill>
+                  <a:srgbClr val="EEEEEE"/>
+                </a:solidFill>
+                <a:latin typeface="Consolas"/>
+                <a:ea typeface="Consolas"/>
+                <a:cs typeface="Consolas"/>
+              </a:rPr>
+              <a:t>, </a:t>
+            </a:r>
+            <a:r>
+              <a:rPr sz="1275" b="0" dirty="0" err="1">
+                <a:solidFill>
+                  <a:srgbClr val="EEEEEE"/>
+                </a:solidFill>
+                <a:latin typeface="Consolas"/>
+                <a:ea typeface="Consolas"/>
+                <a:cs typeface="Consolas"/>
+              </a:rPr>
+              <a:t>DoubleType</a:t>
+            </a:r>
+            <a:r>
+              <a:rPr sz="1275" b="0" dirty="0">
+                <a:solidFill>
+                  <a:srgbClr val="EEEEEE"/>
+                </a:solidFill>
+                <a:latin typeface="Consolas"/>
+                <a:ea typeface="Consolas"/>
+                <a:cs typeface="Consolas"/>
+              </a:rPr>
+              <a:t>, </a:t>
+            </a:r>
+            <a:r>
+              <a:rPr sz="1275" b="0" dirty="0" err="1">
+                <a:solidFill>
+                  <a:srgbClr val="EEEEEE"/>
+                </a:solidFill>
+                <a:latin typeface="Consolas"/>
+                <a:ea typeface="Consolas"/>
+                <a:cs typeface="Consolas"/>
+              </a:rPr>
+              <a:t>IntegerType</a:t>
+            </a:r>
+            <a:r>
+              <a:rPr sz="1275" b="0" dirty="0">
+                <a:solidFill>
+                  <a:srgbClr val="EEEEEE"/>
+                </a:solidFill>
+                <a:latin typeface="Consolas"/>
+                <a:ea typeface="Consolas"/>
+                <a:cs typeface="Consolas"/>
+              </a:rPr>
+              <a:t>)</a:t>
+            </a:r>
+          </a:p>
+          <a:p>
+            <a:endParaRPr sz="1275" b="0" dirty="0">
               <a:solidFill>
                 <a:srgbClr val="EEEEEE"/>
               </a:solidFill>
@@ -27341,7 +29206,7 @@
               </a:defRPr>
             </a:pPr>
             <a:r>
-              <a:rPr sz="1275" b="0">
+              <a:rPr sz="1275" b="0" dirty="0">
                 <a:solidFill>
                   <a:srgbClr val="EEEEEE"/>
                 </a:solidFill>
@@ -27364,7 +29229,7 @@
               </a:defRPr>
             </a:pPr>
             <a:r>
-              <a:rPr sz="1275" b="0">
+              <a:rPr sz="1275" b="0" dirty="0">
                 <a:solidFill>
                   <a:srgbClr val="EEEEEE"/>
                 </a:solidFill>
@@ -27372,8 +29237,27 @@
                 <a:ea typeface="Consolas"/>
                 <a:cs typeface="Consolas"/>
               </a:rPr>
-              <a:t>spark = (SparkSession.builder</a:t>
-            </a:r>
+              <a:t>spark = (</a:t>
+            </a:r>
+            <a:r>
+              <a:rPr sz="1275" b="0" dirty="0" err="1">
+                <a:solidFill>
+                  <a:srgbClr val="EEEEEE"/>
+                </a:solidFill>
+                <a:latin typeface="Consolas"/>
+                <a:ea typeface="Consolas"/>
+                <a:cs typeface="Consolas"/>
+              </a:rPr>
+              <a:t>SparkSession.builder</a:t>
+            </a:r>
+            <a:endParaRPr sz="1275" b="0" dirty="0">
+              <a:solidFill>
+                <a:srgbClr val="EEEEEE"/>
+              </a:solidFill>
+              <a:latin typeface="Consolas"/>
+              <a:ea typeface="Consolas"/>
+              <a:cs typeface="Consolas"/>
+            </a:endParaRPr>
           </a:p>
           <a:p>
             <a:pPr>
@@ -27387,7 +29271,7 @@
               </a:defRPr>
             </a:pPr>
             <a:r>
-              <a:rPr sz="1275" b="0">
+              <a:rPr sz="1275" b="0" dirty="0">
                 <a:solidFill>
                   <a:srgbClr val="EEEEEE"/>
                 </a:solidFill>
@@ -27395,7 +29279,29 @@
                 <a:ea typeface="Consolas"/>
                 <a:cs typeface="Consolas"/>
               </a:rPr>
-              <a:t>    .appName("Kafka-Structured-Streaming")</a:t>
+              <a:t>    .</a:t>
+            </a:r>
+            <a:r>
+              <a:rPr sz="1275" b="0" dirty="0" err="1">
+                <a:solidFill>
+                  <a:srgbClr val="EEEEEE"/>
+                </a:solidFill>
+                <a:latin typeface="Consolas"/>
+                <a:ea typeface="Consolas"/>
+                <a:cs typeface="Consolas"/>
+              </a:rPr>
+              <a:t>appName</a:t>
+            </a:r>
+            <a:r>
+              <a:rPr sz="1275" b="0" dirty="0">
+                <a:solidFill>
+                  <a:srgbClr val="EEEEEE"/>
+                </a:solidFill>
+                <a:latin typeface="Consolas"/>
+                <a:ea typeface="Consolas"/>
+                <a:cs typeface="Consolas"/>
+              </a:rPr>
+              <a:t>("Kafka-Structured-Streaming")</a:t>
             </a:r>
           </a:p>
           <a:p>
@@ -27410,7 +29316,7 @@
               </a:defRPr>
             </a:pPr>
             <a:r>
-              <a:rPr sz="1275" b="0">
+              <a:rPr sz="1275" b="0" dirty="0">
                 <a:solidFill>
                   <a:srgbClr val="EEEEEE"/>
                 </a:solidFill>
@@ -27433,7 +29339,7 @@
               </a:defRPr>
             </a:pPr>
             <a:r>
-              <a:rPr sz="1275" b="0">
+              <a:rPr sz="1275" b="0" dirty="0">
                 <a:solidFill>
                   <a:srgbClr val="EEEEEE"/>
                 </a:solidFill>
@@ -27441,7 +29347,29 @@
                 <a:ea typeface="Consolas"/>
                 <a:cs typeface="Consolas"/>
               </a:rPr>
-              <a:t>    .config("spark.jars.packages", package)</a:t>
+              <a:t>    .config("</a:t>
+            </a:r>
+            <a:r>
+              <a:rPr sz="1275" b="0" dirty="0" err="1">
+                <a:solidFill>
+                  <a:srgbClr val="EEEEEE"/>
+                </a:solidFill>
+                <a:latin typeface="Consolas"/>
+                <a:ea typeface="Consolas"/>
+                <a:cs typeface="Consolas"/>
+              </a:rPr>
+              <a:t>spark.jars.packages</a:t>
+            </a:r>
+            <a:r>
+              <a:rPr sz="1275" b="0" dirty="0">
+                <a:solidFill>
+                  <a:srgbClr val="EEEEEE"/>
+                </a:solidFill>
+                <a:latin typeface="Consolas"/>
+                <a:ea typeface="Consolas"/>
+                <a:cs typeface="Consolas"/>
+              </a:rPr>
+              <a:t>", package)</a:t>
             </a:r>
           </a:p>
           <a:p>
@@ -27456,7 +29384,7 @@
               </a:defRPr>
             </a:pPr>
             <a:r>
-              <a:rPr sz="1275" b="0">
+              <a:rPr sz="1275" b="0" dirty="0">
                 <a:solidFill>
                   <a:srgbClr val="EEEEEE"/>
                 </a:solidFill>
@@ -27464,7 +29392,29 @@
                 <a:ea typeface="Consolas"/>
                 <a:cs typeface="Consolas"/>
               </a:rPr>
-              <a:t>    .config("spark.sql.shuffle.partitions", "2")</a:t>
+              <a:t>    .config("</a:t>
+            </a:r>
+            <a:r>
+              <a:rPr sz="1275" b="0" dirty="0" err="1">
+                <a:solidFill>
+                  <a:srgbClr val="EEEEEE"/>
+                </a:solidFill>
+                <a:latin typeface="Consolas"/>
+                <a:ea typeface="Consolas"/>
+                <a:cs typeface="Consolas"/>
+              </a:rPr>
+              <a:t>spark.sql.shuffle.partitions</a:t>
+            </a:r>
+            <a:r>
+              <a:rPr sz="1275" b="0" dirty="0">
+                <a:solidFill>
+                  <a:srgbClr val="EEEEEE"/>
+                </a:solidFill>
+                <a:latin typeface="Consolas"/>
+                <a:ea typeface="Consolas"/>
+                <a:cs typeface="Consolas"/>
+              </a:rPr>
+              <a:t>", "2")</a:t>
             </a:r>
           </a:p>
           <a:p>
@@ -27479,7 +29429,7 @@
               </a:defRPr>
             </a:pPr>
             <a:r>
-              <a:rPr sz="1275" b="0">
+              <a:rPr sz="1275" b="0" dirty="0">
                 <a:solidFill>
                   <a:srgbClr val="EEEEEE"/>
                 </a:solidFill>
@@ -27487,7 +29437,29 @@
                 <a:ea typeface="Consolas"/>
                 <a:cs typeface="Consolas"/>
               </a:rPr>
-              <a:t>    .getOrCreate())</a:t>
+              <a:t>    .</a:t>
+            </a:r>
+            <a:r>
+              <a:rPr sz="1275" b="0" dirty="0" err="1">
+                <a:solidFill>
+                  <a:srgbClr val="EEEEEE"/>
+                </a:solidFill>
+                <a:latin typeface="Consolas"/>
+                <a:ea typeface="Consolas"/>
+                <a:cs typeface="Consolas"/>
+              </a:rPr>
+              <a:t>getOrCreate</a:t>
+            </a:r>
+            <a:r>
+              <a:rPr sz="1275" b="0" dirty="0">
+                <a:solidFill>
+                  <a:srgbClr val="EEEEEE"/>
+                </a:solidFill>
+                <a:latin typeface="Consolas"/>
+                <a:ea typeface="Consolas"/>
+                <a:cs typeface="Consolas"/>
+              </a:rPr>
+              <a:t>())</a:t>
             </a:r>
           </a:p>
           <a:p>
@@ -27502,7 +29474,7 @@
               </a:defRPr>
             </a:pPr>
             <a:r>
-              <a:rPr sz="1275" b="0">
+              <a:rPr sz="1275" b="0" dirty="0" err="1">
                 <a:solidFill>
                   <a:srgbClr val="EEEEEE"/>
                 </a:solidFill>
@@ -27510,7 +29482,18 @@
                 <a:ea typeface="Consolas"/>
                 <a:cs typeface="Consolas"/>
               </a:rPr>
-              <a:t>spark.sparkContext.setLogLevel("WARN")</a:t>
+              <a:t>spark.sparkContext.setLogLevel</a:t>
+            </a:r>
+            <a:r>
+              <a:rPr sz="1275" b="0" dirty="0">
+                <a:solidFill>
+                  <a:srgbClr val="EEEEEE"/>
+                </a:solidFill>
+                <a:latin typeface="Consolas"/>
+                <a:ea typeface="Consolas"/>
+                <a:cs typeface="Consolas"/>
+              </a:rPr>
+              <a:t>("WARN")</a:t>
             </a:r>
           </a:p>
         </p:txBody>
@@ -27999,7 +29982,7 @@
               </a:defRPr>
             </a:pPr>
             <a:r>
-              <a:rPr sz="1275" b="0">
+              <a:rPr sz="1275" b="0" dirty="0">
                 <a:solidFill>
                   <a:srgbClr val="EEEEEE"/>
                 </a:solidFill>
@@ -28007,149 +29990,20 @@
                 <a:ea typeface="Consolas"/>
                 <a:cs typeface="Consolas"/>
               </a:rPr>
-              <a:t>raw = (spark.readStream</a:t>
-            </a:r>
-          </a:p>
-          <a:p>
-            <a:pPr>
-              <a:defRPr sz="1275" b="0">
+              <a:t>raw = (</a:t>
+            </a:r>
+            <a:r>
+              <a:rPr sz="1275" b="0" dirty="0" err="1">
                 <a:solidFill>
                   <a:srgbClr val="EEEEEE"/>
                 </a:solidFill>
                 <a:latin typeface="Consolas"/>
                 <a:ea typeface="Consolas"/>
                 <a:cs typeface="Consolas"/>
-              </a:defRPr>
-            </a:pPr>
-            <a:r>
-              <a:rPr sz="1275" b="0">
-                <a:solidFill>
-                  <a:srgbClr val="EEEEEE"/>
-                </a:solidFill>
-                <a:latin typeface="Consolas"/>
-                <a:ea typeface="Consolas"/>
-                <a:cs typeface="Consolas"/>
-              </a:rPr>
-              <a:t>    .format("kafka")</a:t>
-            </a:r>
-          </a:p>
-          <a:p>
-            <a:pPr>
-              <a:defRPr sz="1275" b="0">
-                <a:solidFill>
-                  <a:srgbClr val="EEEEEE"/>
-                </a:solidFill>
-                <a:latin typeface="Consolas"/>
-                <a:ea typeface="Consolas"/>
-                <a:cs typeface="Consolas"/>
-              </a:defRPr>
-            </a:pPr>
-            <a:r>
-              <a:rPr sz="1275" b="0">
-                <a:solidFill>
-                  <a:srgbClr val="EEEEEE"/>
-                </a:solidFill>
-                <a:latin typeface="Consolas"/>
-                <a:ea typeface="Consolas"/>
-                <a:cs typeface="Consolas"/>
-              </a:rPr>
-              <a:t>    .option("kafka.bootstrap.servers", BOOTSTRAP_SERVERS)</a:t>
-            </a:r>
-          </a:p>
-          <a:p>
-            <a:pPr>
-              <a:defRPr sz="1275" b="0">
-                <a:solidFill>
-                  <a:srgbClr val="EEEEEE"/>
-                </a:solidFill>
-                <a:latin typeface="Consolas"/>
-                <a:ea typeface="Consolas"/>
-                <a:cs typeface="Consolas"/>
-              </a:defRPr>
-            </a:pPr>
-            <a:r>
-              <a:rPr sz="1275" b="0">
-                <a:solidFill>
-                  <a:srgbClr val="EEEEEE"/>
-                </a:solidFill>
-                <a:latin typeface="Consolas"/>
-                <a:ea typeface="Consolas"/>
-                <a:cs typeface="Consolas"/>
-              </a:rPr>
-              <a:t>    .option("subscribe", TOPIC)</a:t>
-            </a:r>
-          </a:p>
-          <a:p>
-            <a:pPr>
-              <a:defRPr sz="1275" b="0">
-                <a:solidFill>
-                  <a:srgbClr val="EEEEEE"/>
-                </a:solidFill>
-                <a:latin typeface="Consolas"/>
-                <a:ea typeface="Consolas"/>
-                <a:cs typeface="Consolas"/>
-              </a:defRPr>
-            </a:pPr>
-            <a:r>
-              <a:rPr sz="1275" b="0">
-                <a:solidFill>
-                  <a:srgbClr val="EEEEEE"/>
-                </a:solidFill>
-                <a:latin typeface="Consolas"/>
-                <a:ea typeface="Consolas"/>
-                <a:cs typeface="Consolas"/>
-              </a:rPr>
-              <a:t>    .option("startingOffsets", "earliest")</a:t>
-            </a:r>
-          </a:p>
-          <a:p>
-            <a:pPr>
-              <a:defRPr sz="1275" b="0">
-                <a:solidFill>
-                  <a:srgbClr val="EEEEEE"/>
-                </a:solidFill>
-                <a:latin typeface="Consolas"/>
-                <a:ea typeface="Consolas"/>
-                <a:cs typeface="Consolas"/>
-              </a:defRPr>
-            </a:pPr>
-            <a:r>
-              <a:rPr sz="1275" b="0">
-                <a:solidFill>
-                  <a:srgbClr val="EEEEEE"/>
-                </a:solidFill>
-                <a:latin typeface="Consolas"/>
-                <a:ea typeface="Consolas"/>
-                <a:cs typeface="Consolas"/>
-              </a:rPr>
-              <a:t>    .option("maxOffsetsPerTrigger", 1000)</a:t>
-            </a:r>
-          </a:p>
-          <a:p>
-            <a:pPr>
-              <a:defRPr sz="1275" b="0">
-                <a:solidFill>
-                  <a:srgbClr val="EEEEEE"/>
-                </a:solidFill>
-                <a:latin typeface="Consolas"/>
-                <a:ea typeface="Consolas"/>
-                <a:cs typeface="Consolas"/>
-              </a:defRPr>
-            </a:pPr>
-            <a:r>
-              <a:rPr sz="1275" b="0">
-                <a:solidFill>
-                  <a:srgbClr val="EEEEEE"/>
-                </a:solidFill>
-                <a:latin typeface="Consolas"/>
-                <a:ea typeface="Consolas"/>
-                <a:cs typeface="Consolas"/>
-              </a:rPr>
-              <a:t>    .load())</a:t>
-            </a:r>
-          </a:p>
-          <a:p>
-            <a:endParaRPr sz="1275" b="0">
+              </a:rPr>
+              <a:t>spark.readStream</a:t>
+            </a:r>
+            <a:endParaRPr sz="1275" b="0" dirty="0">
               <a:solidFill>
                 <a:srgbClr val="EEEEEE"/>
               </a:solidFill>
@@ -28170,7 +30024,7 @@
               </a:defRPr>
             </a:pPr>
             <a:r>
-              <a:rPr sz="1275" b="0">
+              <a:rPr sz="1275" b="0" dirty="0">
                 <a:solidFill>
                   <a:srgbClr val="EEEEEE"/>
                 </a:solidFill>
@@ -28178,7 +30032,29 @@
                 <a:ea typeface="Consolas"/>
                 <a:cs typeface="Consolas"/>
               </a:rPr>
-              <a:t>print(raw.isStreaming)  # True</a:t>
+              <a:t>    .format("</a:t>
+            </a:r>
+            <a:r>
+              <a:rPr sz="1275" b="0" dirty="0" err="1">
+                <a:solidFill>
+                  <a:srgbClr val="EEEEEE"/>
+                </a:solidFill>
+                <a:latin typeface="Consolas"/>
+                <a:ea typeface="Consolas"/>
+                <a:cs typeface="Consolas"/>
+              </a:rPr>
+              <a:t>kafka</a:t>
+            </a:r>
+            <a:r>
+              <a:rPr sz="1275" b="0" dirty="0">
+                <a:solidFill>
+                  <a:srgbClr val="EEEEEE"/>
+                </a:solidFill>
+                <a:latin typeface="Consolas"/>
+                <a:ea typeface="Consolas"/>
+                <a:cs typeface="Consolas"/>
+              </a:rPr>
+              <a:t>")</a:t>
             </a:r>
           </a:p>
           <a:p>
@@ -28193,7 +30069,7 @@
               </a:defRPr>
             </a:pPr>
             <a:r>
-              <a:rPr sz="1275" b="0">
+              <a:rPr sz="1275" b="0" dirty="0">
                 <a:solidFill>
                   <a:srgbClr val="EEEEEE"/>
                 </a:solidFill>
@@ -28201,7 +30077,254 @@
                 <a:ea typeface="Consolas"/>
                 <a:cs typeface="Consolas"/>
               </a:rPr>
-              <a:t>raw.printSchema()</a:t>
+              <a:t>    .option("</a:t>
+            </a:r>
+            <a:r>
+              <a:rPr sz="1275" b="0" dirty="0" err="1">
+                <a:solidFill>
+                  <a:srgbClr val="EEEEEE"/>
+                </a:solidFill>
+                <a:latin typeface="Consolas"/>
+                <a:ea typeface="Consolas"/>
+                <a:cs typeface="Consolas"/>
+              </a:rPr>
+              <a:t>kafka.bootstrap.servers</a:t>
+            </a:r>
+            <a:r>
+              <a:rPr sz="1275" b="0" dirty="0">
+                <a:solidFill>
+                  <a:srgbClr val="EEEEEE"/>
+                </a:solidFill>
+                <a:latin typeface="Consolas"/>
+                <a:ea typeface="Consolas"/>
+                <a:cs typeface="Consolas"/>
+              </a:rPr>
+              <a:t>", BOOTSTRAP_SERVERS)</a:t>
+            </a:r>
+          </a:p>
+          <a:p>
+            <a:pPr>
+              <a:defRPr sz="1275" b="0">
+                <a:solidFill>
+                  <a:srgbClr val="EEEEEE"/>
+                </a:solidFill>
+                <a:latin typeface="Consolas"/>
+                <a:ea typeface="Consolas"/>
+                <a:cs typeface="Consolas"/>
+              </a:defRPr>
+            </a:pPr>
+            <a:r>
+              <a:rPr sz="1275" b="0" dirty="0">
+                <a:solidFill>
+                  <a:srgbClr val="EEEEEE"/>
+                </a:solidFill>
+                <a:latin typeface="Consolas"/>
+                <a:ea typeface="Consolas"/>
+                <a:cs typeface="Consolas"/>
+              </a:rPr>
+              <a:t>    .option("subscribe", TOPIC)</a:t>
+            </a:r>
+          </a:p>
+          <a:p>
+            <a:pPr>
+              <a:defRPr sz="1275" b="0">
+                <a:solidFill>
+                  <a:srgbClr val="EEEEEE"/>
+                </a:solidFill>
+                <a:latin typeface="Consolas"/>
+                <a:ea typeface="Consolas"/>
+                <a:cs typeface="Consolas"/>
+              </a:defRPr>
+            </a:pPr>
+            <a:r>
+              <a:rPr sz="1275" b="0" dirty="0">
+                <a:solidFill>
+                  <a:srgbClr val="EEEEEE"/>
+                </a:solidFill>
+                <a:latin typeface="Consolas"/>
+                <a:ea typeface="Consolas"/>
+                <a:cs typeface="Consolas"/>
+              </a:rPr>
+              <a:t>    .option("</a:t>
+            </a:r>
+            <a:r>
+              <a:rPr sz="1275" b="0" dirty="0" err="1">
+                <a:solidFill>
+                  <a:srgbClr val="EEEEEE"/>
+                </a:solidFill>
+                <a:latin typeface="Consolas"/>
+                <a:ea typeface="Consolas"/>
+                <a:cs typeface="Consolas"/>
+              </a:rPr>
+              <a:t>startingOffsets</a:t>
+            </a:r>
+            <a:r>
+              <a:rPr sz="1275" b="0" dirty="0">
+                <a:solidFill>
+                  <a:srgbClr val="EEEEEE"/>
+                </a:solidFill>
+                <a:latin typeface="Consolas"/>
+                <a:ea typeface="Consolas"/>
+                <a:cs typeface="Consolas"/>
+              </a:rPr>
+              <a:t>", "earliest")</a:t>
+            </a:r>
+          </a:p>
+          <a:p>
+            <a:pPr>
+              <a:defRPr sz="1275" b="0">
+                <a:solidFill>
+                  <a:srgbClr val="EEEEEE"/>
+                </a:solidFill>
+                <a:latin typeface="Consolas"/>
+                <a:ea typeface="Consolas"/>
+                <a:cs typeface="Consolas"/>
+              </a:defRPr>
+            </a:pPr>
+            <a:r>
+              <a:rPr sz="1275" b="0" dirty="0">
+                <a:solidFill>
+                  <a:srgbClr val="EEEEEE"/>
+                </a:solidFill>
+                <a:latin typeface="Consolas"/>
+                <a:ea typeface="Consolas"/>
+                <a:cs typeface="Consolas"/>
+              </a:rPr>
+              <a:t>    .option("</a:t>
+            </a:r>
+            <a:r>
+              <a:rPr sz="1275" b="0" dirty="0" err="1">
+                <a:solidFill>
+                  <a:srgbClr val="EEEEEE"/>
+                </a:solidFill>
+                <a:latin typeface="Consolas"/>
+                <a:ea typeface="Consolas"/>
+                <a:cs typeface="Consolas"/>
+              </a:rPr>
+              <a:t>maxOffsetsPerTrigger</a:t>
+            </a:r>
+            <a:r>
+              <a:rPr sz="1275" b="0" dirty="0">
+                <a:solidFill>
+                  <a:srgbClr val="EEEEEE"/>
+                </a:solidFill>
+                <a:latin typeface="Consolas"/>
+                <a:ea typeface="Consolas"/>
+                <a:cs typeface="Consolas"/>
+              </a:rPr>
+              <a:t>", 1000)</a:t>
+            </a:r>
+          </a:p>
+          <a:p>
+            <a:pPr>
+              <a:defRPr sz="1275" b="0">
+                <a:solidFill>
+                  <a:srgbClr val="EEEEEE"/>
+                </a:solidFill>
+                <a:latin typeface="Consolas"/>
+                <a:ea typeface="Consolas"/>
+                <a:cs typeface="Consolas"/>
+              </a:defRPr>
+            </a:pPr>
+            <a:r>
+              <a:rPr sz="1275" b="0" dirty="0">
+                <a:solidFill>
+                  <a:srgbClr val="EEEEEE"/>
+                </a:solidFill>
+                <a:latin typeface="Consolas"/>
+                <a:ea typeface="Consolas"/>
+                <a:cs typeface="Consolas"/>
+              </a:rPr>
+              <a:t>    .load())</a:t>
+            </a:r>
+          </a:p>
+          <a:p>
+            <a:endParaRPr sz="1275" b="0" dirty="0">
+              <a:solidFill>
+                <a:srgbClr val="EEEEEE"/>
+              </a:solidFill>
+              <a:latin typeface="Consolas"/>
+              <a:ea typeface="Consolas"/>
+              <a:cs typeface="Consolas"/>
+            </a:endParaRPr>
+          </a:p>
+          <a:p>
+            <a:pPr>
+              <a:defRPr sz="1275" b="0">
+                <a:solidFill>
+                  <a:srgbClr val="EEEEEE"/>
+                </a:solidFill>
+                <a:latin typeface="Consolas"/>
+                <a:ea typeface="Consolas"/>
+                <a:cs typeface="Consolas"/>
+              </a:defRPr>
+            </a:pPr>
+            <a:r>
+              <a:rPr sz="1275" b="0" dirty="0">
+                <a:solidFill>
+                  <a:srgbClr val="EEEEEE"/>
+                </a:solidFill>
+                <a:latin typeface="Consolas"/>
+                <a:ea typeface="Consolas"/>
+                <a:cs typeface="Consolas"/>
+              </a:rPr>
+              <a:t>print(</a:t>
+            </a:r>
+            <a:r>
+              <a:rPr sz="1275" b="0" dirty="0" err="1">
+                <a:solidFill>
+                  <a:srgbClr val="EEEEEE"/>
+                </a:solidFill>
+                <a:latin typeface="Consolas"/>
+                <a:ea typeface="Consolas"/>
+                <a:cs typeface="Consolas"/>
+              </a:rPr>
+              <a:t>raw.isStreaming</a:t>
+            </a:r>
+            <a:r>
+              <a:rPr sz="1275" b="0" dirty="0">
+                <a:solidFill>
+                  <a:srgbClr val="EEEEEE"/>
+                </a:solidFill>
+                <a:latin typeface="Consolas"/>
+                <a:ea typeface="Consolas"/>
+                <a:cs typeface="Consolas"/>
+              </a:rPr>
+              <a:t>)  # True</a:t>
+            </a:r>
+          </a:p>
+          <a:p>
+            <a:pPr>
+              <a:defRPr sz="1275" b="0">
+                <a:solidFill>
+                  <a:srgbClr val="EEEEEE"/>
+                </a:solidFill>
+                <a:latin typeface="Consolas"/>
+                <a:ea typeface="Consolas"/>
+                <a:cs typeface="Consolas"/>
+              </a:defRPr>
+            </a:pPr>
+            <a:r>
+              <a:rPr sz="1275" b="0" dirty="0" err="1">
+                <a:solidFill>
+                  <a:srgbClr val="EEEEEE"/>
+                </a:solidFill>
+                <a:latin typeface="Consolas"/>
+                <a:ea typeface="Consolas"/>
+                <a:cs typeface="Consolas"/>
+              </a:rPr>
+              <a:t>raw.printSchema</a:t>
+            </a:r>
+            <a:r>
+              <a:rPr sz="1275" b="0" dirty="0">
+                <a:solidFill>
+                  <a:srgbClr val="EEEEEE"/>
+                </a:solidFill>
+                <a:latin typeface="Consolas"/>
+                <a:ea typeface="Consolas"/>
+                <a:cs typeface="Consolas"/>
+              </a:rPr>
+              <a:t>()</a:t>
             </a:r>
           </a:p>
         </p:txBody>
@@ -28713,7 +30836,7 @@
               </a:defRPr>
             </a:pPr>
             <a:r>
-              <a:rPr sz="1275" b="0">
+              <a:rPr sz="1275" b="0" dirty="0">
                 <a:solidFill>
                   <a:srgbClr val="EEEEEE"/>
                 </a:solidFill>
@@ -28736,7 +30859,7 @@
               </a:defRPr>
             </a:pPr>
             <a:r>
-              <a:rPr sz="1275" b="0">
+              <a:rPr sz="1275" b="0" dirty="0">
                 <a:solidFill>
                   <a:srgbClr val="EEEEEE"/>
                 </a:solidFill>
@@ -28744,7 +30867,73 @@
                 <a:ea typeface="Consolas"/>
                 <a:cs typeface="Consolas"/>
               </a:rPr>
-              <a:t>    StructField("features", ArrayType(DoubleType()), True),</a:t>
+              <a:t>    </a:t>
+            </a:r>
+            <a:r>
+              <a:rPr sz="1275" b="0" dirty="0" err="1">
+                <a:solidFill>
+                  <a:srgbClr val="EEEEEE"/>
+                </a:solidFill>
+                <a:latin typeface="Consolas"/>
+                <a:ea typeface="Consolas"/>
+                <a:cs typeface="Consolas"/>
+              </a:rPr>
+              <a:t>StructField</a:t>
+            </a:r>
+            <a:r>
+              <a:rPr sz="1275" b="0" dirty="0">
+                <a:solidFill>
+                  <a:srgbClr val="EEEEEE"/>
+                </a:solidFill>
+                <a:latin typeface="Consolas"/>
+                <a:ea typeface="Consolas"/>
+                <a:cs typeface="Consolas"/>
+              </a:rPr>
+              <a:t>("features", </a:t>
+            </a:r>
+            <a:r>
+              <a:rPr sz="1275" b="0" dirty="0" err="1">
+                <a:solidFill>
+                  <a:srgbClr val="EEEEEE"/>
+                </a:solidFill>
+                <a:latin typeface="Consolas"/>
+                <a:ea typeface="Consolas"/>
+                <a:cs typeface="Consolas"/>
+              </a:rPr>
+              <a:t>ArrayType</a:t>
+            </a:r>
+            <a:r>
+              <a:rPr sz="1275" b="0" dirty="0">
+                <a:solidFill>
+                  <a:srgbClr val="EEEEEE"/>
+                </a:solidFill>
+                <a:latin typeface="Consolas"/>
+                <a:ea typeface="Consolas"/>
+                <a:cs typeface="Consolas"/>
+              </a:rPr>
+              <a:t>(</a:t>
+            </a:r>
+            <a:r>
+              <a:rPr sz="1275" b="0" dirty="0" err="1">
+                <a:solidFill>
+                  <a:srgbClr val="EEEEEE"/>
+                </a:solidFill>
+                <a:latin typeface="Consolas"/>
+                <a:ea typeface="Consolas"/>
+                <a:cs typeface="Consolas"/>
+              </a:rPr>
+              <a:t>DoubleType</a:t>
+            </a:r>
+            <a:r>
+              <a:rPr sz="1275" b="0" dirty="0">
+                <a:solidFill>
+                  <a:srgbClr val="EEEEEE"/>
+                </a:solidFill>
+                <a:latin typeface="Consolas"/>
+                <a:ea typeface="Consolas"/>
+                <a:cs typeface="Consolas"/>
+              </a:rPr>
+              <a:t>()), True),</a:t>
             </a:r>
           </a:p>
           <a:p>
@@ -28759,7 +30948,7 @@
               </a:defRPr>
             </a:pPr>
             <a:r>
-              <a:rPr sz="1275" b="0">
+              <a:rPr sz="1275" b="0" dirty="0">
                 <a:solidFill>
                   <a:srgbClr val="EEEEEE"/>
                 </a:solidFill>
@@ -28767,7 +30956,51 @@
                 <a:ea typeface="Consolas"/>
                 <a:cs typeface="Consolas"/>
               </a:rPr>
-              <a:t>    StructField("label", IntegerType(), True)</a:t>
+              <a:t>    </a:t>
+            </a:r>
+            <a:r>
+              <a:rPr sz="1275" b="0" dirty="0" err="1">
+                <a:solidFill>
+                  <a:srgbClr val="EEEEEE"/>
+                </a:solidFill>
+                <a:latin typeface="Consolas"/>
+                <a:ea typeface="Consolas"/>
+                <a:cs typeface="Consolas"/>
+              </a:rPr>
+              <a:t>StructField</a:t>
+            </a:r>
+            <a:r>
+              <a:rPr sz="1275" b="0" dirty="0">
+                <a:solidFill>
+                  <a:srgbClr val="EEEEEE"/>
+                </a:solidFill>
+                <a:latin typeface="Consolas"/>
+                <a:ea typeface="Consolas"/>
+                <a:cs typeface="Consolas"/>
+              </a:rPr>
+              <a:t>("label", </a:t>
+            </a:r>
+            <a:r>
+              <a:rPr sz="1275" b="0" dirty="0" err="1">
+                <a:solidFill>
+                  <a:srgbClr val="EEEEEE"/>
+                </a:solidFill>
+                <a:latin typeface="Consolas"/>
+                <a:ea typeface="Consolas"/>
+                <a:cs typeface="Consolas"/>
+              </a:rPr>
+              <a:t>IntegerType</a:t>
+            </a:r>
+            <a:r>
+              <a:rPr sz="1275" b="0" dirty="0">
+                <a:solidFill>
+                  <a:srgbClr val="EEEEEE"/>
+                </a:solidFill>
+                <a:latin typeface="Consolas"/>
+                <a:ea typeface="Consolas"/>
+                <a:cs typeface="Consolas"/>
+              </a:rPr>
+              <a:t>(), True)</a:t>
             </a:r>
           </a:p>
           <a:p>
@@ -28782,7 +31015,7 @@
               </a:defRPr>
             </a:pPr>
             <a:r>
-              <a:rPr sz="1275" b="0">
+              <a:rPr sz="1275" b="0" dirty="0">
                 <a:solidFill>
                   <a:srgbClr val="EEEEEE"/>
                 </a:solidFill>
@@ -28794,7 +31027,7 @@
             </a:r>
           </a:p>
           <a:p>
-            <a:endParaRPr sz="1275" b="0">
+            <a:endParaRPr sz="1275" b="0" dirty="0">
               <a:solidFill>
                 <a:srgbClr val="EEEEEE"/>
               </a:solidFill>
@@ -28815,7 +31048,7 @@
               </a:defRPr>
             </a:pPr>
             <a:r>
-              <a:rPr sz="1275" b="0">
+              <a:rPr sz="1275" b="0" dirty="0">
                 <a:solidFill>
                   <a:srgbClr val="EEEEEE"/>
                 </a:solidFill>
@@ -28823,7 +31056,29 @@
                 <a:ea typeface="Consolas"/>
                 <a:cs typeface="Consolas"/>
               </a:rPr>
-              <a:t>parsed = raw.select(</a:t>
+              <a:t>parsed = </a:t>
+            </a:r>
+            <a:r>
+              <a:rPr sz="1275" b="0" dirty="0" err="1">
+                <a:solidFill>
+                  <a:srgbClr val="EEEEEE"/>
+                </a:solidFill>
+                <a:latin typeface="Consolas"/>
+                <a:ea typeface="Consolas"/>
+                <a:cs typeface="Consolas"/>
+              </a:rPr>
+              <a:t>raw.select</a:t>
+            </a:r>
+            <a:r>
+              <a:rPr sz="1275" b="0" dirty="0">
+                <a:solidFill>
+                  <a:srgbClr val="EEEEEE"/>
+                </a:solidFill>
+                <a:latin typeface="Consolas"/>
+                <a:ea typeface="Consolas"/>
+                <a:cs typeface="Consolas"/>
+              </a:rPr>
+              <a:t>(</a:t>
             </a:r>
           </a:p>
           <a:p>
@@ -28838,7 +31093,7 @@
               </a:defRPr>
             </a:pPr>
             <a:r>
-              <a:rPr sz="1275" b="0">
+              <a:rPr sz="1275" b="0" dirty="0">
                 <a:solidFill>
                   <a:srgbClr val="EEEEEE"/>
                 </a:solidFill>
@@ -28861,7 +31116,7 @@
               </a:defRPr>
             </a:pPr>
             <a:r>
-              <a:rPr sz="1275" b="0">
+              <a:rPr sz="1275" b="0" dirty="0">
                 <a:solidFill>
                   <a:srgbClr val="EEEEEE"/>
                 </a:solidFill>
@@ -28869,7 +31124,51 @@
                 <a:ea typeface="Consolas"/>
                 <a:cs typeface="Consolas"/>
               </a:rPr>
-              <a:t>    F.from_json(F.col("value").cast("string"), schema)</a:t>
+              <a:t>    </a:t>
+            </a:r>
+            <a:r>
+              <a:rPr sz="1275" b="0" dirty="0" err="1">
+                <a:solidFill>
+                  <a:srgbClr val="EEEEEE"/>
+                </a:solidFill>
+                <a:latin typeface="Consolas"/>
+                <a:ea typeface="Consolas"/>
+                <a:cs typeface="Consolas"/>
+              </a:rPr>
+              <a:t>F.from_json</a:t>
+            </a:r>
+            <a:r>
+              <a:rPr sz="1275" b="0" dirty="0">
+                <a:solidFill>
+                  <a:srgbClr val="EEEEEE"/>
+                </a:solidFill>
+                <a:latin typeface="Consolas"/>
+                <a:ea typeface="Consolas"/>
+                <a:cs typeface="Consolas"/>
+              </a:rPr>
+              <a:t>(</a:t>
+            </a:r>
+            <a:r>
+              <a:rPr sz="1275" b="0" dirty="0" err="1">
+                <a:solidFill>
+                  <a:srgbClr val="EEEEEE"/>
+                </a:solidFill>
+                <a:latin typeface="Consolas"/>
+                <a:ea typeface="Consolas"/>
+                <a:cs typeface="Consolas"/>
+              </a:rPr>
+              <a:t>F.col</a:t>
+            </a:r>
+            <a:r>
+              <a:rPr sz="1275" b="0" dirty="0">
+                <a:solidFill>
+                  <a:srgbClr val="EEEEEE"/>
+                </a:solidFill>
+                <a:latin typeface="Consolas"/>
+                <a:ea typeface="Consolas"/>
+                <a:cs typeface="Consolas"/>
+              </a:rPr>
+              <a:t>("value").cast("string"), schema)</a:t>
             </a:r>
           </a:p>
           <a:p>
@@ -28884,7 +31183,7 @@
               </a:defRPr>
             </a:pPr>
             <a:r>
-              <a:rPr sz="1275" b="0">
+              <a:rPr sz="1275" b="0" dirty="0">
                 <a:solidFill>
                   <a:srgbClr val="EEEEEE"/>
                 </a:solidFill>
@@ -28907,7 +31206,7 @@
               </a:defRPr>
             </a:pPr>
             <a:r>
-              <a:rPr sz="1275" b="0">
+              <a:rPr sz="1275" b="0" dirty="0">
                 <a:solidFill>
                   <a:srgbClr val="EEEEEE"/>
                 </a:solidFill>
@@ -29404,7 +31703,7 @@
               </a:defRPr>
             </a:pPr>
             <a:r>
-              <a:rPr sz="1275" b="0">
+              <a:rPr sz="1275" b="0" dirty="0">
                 <a:solidFill>
                   <a:srgbClr val="EEEEEE"/>
                 </a:solidFill>
@@ -29412,7 +31711,29 @@
                 <a:ea typeface="Consolas"/>
                 <a:cs typeface="Consolas"/>
               </a:rPr>
-              <a:t>valid = parsed.where(</a:t>
+              <a:t>valid = </a:t>
+            </a:r>
+            <a:r>
+              <a:rPr sz="1275" b="0" dirty="0" err="1">
+                <a:solidFill>
+                  <a:srgbClr val="EEEEEE"/>
+                </a:solidFill>
+                <a:latin typeface="Consolas"/>
+                <a:ea typeface="Consolas"/>
+                <a:cs typeface="Consolas"/>
+              </a:rPr>
+              <a:t>parsed.where</a:t>
+            </a:r>
+            <a:r>
+              <a:rPr sz="1275" b="0" dirty="0">
+                <a:solidFill>
+                  <a:srgbClr val="EEEEEE"/>
+                </a:solidFill>
+                <a:latin typeface="Consolas"/>
+                <a:ea typeface="Consolas"/>
+                <a:cs typeface="Consolas"/>
+              </a:rPr>
+              <a:t>(</a:t>
             </a:r>
           </a:p>
           <a:p>
@@ -29427,7 +31748,7 @@
               </a:defRPr>
             </a:pPr>
             <a:r>
-              <a:rPr sz="1275" b="0">
+              <a:rPr sz="1275" b="0" dirty="0">
                 <a:solidFill>
                   <a:srgbClr val="EEEEEE"/>
                 </a:solidFill>
@@ -29435,7 +31756,51 @@
                 <a:ea typeface="Consolas"/>
                 <a:cs typeface="Consolas"/>
               </a:rPr>
-              <a:t>    (F.size("data.features") == 2) &amp;</a:t>
+              <a:t>    (</a:t>
+            </a:r>
+            <a:r>
+              <a:rPr sz="1275" b="0" dirty="0" err="1">
+                <a:solidFill>
+                  <a:srgbClr val="EEEEEE"/>
+                </a:solidFill>
+                <a:latin typeface="Consolas"/>
+                <a:ea typeface="Consolas"/>
+                <a:cs typeface="Consolas"/>
+              </a:rPr>
+              <a:t>F.size</a:t>
+            </a:r>
+            <a:r>
+              <a:rPr sz="1275" b="0" dirty="0">
+                <a:solidFill>
+                  <a:srgbClr val="EEEEEE"/>
+                </a:solidFill>
+                <a:latin typeface="Consolas"/>
+                <a:ea typeface="Consolas"/>
+                <a:cs typeface="Consolas"/>
+              </a:rPr>
+              <a:t>("</a:t>
+            </a:r>
+            <a:r>
+              <a:rPr sz="1275" b="0" dirty="0" err="1">
+                <a:solidFill>
+                  <a:srgbClr val="EEEEEE"/>
+                </a:solidFill>
+                <a:latin typeface="Consolas"/>
+                <a:ea typeface="Consolas"/>
+                <a:cs typeface="Consolas"/>
+              </a:rPr>
+              <a:t>data.features</a:t>
+            </a:r>
+            <a:r>
+              <a:rPr sz="1275" b="0" dirty="0">
+                <a:solidFill>
+                  <a:srgbClr val="EEEEEE"/>
+                </a:solidFill>
+                <a:latin typeface="Consolas"/>
+                <a:ea typeface="Consolas"/>
+                <a:cs typeface="Consolas"/>
+              </a:rPr>
+              <a:t>") == 2) &amp;</a:t>
             </a:r>
           </a:p>
           <a:p>
@@ -29450,7 +31815,7 @@
               </a:defRPr>
             </a:pPr>
             <a:r>
-              <a:rPr sz="1275" b="0">
+              <a:rPr sz="1275" b="0" dirty="0">
                 <a:solidFill>
                   <a:srgbClr val="EEEEEE"/>
                 </a:solidFill>
@@ -29458,7 +31823,73 @@
                 <a:ea typeface="Consolas"/>
                 <a:cs typeface="Consolas"/>
               </a:rPr>
-              <a:t>    F.col("data.label").isin(0, 1) &amp;</a:t>
+              <a:t>    </a:t>
+            </a:r>
+            <a:r>
+              <a:rPr sz="1275" b="0" dirty="0" err="1">
+                <a:solidFill>
+                  <a:srgbClr val="EEEEEE"/>
+                </a:solidFill>
+                <a:latin typeface="Consolas"/>
+                <a:ea typeface="Consolas"/>
+                <a:cs typeface="Consolas"/>
+              </a:rPr>
+              <a:t>F.col</a:t>
+            </a:r>
+            <a:r>
+              <a:rPr sz="1275" b="0" dirty="0">
+                <a:solidFill>
+                  <a:srgbClr val="EEEEEE"/>
+                </a:solidFill>
+                <a:latin typeface="Consolas"/>
+                <a:ea typeface="Consolas"/>
+                <a:cs typeface="Consolas"/>
+              </a:rPr>
+              <a:t>("</a:t>
+            </a:r>
+            <a:r>
+              <a:rPr sz="1275" b="0" dirty="0" err="1">
+                <a:solidFill>
+                  <a:srgbClr val="EEEEEE"/>
+                </a:solidFill>
+                <a:latin typeface="Consolas"/>
+                <a:ea typeface="Consolas"/>
+                <a:cs typeface="Consolas"/>
+              </a:rPr>
+              <a:t>data.label</a:t>
+            </a:r>
+            <a:r>
+              <a:rPr sz="1275" b="0" dirty="0">
+                <a:solidFill>
+                  <a:srgbClr val="EEEEEE"/>
+                </a:solidFill>
+                <a:latin typeface="Consolas"/>
+                <a:ea typeface="Consolas"/>
+                <a:cs typeface="Consolas"/>
+              </a:rPr>
+              <a:t>").</a:t>
+            </a:r>
+            <a:r>
+              <a:rPr sz="1275" b="0" dirty="0" err="1">
+                <a:solidFill>
+                  <a:srgbClr val="EEEEEE"/>
+                </a:solidFill>
+                <a:latin typeface="Consolas"/>
+                <a:ea typeface="Consolas"/>
+                <a:cs typeface="Consolas"/>
+              </a:rPr>
+              <a:t>isin</a:t>
+            </a:r>
+            <a:r>
+              <a:rPr sz="1275" b="0" dirty="0">
+                <a:solidFill>
+                  <a:srgbClr val="EEEEEE"/>
+                </a:solidFill>
+                <a:latin typeface="Consolas"/>
+                <a:ea typeface="Consolas"/>
+                <a:cs typeface="Consolas"/>
+              </a:rPr>
+              <a:t>(0, 1) &amp;</a:t>
             </a:r>
           </a:p>
           <a:p>
@@ -29473,7 +31904,7 @@
               </a:defRPr>
             </a:pPr>
             <a:r>
-              <a:rPr sz="1275" b="0">
+              <a:rPr sz="1275" b="0" dirty="0">
                 <a:solidFill>
                   <a:srgbClr val="EEEEEE"/>
                 </a:solidFill>
@@ -29481,7 +31912,73 @@
                 <a:ea typeface="Consolas"/>
                 <a:cs typeface="Consolas"/>
               </a:rPr>
-              <a:t>    F.col("data.features")[0].isNotNull() &amp;</a:t>
+              <a:t>    </a:t>
+            </a:r>
+            <a:r>
+              <a:rPr sz="1275" b="0" dirty="0" err="1">
+                <a:solidFill>
+                  <a:srgbClr val="EEEEEE"/>
+                </a:solidFill>
+                <a:latin typeface="Consolas"/>
+                <a:ea typeface="Consolas"/>
+                <a:cs typeface="Consolas"/>
+              </a:rPr>
+              <a:t>F.col</a:t>
+            </a:r>
+            <a:r>
+              <a:rPr sz="1275" b="0" dirty="0">
+                <a:solidFill>
+                  <a:srgbClr val="EEEEEE"/>
+                </a:solidFill>
+                <a:latin typeface="Consolas"/>
+                <a:ea typeface="Consolas"/>
+                <a:cs typeface="Consolas"/>
+              </a:rPr>
+              <a:t>("</a:t>
+            </a:r>
+            <a:r>
+              <a:rPr sz="1275" b="0" dirty="0" err="1">
+                <a:solidFill>
+                  <a:srgbClr val="EEEEEE"/>
+                </a:solidFill>
+                <a:latin typeface="Consolas"/>
+                <a:ea typeface="Consolas"/>
+                <a:cs typeface="Consolas"/>
+              </a:rPr>
+              <a:t>data.features</a:t>
+            </a:r>
+            <a:r>
+              <a:rPr sz="1275" b="0" dirty="0">
+                <a:solidFill>
+                  <a:srgbClr val="EEEEEE"/>
+                </a:solidFill>
+                <a:latin typeface="Consolas"/>
+                <a:ea typeface="Consolas"/>
+                <a:cs typeface="Consolas"/>
+              </a:rPr>
+              <a:t>")[0].</a:t>
+            </a:r>
+            <a:r>
+              <a:rPr sz="1275" b="0" dirty="0" err="1">
+                <a:solidFill>
+                  <a:srgbClr val="EEEEEE"/>
+                </a:solidFill>
+                <a:latin typeface="Consolas"/>
+                <a:ea typeface="Consolas"/>
+                <a:cs typeface="Consolas"/>
+              </a:rPr>
+              <a:t>isNotNull</a:t>
+            </a:r>
+            <a:r>
+              <a:rPr sz="1275" b="0" dirty="0">
+                <a:solidFill>
+                  <a:srgbClr val="EEEEEE"/>
+                </a:solidFill>
+                <a:latin typeface="Consolas"/>
+                <a:ea typeface="Consolas"/>
+                <a:cs typeface="Consolas"/>
+              </a:rPr>
+              <a:t>() &amp;</a:t>
             </a:r>
           </a:p>
           <a:p>
@@ -29496,7 +31993,7 @@
               </a:defRPr>
             </a:pPr>
             <a:r>
-              <a:rPr sz="1275" b="0">
+              <a:rPr sz="1275" b="0" dirty="0">
                 <a:solidFill>
                   <a:srgbClr val="EEEEEE"/>
                 </a:solidFill>
@@ -29504,7 +32001,73 @@
                 <a:ea typeface="Consolas"/>
                 <a:cs typeface="Consolas"/>
               </a:rPr>
-              <a:t>    F.col("data.features")[1].isNotNull()</a:t>
+              <a:t>    </a:t>
+            </a:r>
+            <a:r>
+              <a:rPr sz="1275" b="0" dirty="0" err="1">
+                <a:solidFill>
+                  <a:srgbClr val="EEEEEE"/>
+                </a:solidFill>
+                <a:latin typeface="Consolas"/>
+                <a:ea typeface="Consolas"/>
+                <a:cs typeface="Consolas"/>
+              </a:rPr>
+              <a:t>F.col</a:t>
+            </a:r>
+            <a:r>
+              <a:rPr sz="1275" b="0" dirty="0">
+                <a:solidFill>
+                  <a:srgbClr val="EEEEEE"/>
+                </a:solidFill>
+                <a:latin typeface="Consolas"/>
+                <a:ea typeface="Consolas"/>
+                <a:cs typeface="Consolas"/>
+              </a:rPr>
+              <a:t>("</a:t>
+            </a:r>
+            <a:r>
+              <a:rPr sz="1275" b="0" dirty="0" err="1">
+                <a:solidFill>
+                  <a:srgbClr val="EEEEEE"/>
+                </a:solidFill>
+                <a:latin typeface="Consolas"/>
+                <a:ea typeface="Consolas"/>
+                <a:cs typeface="Consolas"/>
+              </a:rPr>
+              <a:t>data.features</a:t>
+            </a:r>
+            <a:r>
+              <a:rPr sz="1275" b="0" dirty="0">
+                <a:solidFill>
+                  <a:srgbClr val="EEEEEE"/>
+                </a:solidFill>
+                <a:latin typeface="Consolas"/>
+                <a:ea typeface="Consolas"/>
+                <a:cs typeface="Consolas"/>
+              </a:rPr>
+              <a:t>")[1].</a:t>
+            </a:r>
+            <a:r>
+              <a:rPr sz="1275" b="0" dirty="0" err="1">
+                <a:solidFill>
+                  <a:srgbClr val="EEEEEE"/>
+                </a:solidFill>
+                <a:latin typeface="Consolas"/>
+                <a:ea typeface="Consolas"/>
+                <a:cs typeface="Consolas"/>
+              </a:rPr>
+              <a:t>isNotNull</a:t>
+            </a:r>
+            <a:r>
+              <a:rPr sz="1275" b="0" dirty="0">
+                <a:solidFill>
+                  <a:srgbClr val="EEEEEE"/>
+                </a:solidFill>
+                <a:latin typeface="Consolas"/>
+                <a:ea typeface="Consolas"/>
+                <a:cs typeface="Consolas"/>
+              </a:rPr>
+              <a:t>()</a:t>
             </a:r>
           </a:p>
           <a:p>
@@ -29519,7 +32082,7 @@
               </a:defRPr>
             </a:pPr>
             <a:r>
-              <a:rPr sz="1275" b="0">
+              <a:rPr sz="1275" b="0" dirty="0">
                 <a:solidFill>
                   <a:srgbClr val="EEEEEE"/>
                 </a:solidFill>
@@ -29542,7 +32105,7 @@
               </a:defRPr>
             </a:pPr>
             <a:r>
-              <a:rPr sz="1275" b="0">
+              <a:rPr sz="1275" b="0" dirty="0">
                 <a:solidFill>
                   <a:srgbClr val="EEEEEE"/>
                 </a:solidFill>
@@ -29550,7 +32113,29 @@
                 <a:ea typeface="Consolas"/>
                 <a:cs typeface="Consolas"/>
               </a:rPr>
-              <a:t>events = valid.select(</a:t>
+              <a:t>events = </a:t>
+            </a:r>
+            <a:r>
+              <a:rPr sz="1275" b="0" dirty="0" err="1">
+                <a:solidFill>
+                  <a:srgbClr val="EEEEEE"/>
+                </a:solidFill>
+                <a:latin typeface="Consolas"/>
+                <a:ea typeface="Consolas"/>
+                <a:cs typeface="Consolas"/>
+              </a:rPr>
+              <a:t>valid.select</a:t>
+            </a:r>
+            <a:r>
+              <a:rPr sz="1275" b="0" dirty="0">
+                <a:solidFill>
+                  <a:srgbClr val="EEEEEE"/>
+                </a:solidFill>
+                <a:latin typeface="Consolas"/>
+                <a:ea typeface="Consolas"/>
+                <a:cs typeface="Consolas"/>
+              </a:rPr>
+              <a:t>(</a:t>
             </a:r>
           </a:p>
           <a:p>
@@ -29565,7 +32150,7 @@
               </a:defRPr>
             </a:pPr>
             <a:r>
-              <a:rPr sz="1275" b="0">
+              <a:rPr sz="1275" b="0" dirty="0">
                 <a:solidFill>
                   <a:srgbClr val="EEEEEE"/>
                 </a:solidFill>
@@ -29588,7 +32173,7 @@
               </a:defRPr>
             </a:pPr>
             <a:r>
-              <a:rPr sz="1275" b="0">
+              <a:rPr sz="1275" b="0" dirty="0">
                 <a:solidFill>
                   <a:srgbClr val="EEEEEE"/>
                 </a:solidFill>
@@ -29596,7 +32181,51 @@
                 <a:ea typeface="Consolas"/>
                 <a:cs typeface="Consolas"/>
               </a:rPr>
-              <a:t>    F.col("data.features")[0].alias("x1"),</a:t>
+              <a:t>    </a:t>
+            </a:r>
+            <a:r>
+              <a:rPr sz="1275" b="0" dirty="0" err="1">
+                <a:solidFill>
+                  <a:srgbClr val="EEEEEE"/>
+                </a:solidFill>
+                <a:latin typeface="Consolas"/>
+                <a:ea typeface="Consolas"/>
+                <a:cs typeface="Consolas"/>
+              </a:rPr>
+              <a:t>F.col</a:t>
+            </a:r>
+            <a:r>
+              <a:rPr sz="1275" b="0" dirty="0">
+                <a:solidFill>
+                  <a:srgbClr val="EEEEEE"/>
+                </a:solidFill>
+                <a:latin typeface="Consolas"/>
+                <a:ea typeface="Consolas"/>
+                <a:cs typeface="Consolas"/>
+              </a:rPr>
+              <a:t>("</a:t>
+            </a:r>
+            <a:r>
+              <a:rPr sz="1275" b="0" dirty="0" err="1">
+                <a:solidFill>
+                  <a:srgbClr val="EEEEEE"/>
+                </a:solidFill>
+                <a:latin typeface="Consolas"/>
+                <a:ea typeface="Consolas"/>
+                <a:cs typeface="Consolas"/>
+              </a:rPr>
+              <a:t>data.features</a:t>
+            </a:r>
+            <a:r>
+              <a:rPr sz="1275" b="0" dirty="0">
+                <a:solidFill>
+                  <a:srgbClr val="EEEEEE"/>
+                </a:solidFill>
+                <a:latin typeface="Consolas"/>
+                <a:ea typeface="Consolas"/>
+                <a:cs typeface="Consolas"/>
+              </a:rPr>
+              <a:t>")[0].alias("x1"),</a:t>
             </a:r>
           </a:p>
           <a:p>
@@ -29611,7 +32240,7 @@
               </a:defRPr>
             </a:pPr>
             <a:r>
-              <a:rPr sz="1275" b="0">
+              <a:rPr sz="1275" b="0" dirty="0">
                 <a:solidFill>
                   <a:srgbClr val="EEEEEE"/>
                 </a:solidFill>
@@ -29619,7 +32248,51 @@
                 <a:ea typeface="Consolas"/>
                 <a:cs typeface="Consolas"/>
               </a:rPr>
-              <a:t>    F.col("data.features")[1].alias("x2"),</a:t>
+              <a:t>    </a:t>
+            </a:r>
+            <a:r>
+              <a:rPr sz="1275" b="0" dirty="0" err="1">
+                <a:solidFill>
+                  <a:srgbClr val="EEEEEE"/>
+                </a:solidFill>
+                <a:latin typeface="Consolas"/>
+                <a:ea typeface="Consolas"/>
+                <a:cs typeface="Consolas"/>
+              </a:rPr>
+              <a:t>F.col</a:t>
+            </a:r>
+            <a:r>
+              <a:rPr sz="1275" b="0" dirty="0">
+                <a:solidFill>
+                  <a:srgbClr val="EEEEEE"/>
+                </a:solidFill>
+                <a:latin typeface="Consolas"/>
+                <a:ea typeface="Consolas"/>
+                <a:cs typeface="Consolas"/>
+              </a:rPr>
+              <a:t>("</a:t>
+            </a:r>
+            <a:r>
+              <a:rPr sz="1275" b="0" dirty="0" err="1">
+                <a:solidFill>
+                  <a:srgbClr val="EEEEEE"/>
+                </a:solidFill>
+                <a:latin typeface="Consolas"/>
+                <a:ea typeface="Consolas"/>
+                <a:cs typeface="Consolas"/>
+              </a:rPr>
+              <a:t>data.features</a:t>
+            </a:r>
+            <a:r>
+              <a:rPr sz="1275" b="0" dirty="0">
+                <a:solidFill>
+                  <a:srgbClr val="EEEEEE"/>
+                </a:solidFill>
+                <a:latin typeface="Consolas"/>
+                <a:ea typeface="Consolas"/>
+                <a:cs typeface="Consolas"/>
+              </a:rPr>
+              <a:t>")[1].alias("x2"),</a:t>
             </a:r>
           </a:p>
           <a:p>
@@ -29634,7 +32307,7 @@
               </a:defRPr>
             </a:pPr>
             <a:r>
-              <a:rPr sz="1275" b="0">
+              <a:rPr sz="1275" b="0" dirty="0">
                 <a:solidFill>
                   <a:srgbClr val="EEEEEE"/>
                 </a:solidFill>
@@ -29642,7 +32315,51 @@
                 <a:ea typeface="Consolas"/>
                 <a:cs typeface="Consolas"/>
               </a:rPr>
-              <a:t>    F.col("data.label").alias("label")</a:t>
+              <a:t>    </a:t>
+            </a:r>
+            <a:r>
+              <a:rPr sz="1275" b="0" dirty="0" err="1">
+                <a:solidFill>
+                  <a:srgbClr val="EEEEEE"/>
+                </a:solidFill>
+                <a:latin typeface="Consolas"/>
+                <a:ea typeface="Consolas"/>
+                <a:cs typeface="Consolas"/>
+              </a:rPr>
+              <a:t>F.col</a:t>
+            </a:r>
+            <a:r>
+              <a:rPr sz="1275" b="0" dirty="0">
+                <a:solidFill>
+                  <a:srgbClr val="EEEEEE"/>
+                </a:solidFill>
+                <a:latin typeface="Consolas"/>
+                <a:ea typeface="Consolas"/>
+                <a:cs typeface="Consolas"/>
+              </a:rPr>
+              <a:t>("</a:t>
+            </a:r>
+            <a:r>
+              <a:rPr sz="1275" b="0" dirty="0" err="1">
+                <a:solidFill>
+                  <a:srgbClr val="EEEEEE"/>
+                </a:solidFill>
+                <a:latin typeface="Consolas"/>
+                <a:ea typeface="Consolas"/>
+                <a:cs typeface="Consolas"/>
+              </a:rPr>
+              <a:t>data.label</a:t>
+            </a:r>
+            <a:r>
+              <a:rPr sz="1275" b="0" dirty="0">
+                <a:solidFill>
+                  <a:srgbClr val="EEEEEE"/>
+                </a:solidFill>
+                <a:latin typeface="Consolas"/>
+                <a:ea typeface="Consolas"/>
+                <a:cs typeface="Consolas"/>
+              </a:rPr>
+              <a:t>").alias("label")</a:t>
             </a:r>
           </a:p>
           <a:p>
@@ -29657,7 +32374,7 @@
               </a:defRPr>
             </a:pPr>
             <a:r>
-              <a:rPr sz="1275" b="0">
+              <a:rPr sz="1275" b="0" dirty="0">
                 <a:solidFill>
                   <a:srgbClr val="EEEEEE"/>
                 </a:solidFill>
@@ -30154,7 +32871,7 @@
               </a:defRPr>
             </a:pPr>
             <a:r>
-              <a:rPr sz="1275" b="0">
+              <a:rPr sz="1275" b="0" dirty="0" err="1">
                 <a:solidFill>
                   <a:srgbClr val="EEEEEE"/>
                 </a:solidFill>
@@ -30162,8 +32879,38 @@
                 <a:ea typeface="Consolas"/>
                 <a:cs typeface="Consolas"/>
               </a:rPr>
-              <a:t>q_mem = (events.writeStream</a:t>
-            </a:r>
+              <a:t>q_mem</a:t>
+            </a:r>
+            <a:r>
+              <a:rPr sz="1275" b="0" dirty="0">
+                <a:solidFill>
+                  <a:srgbClr val="EEEEEE"/>
+                </a:solidFill>
+                <a:latin typeface="Consolas"/>
+                <a:ea typeface="Consolas"/>
+                <a:cs typeface="Consolas"/>
+              </a:rPr>
+              <a:t> = (</a:t>
+            </a:r>
+            <a:r>
+              <a:rPr sz="1275" b="0" dirty="0" err="1">
+                <a:solidFill>
+                  <a:srgbClr val="EEEEEE"/>
+                </a:solidFill>
+                <a:latin typeface="Consolas"/>
+                <a:ea typeface="Consolas"/>
+                <a:cs typeface="Consolas"/>
+              </a:rPr>
+              <a:t>events.writeStream</a:t>
+            </a:r>
+            <a:endParaRPr sz="1275" b="0" dirty="0">
+              <a:solidFill>
+                <a:srgbClr val="EEEEEE"/>
+              </a:solidFill>
+              <a:latin typeface="Consolas"/>
+              <a:ea typeface="Consolas"/>
+              <a:cs typeface="Consolas"/>
+            </a:endParaRPr>
           </a:p>
           <a:p>
             <a:pPr>
@@ -30177,7 +32924,7 @@
               </a:defRPr>
             </a:pPr>
             <a:r>
-              <a:rPr sz="1275" b="0">
+              <a:rPr sz="1275" b="0" dirty="0">
                 <a:solidFill>
                   <a:srgbClr val="EEEEEE"/>
                 </a:solidFill>
@@ -30200,7 +32947,7 @@
               </a:defRPr>
             </a:pPr>
             <a:r>
-              <a:rPr sz="1275" b="0">
+              <a:rPr sz="1275" b="0" dirty="0">
                 <a:solidFill>
                   <a:srgbClr val="EEEEEE"/>
                 </a:solidFill>
@@ -30208,7 +32955,51 @@
                 <a:ea typeface="Consolas"/>
                 <a:cs typeface="Consolas"/>
               </a:rPr>
-              <a:t>    .queryName("kafka_events")</a:t>
+              <a:t>    .</a:t>
+            </a:r>
+            <a:r>
+              <a:rPr sz="1275" b="0" dirty="0" err="1">
+                <a:solidFill>
+                  <a:srgbClr val="EEEEEE"/>
+                </a:solidFill>
+                <a:latin typeface="Consolas"/>
+                <a:ea typeface="Consolas"/>
+                <a:cs typeface="Consolas"/>
+              </a:rPr>
+              <a:t>queryName</a:t>
+            </a:r>
+            <a:r>
+              <a:rPr sz="1275" b="0" dirty="0">
+                <a:solidFill>
+                  <a:srgbClr val="EEEEEE"/>
+                </a:solidFill>
+                <a:latin typeface="Consolas"/>
+                <a:ea typeface="Consolas"/>
+                <a:cs typeface="Consolas"/>
+              </a:rPr>
+              <a:t>("</a:t>
+            </a:r>
+            <a:r>
+              <a:rPr sz="1275" b="0" dirty="0" err="1">
+                <a:solidFill>
+                  <a:srgbClr val="EEEEEE"/>
+                </a:solidFill>
+                <a:latin typeface="Consolas"/>
+                <a:ea typeface="Consolas"/>
+                <a:cs typeface="Consolas"/>
+              </a:rPr>
+              <a:t>kafka_events</a:t>
+            </a:r>
+            <a:r>
+              <a:rPr sz="1275" b="0" dirty="0">
+                <a:solidFill>
+                  <a:srgbClr val="EEEEEE"/>
+                </a:solidFill>
+                <a:latin typeface="Consolas"/>
+                <a:ea typeface="Consolas"/>
+                <a:cs typeface="Consolas"/>
+              </a:rPr>
+              <a:t>")</a:t>
             </a:r>
           </a:p>
           <a:p>
@@ -30223,7 +33014,7 @@
               </a:defRPr>
             </a:pPr>
             <a:r>
-              <a:rPr sz="1275" b="0">
+              <a:rPr sz="1275" b="0" dirty="0">
                 <a:solidFill>
                   <a:srgbClr val="EEEEEE"/>
                 </a:solidFill>
@@ -30231,7 +33022,29 @@
                 <a:ea typeface="Consolas"/>
                 <a:cs typeface="Consolas"/>
               </a:rPr>
-              <a:t>    .outputMode("append")</a:t>
+              <a:t>    .</a:t>
+            </a:r>
+            <a:r>
+              <a:rPr sz="1275" b="0" dirty="0" err="1">
+                <a:solidFill>
+                  <a:srgbClr val="EEEEEE"/>
+                </a:solidFill>
+                <a:latin typeface="Consolas"/>
+                <a:ea typeface="Consolas"/>
+                <a:cs typeface="Consolas"/>
+              </a:rPr>
+              <a:t>outputMode</a:t>
+            </a:r>
+            <a:r>
+              <a:rPr sz="1275" b="0" dirty="0">
+                <a:solidFill>
+                  <a:srgbClr val="EEEEEE"/>
+                </a:solidFill>
+                <a:latin typeface="Consolas"/>
+                <a:ea typeface="Consolas"/>
+                <a:cs typeface="Consolas"/>
+              </a:rPr>
+              <a:t>("append")</a:t>
             </a:r>
           </a:p>
           <a:p>
@@ -30246,7 +33059,7 @@
               </a:defRPr>
             </a:pPr>
             <a:r>
-              <a:rPr sz="1275" b="0">
+              <a:rPr sz="1275" b="0" dirty="0">
                 <a:solidFill>
                   <a:srgbClr val="EEEEEE"/>
                 </a:solidFill>
@@ -30254,7 +33067,29 @@
                 <a:ea typeface="Consolas"/>
                 <a:cs typeface="Consolas"/>
               </a:rPr>
-              <a:t>    .trigger(processingTime="2 seconds")</a:t>
+              <a:t>    .trigger(</a:t>
+            </a:r>
+            <a:r>
+              <a:rPr sz="1275" b="0" dirty="0" err="1">
+                <a:solidFill>
+                  <a:srgbClr val="EEEEEE"/>
+                </a:solidFill>
+                <a:latin typeface="Consolas"/>
+                <a:ea typeface="Consolas"/>
+                <a:cs typeface="Consolas"/>
+              </a:rPr>
+              <a:t>processingTime</a:t>
+            </a:r>
+            <a:r>
+              <a:rPr sz="1275" b="0" dirty="0">
+                <a:solidFill>
+                  <a:srgbClr val="EEEEEE"/>
+                </a:solidFill>
+                <a:latin typeface="Consolas"/>
+                <a:ea typeface="Consolas"/>
+                <a:cs typeface="Consolas"/>
+              </a:rPr>
+              <a:t>="2 seconds")</a:t>
             </a:r>
           </a:p>
           <a:p>
@@ -30269,7 +33104,7 @@
               </a:defRPr>
             </a:pPr>
             <a:r>
-              <a:rPr sz="1275" b="0">
+              <a:rPr sz="1275" b="0" dirty="0">
                 <a:solidFill>
                   <a:srgbClr val="EEEEEE"/>
                 </a:solidFill>
@@ -30766,7 +33601,7 @@
               </a:defRPr>
             </a:pPr>
             <a:r>
-              <a:rPr sz="1275" b="0">
+              <a:rPr sz="1275" b="0" dirty="0" err="1">
                 <a:solidFill>
                   <a:srgbClr val="EEEEEE"/>
                 </a:solidFill>
@@ -30774,7 +33609,18 @@
                 <a:ea typeface="Consolas"/>
                 <a:cs typeface="Consolas"/>
               </a:rPr>
-              <a:t>spark.sql("""</a:t>
+              <a:t>spark.sql</a:t>
+            </a:r>
+            <a:r>
+              <a:rPr sz="1275" b="0" dirty="0">
+                <a:solidFill>
+                  <a:srgbClr val="EEEEEE"/>
+                </a:solidFill>
+                <a:latin typeface="Consolas"/>
+                <a:ea typeface="Consolas"/>
+                <a:cs typeface="Consolas"/>
+              </a:rPr>
+              <a:t>("""</a:t>
             </a:r>
           </a:p>
           <a:p>
@@ -30789,7 +33635,7 @@
               </a:defRPr>
             </a:pPr>
             <a:r>
-              <a:rPr sz="1275" b="0">
+              <a:rPr sz="1275" b="0" dirty="0">
                 <a:solidFill>
                   <a:srgbClr val="EEEEEE"/>
                 </a:solidFill>
@@ -30812,7 +33658,7 @@
               </a:defRPr>
             </a:pPr>
             <a:r>
-              <a:rPr sz="1275" b="0">
+              <a:rPr sz="1275" b="0" dirty="0">
                 <a:solidFill>
                   <a:srgbClr val="EEEEEE"/>
                 </a:solidFill>
@@ -30820,80 +33666,20 @@
                 <a:ea typeface="Consolas"/>
                 <a:cs typeface="Consolas"/>
               </a:rPr>
-              <a:t>    FROM kafka_events</a:t>
-            </a:r>
-          </a:p>
-          <a:p>
-            <a:pPr>
-              <a:defRPr sz="1275" b="0">
+              <a:t>    FROM </a:t>
+            </a:r>
+            <a:r>
+              <a:rPr sz="1275" b="0" dirty="0" err="1">
                 <a:solidFill>
                   <a:srgbClr val="EEEEEE"/>
                 </a:solidFill>
                 <a:latin typeface="Consolas"/>
                 <a:ea typeface="Consolas"/>
                 <a:cs typeface="Consolas"/>
-              </a:defRPr>
-            </a:pPr>
-            <a:r>
-              <a:rPr sz="1275" b="0">
-                <a:solidFill>
-                  <a:srgbClr val="EEEEEE"/>
-                </a:solidFill>
-                <a:latin typeface="Consolas"/>
-                <a:ea typeface="Consolas"/>
-                <a:cs typeface="Consolas"/>
-              </a:rPr>
-              <a:t>    ORDER BY partition, offset</a:t>
-            </a:r>
-          </a:p>
-          <a:p>
-            <a:pPr>
-              <a:defRPr sz="1275" b="0">
-                <a:solidFill>
-                  <a:srgbClr val="EEEEEE"/>
-                </a:solidFill>
-                <a:latin typeface="Consolas"/>
-                <a:ea typeface="Consolas"/>
-                <a:cs typeface="Consolas"/>
-              </a:defRPr>
-            </a:pPr>
-            <a:r>
-              <a:rPr sz="1275" b="0">
-                <a:solidFill>
-                  <a:srgbClr val="EEEEEE"/>
-                </a:solidFill>
-                <a:latin typeface="Consolas"/>
-                <a:ea typeface="Consolas"/>
-                <a:cs typeface="Consolas"/>
-              </a:rPr>
-              <a:t>    LIMIT 20</a:t>
-            </a:r>
-          </a:p>
-          <a:p>
-            <a:pPr>
-              <a:defRPr sz="1275" b="0">
-                <a:solidFill>
-                  <a:srgbClr val="EEEEEE"/>
-                </a:solidFill>
-                <a:latin typeface="Consolas"/>
-                <a:ea typeface="Consolas"/>
-                <a:cs typeface="Consolas"/>
-              </a:defRPr>
-            </a:pPr>
-            <a:r>
-              <a:rPr sz="1275" b="0">
-                <a:solidFill>
-                  <a:srgbClr val="EEEEEE"/>
-                </a:solidFill>
-                <a:latin typeface="Consolas"/>
-                <a:ea typeface="Consolas"/>
-                <a:cs typeface="Consolas"/>
-              </a:rPr>
-              <a:t>""").show(truncate=False)</a:t>
-            </a:r>
-          </a:p>
-          <a:p>
-            <a:endParaRPr sz="1275" b="0">
+              </a:rPr>
+              <a:t>kafka_events</a:t>
+            </a:r>
+            <a:endParaRPr sz="1275" b="0" dirty="0">
               <a:solidFill>
                 <a:srgbClr val="EEEEEE"/>
               </a:solidFill>
@@ -30914,7 +33700,7 @@
               </a:defRPr>
             </a:pPr>
             <a:r>
-              <a:rPr sz="1275" b="0">
+              <a:rPr sz="1275" b="0" dirty="0">
                 <a:solidFill>
                   <a:srgbClr val="EEEEEE"/>
                 </a:solidFill>
@@ -30922,7 +33708,7 @@
                 <a:ea typeface="Consolas"/>
                 <a:cs typeface="Consolas"/>
               </a:rPr>
-              <a:t>spark.sql("""</a:t>
+              <a:t>    ORDER BY partition, offset</a:t>
             </a:r>
           </a:p>
           <a:p>
@@ -30937,7 +33723,7 @@
               </a:defRPr>
             </a:pPr>
             <a:r>
-              <a:rPr sz="1275" b="0">
+              <a:rPr sz="1275" b="0" dirty="0">
                 <a:solidFill>
                   <a:srgbClr val="EEEEEE"/>
                 </a:solidFill>
@@ -30945,7 +33731,7 @@
                 <a:ea typeface="Consolas"/>
                 <a:cs typeface="Consolas"/>
               </a:rPr>
-              <a:t>    SELECT label, COUNT(*) AS nb, AVG(x1) AS moyenne_x1</a:t>
+              <a:t>    LIMIT 20</a:t>
             </a:r>
           </a:p>
           <a:p>
@@ -30960,7 +33746,7 @@
               </a:defRPr>
             </a:pPr>
             <a:r>
-              <a:rPr sz="1275" b="0">
+              <a:rPr sz="1275" b="0" dirty="0">
                 <a:solidFill>
                   <a:srgbClr val="EEEEEE"/>
                 </a:solidFill>
@@ -30968,8 +33754,18 @@
                 <a:ea typeface="Consolas"/>
                 <a:cs typeface="Consolas"/>
               </a:rPr>
-              <a:t>    FROM kafka_events GROUP BY label ORDER BY label</a:t>
-            </a:r>
+              <a:t>""").show(truncate=False)</a:t>
+            </a:r>
+          </a:p>
+          <a:p>
+            <a:endParaRPr sz="1275" b="0" dirty="0">
+              <a:solidFill>
+                <a:srgbClr val="EEEEEE"/>
+              </a:solidFill>
+              <a:latin typeface="Consolas"/>
+              <a:ea typeface="Consolas"/>
+              <a:cs typeface="Consolas"/>
+            </a:endParaRPr>
           </a:p>
           <a:p>
             <a:pPr>
@@ -30983,7 +33779,131 @@
               </a:defRPr>
             </a:pPr>
             <a:r>
-              <a:rPr sz="1275" b="0">
+              <a:rPr sz="1275" b="0" dirty="0" err="1">
+                <a:solidFill>
+                  <a:srgbClr val="EEEEEE"/>
+                </a:solidFill>
+                <a:latin typeface="Consolas"/>
+                <a:ea typeface="Consolas"/>
+                <a:cs typeface="Consolas"/>
+              </a:rPr>
+              <a:t>spark.sql</a:t>
+            </a:r>
+            <a:r>
+              <a:rPr sz="1275" b="0" dirty="0">
+                <a:solidFill>
+                  <a:srgbClr val="EEEEEE"/>
+                </a:solidFill>
+                <a:latin typeface="Consolas"/>
+                <a:ea typeface="Consolas"/>
+                <a:cs typeface="Consolas"/>
+              </a:rPr>
+              <a:t>("""</a:t>
+            </a:r>
+          </a:p>
+          <a:p>
+            <a:pPr>
+              <a:defRPr sz="1275" b="0">
+                <a:solidFill>
+                  <a:srgbClr val="EEEEEE"/>
+                </a:solidFill>
+                <a:latin typeface="Consolas"/>
+                <a:ea typeface="Consolas"/>
+                <a:cs typeface="Consolas"/>
+              </a:defRPr>
+            </a:pPr>
+            <a:r>
+              <a:rPr sz="1275" b="0" dirty="0">
+                <a:solidFill>
+                  <a:srgbClr val="EEEEEE"/>
+                </a:solidFill>
+                <a:latin typeface="Consolas"/>
+                <a:ea typeface="Consolas"/>
+                <a:cs typeface="Consolas"/>
+              </a:rPr>
+              <a:t>    SELECT label, COUNT(*) AS </a:t>
+            </a:r>
+            <a:r>
+              <a:rPr sz="1275" b="0" dirty="0" err="1">
+                <a:solidFill>
+                  <a:srgbClr val="EEEEEE"/>
+                </a:solidFill>
+                <a:latin typeface="Consolas"/>
+                <a:ea typeface="Consolas"/>
+                <a:cs typeface="Consolas"/>
+              </a:rPr>
+              <a:t>nb</a:t>
+            </a:r>
+            <a:r>
+              <a:rPr sz="1275" b="0" dirty="0">
+                <a:solidFill>
+                  <a:srgbClr val="EEEEEE"/>
+                </a:solidFill>
+                <a:latin typeface="Consolas"/>
+                <a:ea typeface="Consolas"/>
+                <a:cs typeface="Consolas"/>
+              </a:rPr>
+              <a:t>, AVG(x1) AS moyenne_x1</a:t>
+            </a:r>
+          </a:p>
+          <a:p>
+            <a:pPr>
+              <a:defRPr sz="1275" b="0">
+                <a:solidFill>
+                  <a:srgbClr val="EEEEEE"/>
+                </a:solidFill>
+                <a:latin typeface="Consolas"/>
+                <a:ea typeface="Consolas"/>
+                <a:cs typeface="Consolas"/>
+              </a:defRPr>
+            </a:pPr>
+            <a:r>
+              <a:rPr sz="1275" b="0" dirty="0">
+                <a:solidFill>
+                  <a:srgbClr val="EEEEEE"/>
+                </a:solidFill>
+                <a:latin typeface="Consolas"/>
+                <a:ea typeface="Consolas"/>
+                <a:cs typeface="Consolas"/>
+              </a:rPr>
+              <a:t>    FROM </a:t>
+            </a:r>
+            <a:r>
+              <a:rPr sz="1275" b="0" dirty="0" err="1">
+                <a:solidFill>
+                  <a:srgbClr val="EEEEEE"/>
+                </a:solidFill>
+                <a:latin typeface="Consolas"/>
+                <a:ea typeface="Consolas"/>
+                <a:cs typeface="Consolas"/>
+              </a:rPr>
+              <a:t>kafka_events</a:t>
+            </a:r>
+            <a:r>
+              <a:rPr sz="1275" b="0" dirty="0">
+                <a:solidFill>
+                  <a:srgbClr val="EEEEEE"/>
+                </a:solidFill>
+                <a:latin typeface="Consolas"/>
+                <a:ea typeface="Consolas"/>
+                <a:cs typeface="Consolas"/>
+              </a:rPr>
+              <a:t> GROUP BY label ORDER BY label</a:t>
+            </a:r>
+          </a:p>
+          <a:p>
+            <a:pPr>
+              <a:defRPr sz="1275" b="0">
+                <a:solidFill>
+                  <a:srgbClr val="EEEEEE"/>
+                </a:solidFill>
+                <a:latin typeface="Consolas"/>
+                <a:ea typeface="Consolas"/>
+                <a:cs typeface="Consolas"/>
+              </a:defRPr>
+            </a:pPr>
+            <a:r>
+              <a:rPr sz="1275" b="0" dirty="0">
                 <a:solidFill>
                   <a:srgbClr val="EEEEEE"/>
                 </a:solidFill>
@@ -31503,7 +34423,7 @@
               </a:defRPr>
             </a:pPr>
             <a:r>
-              <a:rPr sz="1275" b="0">
+              <a:rPr sz="1275" b="0" dirty="0">
                 <a:solidFill>
                   <a:srgbClr val="EEEEEE"/>
                 </a:solidFill>
@@ -31511,7 +34431,29 @@
                 <a:ea typeface="Consolas"/>
                 <a:cs typeface="Consolas"/>
               </a:rPr>
-              <a:t>print("Active :", q_mem.isActive)</a:t>
+              <a:t>print("Active :", </a:t>
+            </a:r>
+            <a:r>
+              <a:rPr sz="1275" b="0" dirty="0" err="1">
+                <a:solidFill>
+                  <a:srgbClr val="EEEEEE"/>
+                </a:solidFill>
+                <a:latin typeface="Consolas"/>
+                <a:ea typeface="Consolas"/>
+                <a:cs typeface="Consolas"/>
+              </a:rPr>
+              <a:t>q_mem.isActive</a:t>
+            </a:r>
+            <a:r>
+              <a:rPr sz="1275" b="0" dirty="0">
+                <a:solidFill>
+                  <a:srgbClr val="EEEEEE"/>
+                </a:solidFill>
+                <a:latin typeface="Consolas"/>
+                <a:ea typeface="Consolas"/>
+                <a:cs typeface="Consolas"/>
+              </a:rPr>
+              <a:t>)</a:t>
             </a:r>
           </a:p>
           <a:p>
@@ -31526,7 +34468,7 @@
               </a:defRPr>
             </a:pPr>
             <a:r>
-              <a:rPr sz="1275" b="0">
+              <a:rPr sz="1275" b="0" dirty="0">
                 <a:solidFill>
                   <a:srgbClr val="EEEEEE"/>
                 </a:solidFill>
@@ -31534,7 +34476,29 @@
                 <a:ea typeface="Consolas"/>
                 <a:cs typeface="Consolas"/>
               </a:rPr>
-              <a:t>print(q_mem.status)</a:t>
+              <a:t>print(</a:t>
+            </a:r>
+            <a:r>
+              <a:rPr sz="1275" b="0" dirty="0" err="1">
+                <a:solidFill>
+                  <a:srgbClr val="EEEEEE"/>
+                </a:solidFill>
+                <a:latin typeface="Consolas"/>
+                <a:ea typeface="Consolas"/>
+                <a:cs typeface="Consolas"/>
+              </a:rPr>
+              <a:t>q_mem.status</a:t>
+            </a:r>
+            <a:r>
+              <a:rPr sz="1275" b="0" dirty="0">
+                <a:solidFill>
+                  <a:srgbClr val="EEEEEE"/>
+                </a:solidFill>
+                <a:latin typeface="Consolas"/>
+                <a:ea typeface="Consolas"/>
+                <a:cs typeface="Consolas"/>
+              </a:rPr>
+              <a:t>)</a:t>
             </a:r>
           </a:p>
           <a:p>
@@ -31549,7 +34513,7 @@
               </a:defRPr>
             </a:pPr>
             <a:r>
-              <a:rPr sz="1275" b="0">
+              <a:rPr sz="1275" b="0" dirty="0">
                 <a:solidFill>
                   <a:srgbClr val="EEEEEE"/>
                 </a:solidFill>
@@ -31557,22 +34521,21 @@
                 <a:ea typeface="Consolas"/>
                 <a:cs typeface="Consolas"/>
               </a:rPr>
-              <a:t>print(q_mem.lastProgress)  # None avant le premier progrès</a:t>
-            </a:r>
-          </a:p>
-          <a:p>
-            <a:pPr>
-              <a:defRPr sz="1275" b="0">
+              <a:t>print(</a:t>
+            </a:r>
+            <a:r>
+              <a:rPr sz="1275" b="0" dirty="0" err="1">
                 <a:solidFill>
                   <a:srgbClr val="EEEEEE"/>
                 </a:solidFill>
                 <a:latin typeface="Consolas"/>
                 <a:ea typeface="Consolas"/>
                 <a:cs typeface="Consolas"/>
-              </a:defRPr>
-            </a:pPr>
-            <a:r>
-              <a:rPr sz="1275" b="0">
+              </a:rPr>
+              <a:t>q_mem.lastProgress</a:t>
+            </a:r>
+            <a:r>
+              <a:rPr sz="1275" b="0" dirty="0">
                 <a:solidFill>
                   <a:srgbClr val="EEEEEE"/>
                 </a:solidFill>
@@ -31580,11 +34543,20 @@
                 <a:ea typeface="Consolas"/>
                 <a:cs typeface="Consolas"/>
               </a:rPr>
-              <a:t>print(q_mem.exception())</a:t>
-            </a:r>
-          </a:p>
-          <a:p>
-            <a:endParaRPr sz="1275" b="0">
+              <a:t>)  # None avant le premier </a:t>
+            </a:r>
+            <a:r>
+              <a:rPr sz="1275" b="0" dirty="0" err="1">
+                <a:solidFill>
+                  <a:srgbClr val="EEEEEE"/>
+                </a:solidFill>
+                <a:latin typeface="Consolas"/>
+                <a:ea typeface="Consolas"/>
+                <a:cs typeface="Consolas"/>
+              </a:rPr>
+              <a:t>progrès</a:t>
+            </a:r>
+            <a:endParaRPr sz="1275" b="0" dirty="0">
               <a:solidFill>
                 <a:srgbClr val="EEEEEE"/>
               </a:solidFill>
@@ -31605,7 +34577,7 @@
               </a:defRPr>
             </a:pPr>
             <a:r>
-              <a:rPr sz="1275" b="0">
+              <a:rPr sz="1275" b="0" dirty="0">
                 <a:solidFill>
                   <a:srgbClr val="EEEEEE"/>
                 </a:solidFill>
@@ -31613,8 +34585,40 @@
                 <a:ea typeface="Consolas"/>
                 <a:cs typeface="Consolas"/>
               </a:rPr>
-              <a:t># Une fois le test terminé :</a:t>
-            </a:r>
+              <a:t>print(</a:t>
+            </a:r>
+            <a:r>
+              <a:rPr sz="1275" b="0" dirty="0" err="1">
+                <a:solidFill>
+                  <a:srgbClr val="EEEEEE"/>
+                </a:solidFill>
+                <a:latin typeface="Consolas"/>
+                <a:ea typeface="Consolas"/>
+                <a:cs typeface="Consolas"/>
+              </a:rPr>
+              <a:t>q_mem.exception</a:t>
+            </a:r>
+            <a:r>
+              <a:rPr sz="1275" b="0" dirty="0">
+                <a:solidFill>
+                  <a:srgbClr val="EEEEEE"/>
+                </a:solidFill>
+                <a:latin typeface="Consolas"/>
+                <a:ea typeface="Consolas"/>
+                <a:cs typeface="Consolas"/>
+              </a:rPr>
+              <a:t>())</a:t>
+            </a:r>
+          </a:p>
+          <a:p>
+            <a:endParaRPr sz="1275" b="0" dirty="0">
+              <a:solidFill>
+                <a:srgbClr val="EEEEEE"/>
+              </a:solidFill>
+              <a:latin typeface="Consolas"/>
+              <a:ea typeface="Consolas"/>
+              <a:cs typeface="Consolas"/>
+            </a:endParaRPr>
           </a:p>
           <a:p>
             <a:pPr>
@@ -31628,7 +34632,7 @@
               </a:defRPr>
             </a:pPr>
             <a:r>
-              <a:rPr sz="1275" b="0">
+              <a:rPr sz="1275" b="0" dirty="0">
                 <a:solidFill>
                   <a:srgbClr val="EEEEEE"/>
                 </a:solidFill>
@@ -31636,7 +34640,85 @@
                 <a:ea typeface="Consolas"/>
                 <a:cs typeface="Consolas"/>
               </a:rPr>
-              <a:t>q_mem.stop()</a:t>
+              <a:t># Une </a:t>
+            </a:r>
+            <a:r>
+              <a:rPr sz="1275" b="0" dirty="0" err="1">
+                <a:solidFill>
+                  <a:srgbClr val="EEEEEE"/>
+                </a:solidFill>
+                <a:latin typeface="Consolas"/>
+                <a:ea typeface="Consolas"/>
+                <a:cs typeface="Consolas"/>
+              </a:rPr>
+              <a:t>fois</a:t>
+            </a:r>
+            <a:r>
+              <a:rPr sz="1275" b="0" dirty="0">
+                <a:solidFill>
+                  <a:srgbClr val="EEEEEE"/>
+                </a:solidFill>
+                <a:latin typeface="Consolas"/>
+                <a:ea typeface="Consolas"/>
+                <a:cs typeface="Consolas"/>
+              </a:rPr>
+              <a:t> le test </a:t>
+            </a:r>
+            <a:r>
+              <a:rPr sz="1275" b="0" dirty="0" err="1">
+                <a:solidFill>
+                  <a:srgbClr val="EEEEEE"/>
+                </a:solidFill>
+                <a:latin typeface="Consolas"/>
+                <a:ea typeface="Consolas"/>
+                <a:cs typeface="Consolas"/>
+              </a:rPr>
+              <a:t>terminé</a:t>
+            </a:r>
+            <a:r>
+              <a:rPr sz="1275" b="0" dirty="0">
+                <a:solidFill>
+                  <a:srgbClr val="EEEEEE"/>
+                </a:solidFill>
+                <a:latin typeface="Consolas"/>
+                <a:ea typeface="Consolas"/>
+                <a:cs typeface="Consolas"/>
+              </a:rPr>
+              <a:t> :</a:t>
+            </a:r>
+          </a:p>
+          <a:p>
+            <a:pPr>
+              <a:defRPr sz="1275" b="0">
+                <a:solidFill>
+                  <a:srgbClr val="EEEEEE"/>
+                </a:solidFill>
+                <a:latin typeface="Consolas"/>
+                <a:ea typeface="Consolas"/>
+                <a:cs typeface="Consolas"/>
+              </a:defRPr>
+            </a:pPr>
+            <a:r>
+              <a:rPr sz="1275" b="0" dirty="0" err="1">
+                <a:solidFill>
+                  <a:srgbClr val="EEEEEE"/>
+                </a:solidFill>
+                <a:latin typeface="Consolas"/>
+                <a:ea typeface="Consolas"/>
+                <a:cs typeface="Consolas"/>
+              </a:rPr>
+              <a:t>q_mem.stop</a:t>
+            </a:r>
+            <a:r>
+              <a:rPr sz="1275" b="0" dirty="0">
+                <a:solidFill>
+                  <a:srgbClr val="EEEEEE"/>
+                </a:solidFill>
+                <a:latin typeface="Consolas"/>
+                <a:ea typeface="Consolas"/>
+                <a:cs typeface="Consolas"/>
+              </a:rPr>
+              <a:t>()</a:t>
             </a:r>
           </a:p>
         </p:txBody>
@@ -32148,7 +35230,7 @@
               </a:defRPr>
             </a:pPr>
             <a:r>
-              <a:rPr sz="1275" b="0">
+              <a:rPr sz="1275" b="0" dirty="0">
                 <a:solidFill>
                   <a:srgbClr val="EEEEEE"/>
                 </a:solidFill>
@@ -32156,7 +35238,51 @@
                 <a:ea typeface="Consolas"/>
                 <a:cs typeface="Consolas"/>
               </a:rPr>
-              <a:t>BASE = "/home/jovyan/work/spark_stream"</a:t>
+              <a:t>BASE = "/home/</a:t>
+            </a:r>
+            <a:r>
+              <a:rPr sz="1275" b="0" dirty="0" err="1">
+                <a:solidFill>
+                  <a:srgbClr val="EEEEEE"/>
+                </a:solidFill>
+                <a:latin typeface="Consolas"/>
+                <a:ea typeface="Consolas"/>
+                <a:cs typeface="Consolas"/>
+              </a:rPr>
+              <a:t>jovyan</a:t>
+            </a:r>
+            <a:r>
+              <a:rPr sz="1275" b="0" dirty="0">
+                <a:solidFill>
+                  <a:srgbClr val="EEEEEE"/>
+                </a:solidFill>
+                <a:latin typeface="Consolas"/>
+                <a:ea typeface="Consolas"/>
+                <a:cs typeface="Consolas"/>
+              </a:rPr>
+              <a:t>/work/</a:t>
+            </a:r>
+            <a:r>
+              <a:rPr sz="1275" b="0" dirty="0" err="1">
+                <a:solidFill>
+                  <a:srgbClr val="EEEEEE"/>
+                </a:solidFill>
+                <a:latin typeface="Consolas"/>
+                <a:ea typeface="Consolas"/>
+                <a:cs typeface="Consolas"/>
+              </a:rPr>
+              <a:t>spark_stream</a:t>
+            </a:r>
+            <a:r>
+              <a:rPr sz="1275" b="0" dirty="0">
+                <a:solidFill>
+                  <a:srgbClr val="EEEEEE"/>
+                </a:solidFill>
+                <a:latin typeface="Consolas"/>
+                <a:ea typeface="Consolas"/>
+                <a:cs typeface="Consolas"/>
+              </a:rPr>
+              <a:t>"</a:t>
             </a:r>
           </a:p>
           <a:p>
@@ -32171,7 +35297,7 @@
               </a:defRPr>
             </a:pPr>
             <a:r>
-              <a:rPr sz="1275" b="0">
+              <a:rPr sz="1275" b="0" dirty="0">
                 <a:solidFill>
                   <a:srgbClr val="EEEEEE"/>
                 </a:solidFill>
@@ -32194,7 +35320,7 @@
               </a:defRPr>
             </a:pPr>
             <a:r>
-              <a:rPr sz="1275" b="0">
+              <a:rPr sz="1275" b="0" dirty="0">
                 <a:solidFill>
                   <a:srgbClr val="EEEEEE"/>
                 </a:solidFill>
@@ -32206,7 +35332,7 @@
             </a:r>
           </a:p>
           <a:p>
-            <a:endParaRPr sz="1275" b="0">
+            <a:endParaRPr sz="1275" b="0" dirty="0">
               <a:solidFill>
                 <a:srgbClr val="EEEEEE"/>
               </a:solidFill>
@@ -32227,7 +35353,7 @@
               </a:defRPr>
             </a:pPr>
             <a:r>
-              <a:rPr sz="1275" b="0">
+              <a:rPr sz="1275" b="0" dirty="0" err="1">
                 <a:solidFill>
                   <a:srgbClr val="EEEEEE"/>
                 </a:solidFill>
@@ -32235,8 +35361,38 @@
                 <a:ea typeface="Consolas"/>
                 <a:cs typeface="Consolas"/>
               </a:rPr>
-              <a:t>q_file = (events.writeStream</a:t>
-            </a:r>
+              <a:t>q_file</a:t>
+            </a:r>
+            <a:r>
+              <a:rPr sz="1275" b="0" dirty="0">
+                <a:solidFill>
+                  <a:srgbClr val="EEEEEE"/>
+                </a:solidFill>
+                <a:latin typeface="Consolas"/>
+                <a:ea typeface="Consolas"/>
+                <a:cs typeface="Consolas"/>
+              </a:rPr>
+              <a:t> = (</a:t>
+            </a:r>
+            <a:r>
+              <a:rPr sz="1275" b="0" dirty="0" err="1">
+                <a:solidFill>
+                  <a:srgbClr val="EEEEEE"/>
+                </a:solidFill>
+                <a:latin typeface="Consolas"/>
+                <a:ea typeface="Consolas"/>
+                <a:cs typeface="Consolas"/>
+              </a:rPr>
+              <a:t>events.writeStream</a:t>
+            </a:r>
+            <a:endParaRPr sz="1275" b="0" dirty="0">
+              <a:solidFill>
+                <a:srgbClr val="EEEEEE"/>
+              </a:solidFill>
+              <a:latin typeface="Consolas"/>
+              <a:ea typeface="Consolas"/>
+              <a:cs typeface="Consolas"/>
+            </a:endParaRPr>
           </a:p>
           <a:p>
             <a:pPr>
@@ -32250,7 +35406,7 @@
               </a:defRPr>
             </a:pPr>
             <a:r>
-              <a:rPr sz="1275" b="0">
+              <a:rPr sz="1275" b="0" dirty="0">
                 <a:solidFill>
                   <a:srgbClr val="EEEEEE"/>
                 </a:solidFill>
@@ -32273,7 +35429,7 @@
               </a:defRPr>
             </a:pPr>
             <a:r>
-              <a:rPr sz="1275" b="0">
+              <a:rPr sz="1275" b="0" dirty="0">
                 <a:solidFill>
                   <a:srgbClr val="EEEEEE"/>
                 </a:solidFill>
@@ -32281,7 +35437,29 @@
                 <a:ea typeface="Consolas"/>
                 <a:cs typeface="Consolas"/>
               </a:rPr>
-              <a:t>    .outputMode("append")</a:t>
+              <a:t>    .</a:t>
+            </a:r>
+            <a:r>
+              <a:rPr sz="1275" b="0" dirty="0" err="1">
+                <a:solidFill>
+                  <a:srgbClr val="EEEEEE"/>
+                </a:solidFill>
+                <a:latin typeface="Consolas"/>
+                <a:ea typeface="Consolas"/>
+                <a:cs typeface="Consolas"/>
+              </a:rPr>
+              <a:t>outputMode</a:t>
+            </a:r>
+            <a:r>
+              <a:rPr sz="1275" b="0" dirty="0">
+                <a:solidFill>
+                  <a:srgbClr val="EEEEEE"/>
+                </a:solidFill>
+                <a:latin typeface="Consolas"/>
+                <a:ea typeface="Consolas"/>
+                <a:cs typeface="Consolas"/>
+              </a:rPr>
+              <a:t>("append")</a:t>
             </a:r>
           </a:p>
           <a:p>
@@ -32296,7 +35474,7 @@
               </a:defRPr>
             </a:pPr>
             <a:r>
-              <a:rPr sz="1275" b="0">
+              <a:rPr sz="1275" b="0" dirty="0">
                 <a:solidFill>
                   <a:srgbClr val="EEEEEE"/>
                 </a:solidFill>
@@ -32319,7 +35497,7 @@
               </a:defRPr>
             </a:pPr>
             <a:r>
-              <a:rPr sz="1275" b="0">
+              <a:rPr sz="1275" b="0" dirty="0">
                 <a:solidFill>
                   <a:srgbClr val="EEEEEE"/>
                 </a:solidFill>
@@ -32327,7 +35505,29 @@
                 <a:ea typeface="Consolas"/>
                 <a:cs typeface="Consolas"/>
               </a:rPr>
-              <a:t>    .option("checkpointLocation", CHECKPOINT)</a:t>
+              <a:t>    .option("</a:t>
+            </a:r>
+            <a:r>
+              <a:rPr sz="1275" b="0" dirty="0" err="1">
+                <a:solidFill>
+                  <a:srgbClr val="EEEEEE"/>
+                </a:solidFill>
+                <a:latin typeface="Consolas"/>
+                <a:ea typeface="Consolas"/>
+                <a:cs typeface="Consolas"/>
+              </a:rPr>
+              <a:t>checkpointLocation</a:t>
+            </a:r>
+            <a:r>
+              <a:rPr sz="1275" b="0" dirty="0">
+                <a:solidFill>
+                  <a:srgbClr val="EEEEEE"/>
+                </a:solidFill>
+                <a:latin typeface="Consolas"/>
+                <a:ea typeface="Consolas"/>
+                <a:cs typeface="Consolas"/>
+              </a:rPr>
+              <a:t>", CHECKPOINT)</a:t>
             </a:r>
           </a:p>
           <a:p>
@@ -32342,7 +35542,7 @@
               </a:defRPr>
             </a:pPr>
             <a:r>
-              <a:rPr sz="1275" b="0">
+              <a:rPr sz="1275" b="0" dirty="0">
                 <a:solidFill>
                   <a:srgbClr val="EEEEEE"/>
                 </a:solidFill>
@@ -32350,7 +35550,29 @@
                 <a:ea typeface="Consolas"/>
                 <a:cs typeface="Consolas"/>
               </a:rPr>
-              <a:t>    .trigger(processingTime="5 seconds")</a:t>
+              <a:t>    .trigger(</a:t>
+            </a:r>
+            <a:r>
+              <a:rPr sz="1275" b="0" dirty="0" err="1">
+                <a:solidFill>
+                  <a:srgbClr val="EEEEEE"/>
+                </a:solidFill>
+                <a:latin typeface="Consolas"/>
+                <a:ea typeface="Consolas"/>
+                <a:cs typeface="Consolas"/>
+              </a:rPr>
+              <a:t>processingTime</a:t>
+            </a:r>
+            <a:r>
+              <a:rPr sz="1275" b="0" dirty="0">
+                <a:solidFill>
+                  <a:srgbClr val="EEEEEE"/>
+                </a:solidFill>
+                <a:latin typeface="Consolas"/>
+                <a:ea typeface="Consolas"/>
+                <a:cs typeface="Consolas"/>
+              </a:rPr>
+              <a:t>="5 seconds")</a:t>
             </a:r>
           </a:p>
           <a:p>
@@ -32365,7 +35587,7 @@
               </a:defRPr>
             </a:pPr>
             <a:r>
-              <a:rPr sz="1275" b="0">
+              <a:rPr sz="1275" b="0" dirty="0">
                 <a:solidFill>
                   <a:srgbClr val="EEEEEE"/>
                 </a:solidFill>
@@ -33169,7 +36391,7 @@
               </a:defRPr>
             </a:pPr>
             <a:r>
-              <a:rPr sz="1275" b="0">
+              <a:rPr sz="1275" b="0" dirty="0">
                 <a:solidFill>
                   <a:srgbClr val="EEEEEE"/>
                 </a:solidFill>
@@ -33177,7 +36399,29 @@
                 <a:ea typeface="Consolas"/>
                 <a:cs typeface="Consolas"/>
               </a:rPr>
-              <a:t>print(q_file.lastProgress)</a:t>
+              <a:t>print(</a:t>
+            </a:r>
+            <a:r>
+              <a:rPr sz="1275" b="0" dirty="0" err="1">
+                <a:solidFill>
+                  <a:srgbClr val="EEEEEE"/>
+                </a:solidFill>
+                <a:latin typeface="Consolas"/>
+                <a:ea typeface="Consolas"/>
+                <a:cs typeface="Consolas"/>
+              </a:rPr>
+              <a:t>q_file.lastProgress</a:t>
+            </a:r>
+            <a:r>
+              <a:rPr sz="1275" b="0" dirty="0">
+                <a:solidFill>
+                  <a:srgbClr val="EEEEEE"/>
+                </a:solidFill>
+                <a:latin typeface="Consolas"/>
+                <a:ea typeface="Consolas"/>
+                <a:cs typeface="Consolas"/>
+              </a:rPr>
+              <a:t>)</a:t>
             </a:r>
           </a:p>
           <a:p>
@@ -33192,7 +36436,7 @@
               </a:defRPr>
             </a:pPr>
             <a:r>
-              <a:rPr sz="1275" b="0">
+              <a:rPr sz="1275" b="0" dirty="0" err="1">
                 <a:solidFill>
                   <a:srgbClr val="EEEEEE"/>
                 </a:solidFill>
@@ -33200,7 +36444,18 @@
                 <a:ea typeface="Consolas"/>
                 <a:cs typeface="Consolas"/>
               </a:rPr>
-              <a:t>q_file.stop()</a:t>
+              <a:t>q_file.stop</a:t>
+            </a:r>
+            <a:r>
+              <a:rPr sz="1275" b="0" dirty="0">
+                <a:solidFill>
+                  <a:srgbClr val="EEEEEE"/>
+                </a:solidFill>
+                <a:latin typeface="Consolas"/>
+                <a:ea typeface="Consolas"/>
+                <a:cs typeface="Consolas"/>
+              </a:rPr>
+              <a:t>()</a:t>
             </a:r>
           </a:p>
           <a:p>
@@ -33215,7 +36470,7 @@
               </a:defRPr>
             </a:pPr>
             <a:r>
-              <a:rPr sz="1275" b="0">
+              <a:rPr sz="1275" b="0" dirty="0" err="1">
                 <a:solidFill>
                   <a:srgbClr val="EEEEEE"/>
                 </a:solidFill>
@@ -33223,11 +36478,22 @@
                 <a:ea typeface="Consolas"/>
                 <a:cs typeface="Consolas"/>
               </a:rPr>
-              <a:t>spark.read.parquet(DATA).show(20, truncate=False)</a:t>
-            </a:r>
-          </a:p>
-          <a:p>
-            <a:endParaRPr sz="1275" b="0">
+              <a:t>spark.read.parquet</a:t>
+            </a:r>
+            <a:r>
+              <a:rPr sz="1275" b="0" dirty="0">
+                <a:solidFill>
+                  <a:srgbClr val="EEEEEE"/>
+                </a:solidFill>
+                <a:latin typeface="Consolas"/>
+                <a:ea typeface="Consolas"/>
+                <a:cs typeface="Consolas"/>
+              </a:rPr>
+              <a:t>(DATA).show(20, truncate=False)</a:t>
+            </a:r>
+          </a:p>
+          <a:p>
+            <a:endParaRPr sz="1275" b="0" dirty="0">
               <a:solidFill>
                 <a:srgbClr val="EEEEEE"/>
               </a:solidFill>
@@ -33248,7 +36514,7 @@
               </a:defRPr>
             </a:pPr>
             <a:r>
-              <a:rPr sz="1275" b="0">
+              <a:rPr sz="1275" b="0" dirty="0">
                 <a:solidFill>
                   <a:srgbClr val="EEEEEE"/>
                 </a:solidFill>
@@ -33256,7 +36522,29 @@
                 <a:ea typeface="Consolas"/>
                 <a:cs typeface="Consolas"/>
               </a:rPr>
-              <a:t># À la fin de la séance seulement :</a:t>
+              <a:t># À la fin de la séance </a:t>
+            </a:r>
+            <a:r>
+              <a:rPr sz="1275" b="0" dirty="0" err="1">
+                <a:solidFill>
+                  <a:srgbClr val="EEEEEE"/>
+                </a:solidFill>
+                <a:latin typeface="Consolas"/>
+                <a:ea typeface="Consolas"/>
+                <a:cs typeface="Consolas"/>
+              </a:rPr>
+              <a:t>seulement</a:t>
+            </a:r>
+            <a:r>
+              <a:rPr sz="1275" b="0" dirty="0">
+                <a:solidFill>
+                  <a:srgbClr val="EEEEEE"/>
+                </a:solidFill>
+                <a:latin typeface="Consolas"/>
+                <a:ea typeface="Consolas"/>
+                <a:cs typeface="Consolas"/>
+              </a:rPr>
+              <a:t> :</a:t>
             </a:r>
           </a:p>
           <a:p>
@@ -33271,7 +36559,7 @@
               </a:defRPr>
             </a:pPr>
             <a:r>
-              <a:rPr sz="1275" b="0">
+              <a:rPr sz="1275" b="0" dirty="0" err="1">
                 <a:solidFill>
                   <a:srgbClr val="EEEEEE"/>
                 </a:solidFill>
@@ -33279,7 +36567,18 @@
                 <a:ea typeface="Consolas"/>
                 <a:cs typeface="Consolas"/>
               </a:rPr>
-              <a:t>spark.stop()</a:t>
+              <a:t>spark.stop</a:t>
+            </a:r>
+            <a:r>
+              <a:rPr sz="1275" b="0" dirty="0">
+                <a:solidFill>
+                  <a:srgbClr val="EEEEEE"/>
+                </a:solidFill>
+                <a:latin typeface="Consolas"/>
+                <a:ea typeface="Consolas"/>
+                <a:cs typeface="Consolas"/>
+              </a:rPr>
+              <a:t>()</a:t>
             </a:r>
           </a:p>
         </p:txBody>
@@ -43463,21 +46762,6 @@
 </file>
 
 <file path=customXml/item1.xml><?xml version="1.0" encoding="utf-8"?>
-<p:properties xmlns:p="http://schemas.microsoft.com/office/2006/metadata/properties" xmlns:xsi="http://www.w3.org/2001/XMLSchema-instance" xmlns:pc="http://schemas.microsoft.com/office/infopath/2007/PartnerControls">
-  <documentManagement>
-    <SharedWithUsers xmlns="73eca01c-4ea5-40c8-83fd-b296bd340025">
-      <UserInfo>
-        <DisplayName>Abir GUENICH - Ingénieure d’affaire</DisplayName>
-        <AccountId>246</AccountId>
-        <AccountType/>
-      </UserInfo>
-    </SharedWithUsers>
-    <_activity xmlns="6f1b3788-58c0-46a5-9604-64d97c7fc47c" xsi:nil="true"/>
-  </documentManagement>
-</p:properties>
-</file>
-
-<file path=customXml/item2.xml><?xml version="1.0" encoding="utf-8"?>
 <ct:contentTypeSchema xmlns:ct="http://schemas.microsoft.com/office/2006/metadata/contentType" xmlns:ma="http://schemas.microsoft.com/office/2006/metadata/properties/metaAttributes" ct:_="" ma:_="" ma:contentTypeName="Document" ma:contentTypeID="0x01010058419B1710D3DF4A9DAA9ADF73C802B5" ma:contentTypeVersion="14" ma:contentTypeDescription="Crée un document." ma:contentTypeScope="" ma:versionID="d45f398bd182fafaec1e6b20d8a38b6f">
   <xsd:schema xmlns:xsd="http://www.w3.org/2001/XMLSchema" xmlns:xs="http://www.w3.org/2001/XMLSchema" xmlns:p="http://schemas.microsoft.com/office/2006/metadata/properties" xmlns:ns3="6f1b3788-58c0-46a5-9604-64d97c7fc47c" xmlns:ns4="73eca01c-4ea5-40c8-83fd-b296bd340025" targetNamespace="http://schemas.microsoft.com/office/2006/metadata/properties" ma:root="true" ma:fieldsID="de746a5257d740f042749d495693305b" ns3:_="" ns4:_="">
     <xsd:import namespace="6f1b3788-58c0-46a5-9604-64d97c7fc47c"/>
@@ -43702,7 +46986,7 @@
 </ct:contentTypeSchema>
 </file>
 
-<file path=customXml/item3.xml><?xml version="1.0" encoding="utf-8"?>
+<file path=customXml/item2.xml><?xml version="1.0" encoding="utf-8"?>
 <?mso-contentType ?>
 <FormTemplates xmlns="http://schemas.microsoft.com/sharepoint/v3/contenttype/forms">
   <Display>DocumentLibraryForm</Display>
@@ -43711,24 +46995,22 @@
 </FormTemplates>
 </file>
 
-<file path=customXml/itemProps1.xml><?xml version="1.0" encoding="utf-8"?>
-<ds:datastoreItem xmlns:ds="http://schemas.openxmlformats.org/officeDocument/2006/customXml" ds:itemID="{40C00205-F11F-4D61-9572-D162BE7CE022}">
-  <ds:schemaRefs>
-    <ds:schemaRef ds:uri="http://schemas.microsoft.com/office/infopath/2007/PartnerControls"/>
-    <ds:schemaRef ds:uri="http://purl.org/dc/terms/"/>
-    <ds:schemaRef ds:uri="http://purl.org/dc/elements/1.1/"/>
-    <ds:schemaRef ds:uri="6f1b3788-58c0-46a5-9604-64d97c7fc47c"/>
-    <ds:schemaRef ds:uri="73eca01c-4ea5-40c8-83fd-b296bd340025"/>
-    <ds:schemaRef ds:uri="http://purl.org/dc/dcmitype/"/>
-    <ds:schemaRef ds:uri="http://schemas.openxmlformats.org/package/2006/metadata/core-properties"/>
-    <ds:schemaRef ds:uri="http://schemas.microsoft.com/office/2006/documentManagement/types"/>
-    <ds:schemaRef ds:uri="http://www.w3.org/XML/1998/namespace"/>
-    <ds:schemaRef ds:uri="http://schemas.microsoft.com/office/2006/metadata/properties"/>
-  </ds:schemaRefs>
-</ds:datastoreItem>
+<file path=customXml/item3.xml><?xml version="1.0" encoding="utf-8"?>
+<p:properties xmlns:p="http://schemas.microsoft.com/office/2006/metadata/properties" xmlns:xsi="http://www.w3.org/2001/XMLSchema-instance" xmlns:pc="http://schemas.microsoft.com/office/infopath/2007/PartnerControls">
+  <documentManagement>
+    <SharedWithUsers xmlns="73eca01c-4ea5-40c8-83fd-b296bd340025">
+      <UserInfo>
+        <DisplayName>Abir GUENICH - Ingénieure d’affaire</DisplayName>
+        <AccountId>246</AccountId>
+        <AccountType/>
+      </UserInfo>
+    </SharedWithUsers>
+    <_activity xmlns="6f1b3788-58c0-46a5-9604-64d97c7fc47c" xsi:nil="true"/>
+  </documentManagement>
+</p:properties>
 </file>
 
-<file path=customXml/itemProps2.xml><?xml version="1.0" encoding="utf-8"?>
+<file path=customXml/itemProps1.xml><?xml version="1.0" encoding="utf-8"?>
 <ds:datastoreItem xmlns:ds="http://schemas.openxmlformats.org/officeDocument/2006/customXml" ds:itemID="{13D40C7A-64C6-4B3B-A1B6-9CB64BC75662}">
   <ds:schemaRefs>
     <ds:schemaRef ds:uri="http://schemas.microsoft.com/office/2006/metadata/contentType"/>
@@ -43747,10 +47029,27 @@
 </ds:datastoreItem>
 </file>
 
-<file path=customXml/itemProps3.xml><?xml version="1.0" encoding="utf-8"?>
+<file path=customXml/itemProps2.xml><?xml version="1.0" encoding="utf-8"?>
 <ds:datastoreItem xmlns:ds="http://schemas.openxmlformats.org/officeDocument/2006/customXml" ds:itemID="{EBAA46D8-DF31-4768-AD82-8F485C82E644}">
   <ds:schemaRefs>
     <ds:schemaRef ds:uri="http://schemas.microsoft.com/sharepoint/v3/contenttype/forms"/>
   </ds:schemaRefs>
 </ds:datastoreItem>
+</file>
+
+<file path=customXml/itemProps3.xml><?xml version="1.0" encoding="utf-8"?>
+<ds:datastoreItem xmlns:ds="http://schemas.openxmlformats.org/officeDocument/2006/customXml" ds:itemID="{40C00205-F11F-4D61-9572-D162BE7CE022}">
+  <ds:schemaRefs>
+    <ds:schemaRef ds:uri="http://schemas.microsoft.com/office/infopath/2007/PartnerControls"/>
+    <ds:schemaRef ds:uri="http://purl.org/dc/terms/"/>
+    <ds:schemaRef ds:uri="http://purl.org/dc/elements/1.1/"/>
+    <ds:schemaRef ds:uri="6f1b3788-58c0-46a5-9604-64d97c7fc47c"/>
+    <ds:schemaRef ds:uri="73eca01c-4ea5-40c8-83fd-b296bd340025"/>
+    <ds:schemaRef ds:uri="http://purl.org/dc/dcmitype/"/>
+    <ds:schemaRef ds:uri="http://schemas.openxmlformats.org/package/2006/metadata/core-properties"/>
+    <ds:schemaRef ds:uri="http://schemas.microsoft.com/office/2006/documentManagement/types"/>
+    <ds:schemaRef ds:uri="http://www.w3.org/XML/1998/namespace"/>
+    <ds:schemaRef ds:uri="http://schemas.microsoft.com/office/2006/metadata/properties"/>
+  </ds:schemaRefs>
+</ds:datastoreItem>
 </file>
--- a/12 bis - Exercice-Kafka-Spark-Streaming.pptx
+++ b/12 bis - Exercice-Kafka-Spark-Streaming.pptx
@@ -5,7 +5,7 @@
     <p:sldMasterId id="2147483648" r:id="rId4"/>
   </p:sldMasterIdLst>
   <p:notesMasterIdLst>
-    <p:notesMasterId r:id="rId48"/>
+    <p:notesMasterId r:id="rId49"/>
   </p:notesMasterIdLst>
   <p:sldIdLst>
     <p:sldId id="263" r:id="rId5"/>
@@ -43,14 +43,15 @@
     <p:sldId id="1006" r:id="rId37"/>
     <p:sldId id="1007" r:id="rId38"/>
     <p:sldId id="1008" r:id="rId39"/>
-    <p:sldId id="1009" r:id="rId40"/>
-    <p:sldId id="1010" r:id="rId41"/>
-    <p:sldId id="1011" r:id="rId42"/>
-    <p:sldId id="1012" r:id="rId43"/>
-    <p:sldId id="1013" r:id="rId44"/>
-    <p:sldId id="1014" r:id="rId45"/>
-    <p:sldId id="1015" r:id="rId46"/>
-    <p:sldId id="269" r:id="rId47"/>
+    <p:sldId id="2134807217" r:id="rId40"/>
+    <p:sldId id="1009" r:id="rId41"/>
+    <p:sldId id="1010" r:id="rId42"/>
+    <p:sldId id="1011" r:id="rId43"/>
+    <p:sldId id="1012" r:id="rId44"/>
+    <p:sldId id="1013" r:id="rId45"/>
+    <p:sldId id="1014" r:id="rId46"/>
+    <p:sldId id="1015" r:id="rId47"/>
+    <p:sldId id="269" r:id="rId48"/>
   </p:sldIdLst>
   <p:sldSz cx="9144000" cy="5143500" type="screen16x9"/>
   <p:notesSz cx="9144000" cy="5143500"/>
@@ -606,7 +607,13 @@
   <p:cSld>
     <p:spTree>
       <p:nvGrpSpPr>
-        <p:cNvPr id="1" name=""/>
+        <p:cNvPr id="1" name="">
+          <a:extLst>
+            <a:ext uri="{FF2B5EF4-FFF2-40B4-BE49-F238E27FC236}">
+              <a16:creationId xmlns:a16="http://schemas.microsoft.com/office/drawing/2014/main" id="{57401F28-114B-0A30-8F99-CB25ED876BB2}"/>
+            </a:ext>
+          </a:extLst>
+        </p:cNvPr>
         <p:cNvGrpSpPr/>
         <p:nvPr/>
       </p:nvGrpSpPr>
@@ -620,7 +627,13 @@
       </p:grpSpPr>
       <p:sp>
         <p:nvSpPr>
-          <p:cNvPr id="2" name="Slide Image Placeholder 1"/>
+          <p:cNvPr id="2" name="Slide Image Placeholder 1">
+            <a:extLst>
+              <a:ext uri="{FF2B5EF4-FFF2-40B4-BE49-F238E27FC236}">
+                <a16:creationId xmlns:a16="http://schemas.microsoft.com/office/drawing/2014/main" id="{28334046-CE48-4A67-F0CC-F4DEBCA38842}"/>
+              </a:ext>
+            </a:extLst>
+          </p:cNvPr>
           <p:cNvSpPr>
             <a:spLocks noGrp="1" noRot="1" noChangeAspect="1"/>
           </p:cNvSpPr>
@@ -632,7 +645,13 @@
       </p:sp>
       <p:sp>
         <p:nvSpPr>
-          <p:cNvPr id="3" name="Notes Placeholder 2"/>
+          <p:cNvPr id="3" name="Notes Placeholder 2">
+            <a:extLst>
+              <a:ext uri="{FF2B5EF4-FFF2-40B4-BE49-F238E27FC236}">
+                <a16:creationId xmlns:a16="http://schemas.microsoft.com/office/drawing/2014/main" id="{27A67FBC-9013-0154-F0DC-F03F01AE7F62}"/>
+              </a:ext>
+            </a:extLst>
+          </p:cNvPr>
           <p:cNvSpPr>
             <a:spLocks noGrp="1"/>
           </p:cNvSpPr>
@@ -668,7 +687,13 @@
       </p:sp>
       <p:sp>
         <p:nvSpPr>
-          <p:cNvPr id="4" name="Slide Number Placeholder 3"/>
+          <p:cNvPr id="4" name="Slide Number Placeholder 3">
+            <a:extLst>
+              <a:ext uri="{FF2B5EF4-FFF2-40B4-BE49-F238E27FC236}">
+                <a16:creationId xmlns:a16="http://schemas.microsoft.com/office/drawing/2014/main" id="{21330810-4634-99F0-1829-1415A9A5682D}"/>
+              </a:ext>
+            </a:extLst>
+          </p:cNvPr>
           <p:cNvSpPr>
             <a:spLocks noGrp="1"/>
           </p:cNvSpPr>
@@ -686,6 +711,11 @@
         </p:txBody>
       </p:sp>
     </p:spTree>
+    <p:extLst>
+      <p:ext uri="{BB962C8B-B14F-4D97-AF65-F5344CB8AC3E}">
+        <p14:creationId xmlns:p14="http://schemas.microsoft.com/office/powerpoint/2010/main" val="3993282740"/>
+      </p:ext>
+    </p:extLst>
   </p:cSld>
   <p:clrMapOvr>
     <a:masterClrMapping/>
@@ -1264,6 +1294,98 @@
       </p:grpSpPr>
       <p:sp>
         <p:nvSpPr>
+          <p:cNvPr id="2" name="Slide Image Placeholder 1"/>
+          <p:cNvSpPr>
+            <a:spLocks noGrp="1" noRot="1" noChangeAspect="1"/>
+          </p:cNvSpPr>
+          <p:nvPr>
+            <p:ph type="sldImg"/>
+          </p:nvPr>
+        </p:nvSpPr>
+        <p:spPr/>
+      </p:sp>
+      <p:sp>
+        <p:nvSpPr>
+          <p:cNvPr id="3" name="Notes Placeholder 2"/>
+          <p:cNvSpPr>
+            <a:spLocks noGrp="1"/>
+          </p:cNvSpPr>
+          <p:nvPr>
+            <p:ph type="body" idx="1"/>
+          </p:nvPr>
+        </p:nvSpPr>
+        <p:spPr/>
+        <p:txBody>
+          <a:bodyPr/>
+          <a:lstStyle/>
+          <a:p>
+            <a:r>
+              <a:t>Sources techniques :</a:t>
+            </a:r>
+          </a:p>
+          <a:p>
+            <a:r>
+              <a:t>https://spark.apache.org/docs/3.5.6/structured-streaming-kafka-integration.html</a:t>
+            </a:r>
+          </a:p>
+          <a:p>
+            <a:r>
+              <a:t>https://spark.apache.org/docs/3.5.6/structured-streaming-programming-guide.html</a:t>
+            </a:r>
+          </a:p>
+          <a:p>
+            <a:r>
+              <a:t>Exemple pédagogique adapté au support fourni. Code non exécuté contre le broker utilisateur.</a:t>
+            </a:r>
+          </a:p>
+        </p:txBody>
+      </p:sp>
+      <p:sp>
+        <p:nvSpPr>
+          <p:cNvPr id="4" name="Slide Number Placeholder 3"/>
+          <p:cNvSpPr>
+            <a:spLocks noGrp="1"/>
+          </p:cNvSpPr>
+          <p:nvPr>
+            <p:ph type="sldNum" idx="5"/>
+          </p:nvPr>
+        </p:nvSpPr>
+        <p:spPr/>
+        <p:txBody>
+          <a:bodyPr/>
+          <a:lstStyle/>
+          <a:p>
+            <a:endParaRPr/>
+          </a:p>
+        </p:txBody>
+      </p:sp>
+    </p:spTree>
+  </p:cSld>
+  <p:clrMapOvr>
+    <a:masterClrMapping/>
+  </p:clrMapOvr>
+</p:notes>
+</file>
+
+<file path=ppt/notesSlides/notesSlide18.xml><?xml version="1.0" encoding="utf-8"?>
+<p:notes xmlns:a="http://schemas.openxmlformats.org/drawingml/2006/main" xmlns:r="http://schemas.openxmlformats.org/officeDocument/2006/relationships" xmlns:p="http://schemas.openxmlformats.org/presentationml/2006/main">
+  <p:cSld>
+    <p:spTree>
+      <p:nvGrpSpPr>
+        <p:cNvPr id="1" name=""/>
+        <p:cNvGrpSpPr/>
+        <p:nvPr/>
+      </p:nvGrpSpPr>
+      <p:grpSpPr>
+        <a:xfrm>
+          <a:off x="0" y="0"/>
+          <a:ext cx="0" cy="0"/>
+          <a:chOff x="0" y="0"/>
+          <a:chExt cx="0" cy="0"/>
+        </a:xfrm>
+      </p:grpSpPr>
+      <p:sp>
+        <p:nvSpPr>
           <p:cNvPr id="2" name="Espace réservé de l'image des diapositives 1"/>
           <p:cNvSpPr>
             <a:spLocks noGrp="1" noRot="1" noChangeAspect="1"/>
@@ -1310,7 +1432,7 @@
           <a:p>
             <a:fld id="{80B8B0EE-DB74-4337-9E39-4F4401AC088C}" type="slidenum">
               <a:rPr lang="fr-FR" smtClean="0"/>
-              <a:t>43</a:t>
+              <a:t>44</a:t>
             </a:fld>
             <a:endParaRPr lang="fr-FR"/>
           </a:p>
@@ -32465,7 +32587,7 @@
         <p:cNvPr id="1" name="">
           <a:extLst>
             <a:ext uri="{FF2B5EF4-FFF2-40B4-BE49-F238E27FC236}">
-              <a16:creationId xmlns:a16="http://schemas.microsoft.com/office/drawing/2014/main" id="{43AD5479-2065-6145-2A05-8EC6DC7CA978}"/>
+              <a16:creationId xmlns:a16="http://schemas.microsoft.com/office/drawing/2014/main" id="{05B61A2E-1C4E-9CA3-9A8F-98D307DD5543}"/>
             </a:ext>
           </a:extLst>
         </p:cNvPr>
@@ -32485,7 +32607,7 @@
           <p:cNvPr id="46" name="Google Shape;230;p17">
             <a:extLst>
               <a:ext uri="{FF2B5EF4-FFF2-40B4-BE49-F238E27FC236}">
-                <a16:creationId xmlns:a16="http://schemas.microsoft.com/office/drawing/2014/main" id="{39AECA5A-8C39-F8C1-6EF6-59414223C75E}"/>
+                <a16:creationId xmlns:a16="http://schemas.microsoft.com/office/drawing/2014/main" id="{64ABF0F1-C742-F69B-659B-7EADA9A3C8C5}"/>
               </a:ext>
             </a:extLst>
           </p:cNvPr>
@@ -32569,7 +32691,7 @@
           <p:cNvPr id="47" name="Google Shape;231;p17">
             <a:extLst>
               <a:ext uri="{FF2B5EF4-FFF2-40B4-BE49-F238E27FC236}">
-                <a16:creationId xmlns:a16="http://schemas.microsoft.com/office/drawing/2014/main" id="{657F4BE4-4C92-240D-33C9-9737EE91F3AA}"/>
+                <a16:creationId xmlns:a16="http://schemas.microsoft.com/office/drawing/2014/main" id="{0566CAB9-E716-8F51-2A13-BA46CBF89CED}"/>
               </a:ext>
             </a:extLst>
           </p:cNvPr>
@@ -32647,7 +32769,7 @@
           <p:cNvPr id="48" name="Google Shape;232;p17">
             <a:extLst>
               <a:ext uri="{FF2B5EF4-FFF2-40B4-BE49-F238E27FC236}">
-                <a16:creationId xmlns:a16="http://schemas.microsoft.com/office/drawing/2014/main" id="{8B27055A-ED19-9A9D-501B-46AC08C4550D}"/>
+                <a16:creationId xmlns:a16="http://schemas.microsoft.com/office/drawing/2014/main" id="{F673A59F-425E-6B0A-92AC-B7F4BFBAA5DC}"/>
               </a:ext>
             </a:extLst>
           </p:cNvPr>
@@ -32716,7 +32838,7 @@
           <p:cNvPr id="100" name="Rectangle 99">
             <a:extLst>
               <a:ext uri="{FF2B5EF4-FFF2-40B4-BE49-F238E27FC236}">
-                <a16:creationId xmlns:a16="http://schemas.microsoft.com/office/drawing/2014/main" id="{6727AA39-6598-4C8F-8F74-2E5089DD61F9}"/>
+                <a16:creationId xmlns:a16="http://schemas.microsoft.com/office/drawing/2014/main" id="{C905A9D6-726B-9305-0128-8C1DF9EB34F4}"/>
               </a:ext>
             </a:extLst>
           </p:cNvPr>
@@ -32763,7 +32885,7 @@
                 <a:ea typeface="Calibri"/>
                 <a:cs typeface="Calibri"/>
               </a:rPr>
-              <a:t>8. Affichage dans le notebook</a:t>
+              <a:t>7. Sélection des données valides</a:t>
             </a:r>
           </a:p>
         </p:txBody>
@@ -32773,7 +32895,7 @@
           <p:cNvPr id="101" name="Rectangle 100">
             <a:extLst>
               <a:ext uri="{FF2B5EF4-FFF2-40B4-BE49-F238E27FC236}">
-                <a16:creationId xmlns:a16="http://schemas.microsoft.com/office/drawing/2014/main" id="{92D12F72-D32E-469D-BA4C-7AC6BE4B3926}"/>
+                <a16:creationId xmlns:a16="http://schemas.microsoft.com/office/drawing/2014/main" id="{7643CD95-7732-48F0-1DA9-AC5A78FE900B}"/>
               </a:ext>
             </a:extLst>
           </p:cNvPr>
@@ -32812,7 +32934,7 @@
               </a:defRPr>
             </a:pPr>
             <a:r>
-              <a:rPr sz="1350" b="0">
+              <a:rPr lang="fr-FR" sz="1350" b="0" dirty="0">
                 <a:solidFill>
                   <a:srgbClr val="222222"/>
                 </a:solidFill>
@@ -32820,8 +32942,71 @@
                 <a:ea typeface="Calibri"/>
                 <a:cs typeface="Calibri"/>
               </a:rPr>
-              <a:t>Le sink memory crée une table SQL temporaire dans le driver.</a:t>
-            </a:r>
+              <a:t>Dans </a:t>
+            </a:r>
+            <a:r>
+              <a:rPr lang="fr-FR" sz="1350" b="0">
+                <a:solidFill>
+                  <a:srgbClr val="222222"/>
+                </a:solidFill>
+                <a:latin typeface="Calibri"/>
+                <a:ea typeface="Calibri"/>
+                <a:cs typeface="Calibri"/>
+              </a:rPr>
+              <a:t>un </a:t>
+            </a:r>
+            <a:r>
+              <a:rPr lang="fr-FR" sz="1350">
+                <a:solidFill>
+                  <a:srgbClr val="222222"/>
+                </a:solidFill>
+                <a:latin typeface="Calibri"/>
+                <a:ea typeface="Calibri"/>
+                <a:cs typeface="Calibri"/>
+              </a:rPr>
+              <a:t>terminal, d</a:t>
+            </a:r>
+            <a:r>
+              <a:rPr lang="fr-FR" sz="1350" b="0">
+                <a:solidFill>
+                  <a:srgbClr val="222222"/>
+                </a:solidFill>
+                <a:latin typeface="Calibri"/>
+                <a:ea typeface="Calibri"/>
+                <a:cs typeface="Calibri"/>
+              </a:rPr>
+              <a:t>onner </a:t>
+            </a:r>
+            <a:r>
+              <a:rPr lang="fr-FR" sz="1350" b="0" dirty="0">
+                <a:solidFill>
+                  <a:srgbClr val="222222"/>
+                </a:solidFill>
+                <a:latin typeface="Calibri"/>
+                <a:ea typeface="Calibri"/>
+                <a:cs typeface="Calibri"/>
+              </a:rPr>
+              <a:t>les droits pour écrire sur disque les </a:t>
+            </a:r>
+            <a:r>
+              <a:rPr lang="fr-FR" sz="1350" b="0" dirty="0" err="1">
+                <a:solidFill>
+                  <a:srgbClr val="222222"/>
+                </a:solidFill>
+                <a:latin typeface="Calibri"/>
+                <a:ea typeface="Calibri"/>
+                <a:cs typeface="Calibri"/>
+              </a:rPr>
+              <a:t>streams</a:t>
+            </a:r>
+            <a:endParaRPr sz="1350" b="0" dirty="0">
+              <a:solidFill>
+                <a:srgbClr val="222222"/>
+              </a:solidFill>
+              <a:latin typeface="Calibri"/>
+              <a:ea typeface="Calibri"/>
+              <a:cs typeface="Calibri"/>
+            </a:endParaRPr>
           </a:p>
         </p:txBody>
       </p:sp>
@@ -32830,7 +33015,7 @@
           <p:cNvPr id="102" name="Rectangle 101">
             <a:extLst>
               <a:ext uri="{FF2B5EF4-FFF2-40B4-BE49-F238E27FC236}">
-                <a16:creationId xmlns:a16="http://schemas.microsoft.com/office/drawing/2014/main" id="{215ED60E-C505-4E07-8F5D-ED26BEB4A812}"/>
+                <a16:creationId xmlns:a16="http://schemas.microsoft.com/office/drawing/2014/main" id="{A7E71147-8D03-3A0E-2E19-DDFC5FE69E5B}"/>
               </a:ext>
             </a:extLst>
           </p:cNvPr>
@@ -32871,7 +33056,7 @@
               </a:defRPr>
             </a:pPr>
             <a:r>
-              <a:rPr sz="1275" b="0" dirty="0" err="1">
+              <a:rPr lang="fr-FR" sz="1275" dirty="0">
                 <a:solidFill>
                   <a:srgbClr val="EEEEEE"/>
                 </a:solidFill>
@@ -32879,10 +33064,10 @@
                 <a:ea typeface="Consolas"/>
                 <a:cs typeface="Consolas"/>
               </a:rPr>
-              <a:t>q_mem</a:t>
-            </a:r>
-            <a:r>
-              <a:rPr sz="1275" b="0" dirty="0">
+              <a:t>cd ~/</a:t>
+            </a:r>
+            <a:r>
+              <a:rPr lang="fr-FR" sz="1275" dirty="0" err="1">
                 <a:solidFill>
                   <a:srgbClr val="EEEEEE"/>
                 </a:solidFill>
@@ -32890,18 +33075,316 @@
                 <a:ea typeface="Consolas"/>
                 <a:cs typeface="Consolas"/>
               </a:rPr>
-              <a:t> = (</a:t>
-            </a:r>
-            <a:r>
-              <a:rPr sz="1275" b="0" dirty="0" err="1">
+              <a:t>kafka</a:t>
+            </a:r>
+            <a:endParaRPr lang="fr-FR" sz="1275" dirty="0">
+              <a:solidFill>
+                <a:srgbClr val="EEEEEE"/>
+              </a:solidFill>
+              <a:latin typeface="Consolas"/>
+              <a:ea typeface="Consolas"/>
+              <a:cs typeface="Consolas"/>
+            </a:endParaRPr>
+          </a:p>
+          <a:p>
+            <a:pPr>
+              <a:defRPr sz="1275" b="0">
                 <a:solidFill>
                   <a:srgbClr val="EEEEEE"/>
                 </a:solidFill>
                 <a:latin typeface="Consolas"/>
                 <a:ea typeface="Consolas"/>
                 <a:cs typeface="Consolas"/>
-              </a:rPr>
-              <a:t>events.writeStream</a:t>
+              </a:defRPr>
+            </a:pPr>
+            <a:endParaRPr lang="fr-FR" sz="1275" dirty="0">
+              <a:solidFill>
+                <a:srgbClr val="EEEEEE"/>
+              </a:solidFill>
+              <a:latin typeface="Consolas"/>
+              <a:ea typeface="Consolas"/>
+              <a:cs typeface="Consolas"/>
+            </a:endParaRPr>
+          </a:p>
+          <a:p>
+            <a:pPr>
+              <a:defRPr sz="1275" b="0">
+                <a:solidFill>
+                  <a:srgbClr val="EEEEEE"/>
+                </a:solidFill>
+                <a:latin typeface="Consolas"/>
+                <a:ea typeface="Consolas"/>
+                <a:cs typeface="Consolas"/>
+              </a:defRPr>
+            </a:pPr>
+            <a:r>
+              <a:rPr lang="fr-FR" sz="1275" dirty="0">
+                <a:solidFill>
+                  <a:srgbClr val="EEEEEE"/>
+                </a:solidFill>
+                <a:latin typeface="Consolas"/>
+                <a:ea typeface="Consolas"/>
+                <a:cs typeface="Consolas"/>
+              </a:rPr>
+              <a:t># Avec le montage ./notebooks:/home/</a:t>
+            </a:r>
+            <a:r>
+              <a:rPr lang="fr-FR" sz="1275" dirty="0" err="1">
+                <a:solidFill>
+                  <a:srgbClr val="EEEEEE"/>
+                </a:solidFill>
+                <a:latin typeface="Consolas"/>
+                <a:ea typeface="Consolas"/>
+                <a:cs typeface="Consolas"/>
+              </a:rPr>
+              <a:t>jovyan</a:t>
+            </a:r>
+            <a:r>
+              <a:rPr lang="fr-FR" sz="1275" dirty="0">
+                <a:solidFill>
+                  <a:srgbClr val="EEEEEE"/>
+                </a:solidFill>
+                <a:latin typeface="Consolas"/>
+                <a:ea typeface="Consolas"/>
+                <a:cs typeface="Consolas"/>
+              </a:rPr>
+              <a:t>/</a:t>
+            </a:r>
+            <a:r>
+              <a:rPr lang="fr-FR" sz="1275" dirty="0" err="1">
+                <a:solidFill>
+                  <a:srgbClr val="EEEEEE"/>
+                </a:solidFill>
+                <a:latin typeface="Consolas"/>
+                <a:ea typeface="Consolas"/>
+                <a:cs typeface="Consolas"/>
+              </a:rPr>
+              <a:t>work</a:t>
+            </a:r>
+            <a:endParaRPr lang="fr-FR" sz="1275" dirty="0">
+              <a:solidFill>
+                <a:srgbClr val="EEEEEE"/>
+              </a:solidFill>
+              <a:latin typeface="Consolas"/>
+              <a:ea typeface="Consolas"/>
+              <a:cs typeface="Consolas"/>
+            </a:endParaRPr>
+          </a:p>
+          <a:p>
+            <a:pPr>
+              <a:defRPr sz="1275" b="0">
+                <a:solidFill>
+                  <a:srgbClr val="EEEEEE"/>
+                </a:solidFill>
+                <a:latin typeface="Consolas"/>
+                <a:ea typeface="Consolas"/>
+                <a:cs typeface="Consolas"/>
+              </a:defRPr>
+            </a:pPr>
+            <a:r>
+              <a:rPr lang="fr-FR" sz="1275" dirty="0" err="1">
+                <a:solidFill>
+                  <a:srgbClr val="EEEEEE"/>
+                </a:solidFill>
+                <a:latin typeface="Consolas"/>
+                <a:ea typeface="Consolas"/>
+                <a:cs typeface="Consolas"/>
+              </a:rPr>
+              <a:t>sudo</a:t>
+            </a:r>
+            <a:r>
+              <a:rPr lang="fr-FR" sz="1275" dirty="0">
+                <a:solidFill>
+                  <a:srgbClr val="EEEEEE"/>
+                </a:solidFill>
+                <a:latin typeface="Consolas"/>
+                <a:ea typeface="Consolas"/>
+                <a:cs typeface="Consolas"/>
+              </a:rPr>
+              <a:t> </a:t>
+            </a:r>
+            <a:r>
+              <a:rPr lang="fr-FR" sz="1275" dirty="0" err="1">
+                <a:solidFill>
+                  <a:srgbClr val="EEEEEE"/>
+                </a:solidFill>
+                <a:latin typeface="Consolas"/>
+                <a:ea typeface="Consolas"/>
+                <a:cs typeface="Consolas"/>
+              </a:rPr>
+              <a:t>mkdir</a:t>
+            </a:r>
+            <a:r>
+              <a:rPr lang="fr-FR" sz="1275" dirty="0">
+                <a:solidFill>
+                  <a:srgbClr val="EEEEEE"/>
+                </a:solidFill>
+                <a:latin typeface="Consolas"/>
+                <a:ea typeface="Consolas"/>
+                <a:cs typeface="Consolas"/>
+              </a:rPr>
+              <a:t> -p ./notebooks/</a:t>
+            </a:r>
+            <a:r>
+              <a:rPr lang="fr-FR" sz="1275" dirty="0" err="1">
+                <a:solidFill>
+                  <a:srgbClr val="EEEEEE"/>
+                </a:solidFill>
+                <a:latin typeface="Consolas"/>
+                <a:ea typeface="Consolas"/>
+                <a:cs typeface="Consolas"/>
+              </a:rPr>
+              <a:t>spark_stream</a:t>
+            </a:r>
+            <a:endParaRPr lang="fr-FR" sz="1275" dirty="0">
+              <a:solidFill>
+                <a:srgbClr val="EEEEEE"/>
+              </a:solidFill>
+              <a:latin typeface="Consolas"/>
+              <a:ea typeface="Consolas"/>
+              <a:cs typeface="Consolas"/>
+            </a:endParaRPr>
+          </a:p>
+          <a:p>
+            <a:pPr>
+              <a:defRPr sz="1275" b="0">
+                <a:solidFill>
+                  <a:srgbClr val="EEEEEE"/>
+                </a:solidFill>
+                <a:latin typeface="Consolas"/>
+                <a:ea typeface="Consolas"/>
+                <a:cs typeface="Consolas"/>
+              </a:defRPr>
+            </a:pPr>
+            <a:r>
+              <a:rPr lang="fr-FR" sz="1275" dirty="0" err="1">
+                <a:solidFill>
+                  <a:srgbClr val="EEEEEE"/>
+                </a:solidFill>
+                <a:latin typeface="Consolas"/>
+                <a:ea typeface="Consolas"/>
+                <a:cs typeface="Consolas"/>
+              </a:rPr>
+              <a:t>sudo</a:t>
+            </a:r>
+            <a:r>
+              <a:rPr lang="fr-FR" sz="1275" dirty="0">
+                <a:solidFill>
+                  <a:srgbClr val="EEEEEE"/>
+                </a:solidFill>
+                <a:latin typeface="Consolas"/>
+                <a:ea typeface="Consolas"/>
+                <a:cs typeface="Consolas"/>
+              </a:rPr>
+              <a:t> </a:t>
+            </a:r>
+            <a:r>
+              <a:rPr lang="fr-FR" sz="1275" dirty="0" err="1">
+                <a:solidFill>
+                  <a:srgbClr val="EEEEEE"/>
+                </a:solidFill>
+                <a:latin typeface="Consolas"/>
+                <a:ea typeface="Consolas"/>
+                <a:cs typeface="Consolas"/>
+              </a:rPr>
+              <a:t>chown</a:t>
+            </a:r>
+            <a:r>
+              <a:rPr lang="fr-FR" sz="1275" dirty="0">
+                <a:solidFill>
+                  <a:srgbClr val="EEEEEE"/>
+                </a:solidFill>
+                <a:latin typeface="Consolas"/>
+                <a:ea typeface="Consolas"/>
+                <a:cs typeface="Consolas"/>
+              </a:rPr>
+              <a:t> -R 1000:100 ./notebooks/</a:t>
+            </a:r>
+            <a:r>
+              <a:rPr lang="fr-FR" sz="1275" dirty="0" err="1">
+                <a:solidFill>
+                  <a:srgbClr val="EEEEEE"/>
+                </a:solidFill>
+                <a:latin typeface="Consolas"/>
+                <a:ea typeface="Consolas"/>
+                <a:cs typeface="Consolas"/>
+              </a:rPr>
+              <a:t>spark_stream</a:t>
+            </a:r>
+            <a:endParaRPr lang="fr-FR" sz="1275" dirty="0">
+              <a:solidFill>
+                <a:srgbClr val="EEEEEE"/>
+              </a:solidFill>
+              <a:latin typeface="Consolas"/>
+              <a:ea typeface="Consolas"/>
+              <a:cs typeface="Consolas"/>
+            </a:endParaRPr>
+          </a:p>
+          <a:p>
+            <a:pPr>
+              <a:defRPr sz="1275" b="0">
+                <a:solidFill>
+                  <a:srgbClr val="EEEEEE"/>
+                </a:solidFill>
+                <a:latin typeface="Consolas"/>
+                <a:ea typeface="Consolas"/>
+                <a:cs typeface="Consolas"/>
+              </a:defRPr>
+            </a:pPr>
+            <a:r>
+              <a:rPr lang="fr-FR" sz="1275" dirty="0" err="1">
+                <a:solidFill>
+                  <a:srgbClr val="EEEEEE"/>
+                </a:solidFill>
+                <a:latin typeface="Consolas"/>
+                <a:ea typeface="Consolas"/>
+                <a:cs typeface="Consolas"/>
+              </a:rPr>
+              <a:t>sudo</a:t>
+            </a:r>
+            <a:r>
+              <a:rPr lang="fr-FR" sz="1275" dirty="0">
+                <a:solidFill>
+                  <a:srgbClr val="EEEEEE"/>
+                </a:solidFill>
+                <a:latin typeface="Consolas"/>
+                <a:ea typeface="Consolas"/>
+                <a:cs typeface="Consolas"/>
+              </a:rPr>
+              <a:t> chmod -R </a:t>
+            </a:r>
+            <a:r>
+              <a:rPr lang="fr-FR" sz="1275" dirty="0" err="1">
+                <a:solidFill>
+                  <a:srgbClr val="EEEEEE"/>
+                </a:solidFill>
+                <a:latin typeface="Consolas"/>
+                <a:ea typeface="Consolas"/>
+                <a:cs typeface="Consolas"/>
+              </a:rPr>
+              <a:t>u+rwX</a:t>
+            </a:r>
+            <a:r>
+              <a:rPr lang="fr-FR" sz="1275" dirty="0">
+                <a:solidFill>
+                  <a:srgbClr val="EEEEEE"/>
+                </a:solidFill>
+                <a:latin typeface="Consolas"/>
+                <a:ea typeface="Consolas"/>
+                <a:cs typeface="Consolas"/>
+              </a:rPr>
+              <a:t> ./notebooks/</a:t>
+            </a:r>
+            <a:r>
+              <a:rPr lang="fr-FR" sz="1275" dirty="0" err="1">
+                <a:solidFill>
+                  <a:srgbClr val="EEEEEE"/>
+                </a:solidFill>
+                <a:latin typeface="Consolas"/>
+                <a:ea typeface="Consolas"/>
+                <a:cs typeface="Consolas"/>
+              </a:rPr>
+              <a:t>spark_stream</a:t>
             </a:r>
             <a:endParaRPr sz="1275" b="0" dirty="0">
               <a:solidFill>
@@ -32912,209 +33395,6 @@
               <a:cs typeface="Consolas"/>
             </a:endParaRPr>
           </a:p>
-          <a:p>
-            <a:pPr>
-              <a:defRPr sz="1275" b="0">
-                <a:solidFill>
-                  <a:srgbClr val="EEEEEE"/>
-                </a:solidFill>
-                <a:latin typeface="Consolas"/>
-                <a:ea typeface="Consolas"/>
-                <a:cs typeface="Consolas"/>
-              </a:defRPr>
-            </a:pPr>
-            <a:r>
-              <a:rPr sz="1275" b="0" dirty="0">
-                <a:solidFill>
-                  <a:srgbClr val="EEEEEE"/>
-                </a:solidFill>
-                <a:latin typeface="Consolas"/>
-                <a:ea typeface="Consolas"/>
-                <a:cs typeface="Consolas"/>
-              </a:rPr>
-              <a:t>    .format("memory")</a:t>
-            </a:r>
-          </a:p>
-          <a:p>
-            <a:pPr>
-              <a:defRPr sz="1275" b="0">
-                <a:solidFill>
-                  <a:srgbClr val="EEEEEE"/>
-                </a:solidFill>
-                <a:latin typeface="Consolas"/>
-                <a:ea typeface="Consolas"/>
-                <a:cs typeface="Consolas"/>
-              </a:defRPr>
-            </a:pPr>
-            <a:r>
-              <a:rPr sz="1275" b="0" dirty="0">
-                <a:solidFill>
-                  <a:srgbClr val="EEEEEE"/>
-                </a:solidFill>
-                <a:latin typeface="Consolas"/>
-                <a:ea typeface="Consolas"/>
-                <a:cs typeface="Consolas"/>
-              </a:rPr>
-              <a:t>    .</a:t>
-            </a:r>
-            <a:r>
-              <a:rPr sz="1275" b="0" dirty="0" err="1">
-                <a:solidFill>
-                  <a:srgbClr val="EEEEEE"/>
-                </a:solidFill>
-                <a:latin typeface="Consolas"/>
-                <a:ea typeface="Consolas"/>
-                <a:cs typeface="Consolas"/>
-              </a:rPr>
-              <a:t>queryName</a:t>
-            </a:r>
-            <a:r>
-              <a:rPr sz="1275" b="0" dirty="0">
-                <a:solidFill>
-                  <a:srgbClr val="EEEEEE"/>
-                </a:solidFill>
-                <a:latin typeface="Consolas"/>
-                <a:ea typeface="Consolas"/>
-                <a:cs typeface="Consolas"/>
-              </a:rPr>
-              <a:t>("</a:t>
-            </a:r>
-            <a:r>
-              <a:rPr sz="1275" b="0" dirty="0" err="1">
-                <a:solidFill>
-                  <a:srgbClr val="EEEEEE"/>
-                </a:solidFill>
-                <a:latin typeface="Consolas"/>
-                <a:ea typeface="Consolas"/>
-                <a:cs typeface="Consolas"/>
-              </a:rPr>
-              <a:t>kafka_events</a:t>
-            </a:r>
-            <a:r>
-              <a:rPr sz="1275" b="0" dirty="0">
-                <a:solidFill>
-                  <a:srgbClr val="EEEEEE"/>
-                </a:solidFill>
-                <a:latin typeface="Consolas"/>
-                <a:ea typeface="Consolas"/>
-                <a:cs typeface="Consolas"/>
-              </a:rPr>
-              <a:t>")</a:t>
-            </a:r>
-          </a:p>
-          <a:p>
-            <a:pPr>
-              <a:defRPr sz="1275" b="0">
-                <a:solidFill>
-                  <a:srgbClr val="EEEEEE"/>
-                </a:solidFill>
-                <a:latin typeface="Consolas"/>
-                <a:ea typeface="Consolas"/>
-                <a:cs typeface="Consolas"/>
-              </a:defRPr>
-            </a:pPr>
-            <a:r>
-              <a:rPr sz="1275" b="0" dirty="0">
-                <a:solidFill>
-                  <a:srgbClr val="EEEEEE"/>
-                </a:solidFill>
-                <a:latin typeface="Consolas"/>
-                <a:ea typeface="Consolas"/>
-                <a:cs typeface="Consolas"/>
-              </a:rPr>
-              <a:t>    .</a:t>
-            </a:r>
-            <a:r>
-              <a:rPr sz="1275" b="0" dirty="0" err="1">
-                <a:solidFill>
-                  <a:srgbClr val="EEEEEE"/>
-                </a:solidFill>
-                <a:latin typeface="Consolas"/>
-                <a:ea typeface="Consolas"/>
-                <a:cs typeface="Consolas"/>
-              </a:rPr>
-              <a:t>outputMode</a:t>
-            </a:r>
-            <a:r>
-              <a:rPr sz="1275" b="0" dirty="0">
-                <a:solidFill>
-                  <a:srgbClr val="EEEEEE"/>
-                </a:solidFill>
-                <a:latin typeface="Consolas"/>
-                <a:ea typeface="Consolas"/>
-                <a:cs typeface="Consolas"/>
-              </a:rPr>
-              <a:t>("append")</a:t>
-            </a:r>
-          </a:p>
-          <a:p>
-            <a:pPr>
-              <a:defRPr sz="1275" b="0">
-                <a:solidFill>
-                  <a:srgbClr val="EEEEEE"/>
-                </a:solidFill>
-                <a:latin typeface="Consolas"/>
-                <a:ea typeface="Consolas"/>
-                <a:cs typeface="Consolas"/>
-              </a:defRPr>
-            </a:pPr>
-            <a:r>
-              <a:rPr sz="1275" b="0" dirty="0">
-                <a:solidFill>
-                  <a:srgbClr val="EEEEEE"/>
-                </a:solidFill>
-                <a:latin typeface="Consolas"/>
-                <a:ea typeface="Consolas"/>
-                <a:cs typeface="Consolas"/>
-              </a:rPr>
-              <a:t>    .trigger(</a:t>
-            </a:r>
-            <a:r>
-              <a:rPr sz="1275" b="0" dirty="0" err="1">
-                <a:solidFill>
-                  <a:srgbClr val="EEEEEE"/>
-                </a:solidFill>
-                <a:latin typeface="Consolas"/>
-                <a:ea typeface="Consolas"/>
-                <a:cs typeface="Consolas"/>
-              </a:rPr>
-              <a:t>processingTime</a:t>
-            </a:r>
-            <a:r>
-              <a:rPr sz="1275" b="0" dirty="0">
-                <a:solidFill>
-                  <a:srgbClr val="EEEEEE"/>
-                </a:solidFill>
-                <a:latin typeface="Consolas"/>
-                <a:ea typeface="Consolas"/>
-                <a:cs typeface="Consolas"/>
-              </a:rPr>
-              <a:t>="2 seconds")</a:t>
-            </a:r>
-          </a:p>
-          <a:p>
-            <a:pPr>
-              <a:defRPr sz="1275" b="0">
-                <a:solidFill>
-                  <a:srgbClr val="EEEEEE"/>
-                </a:solidFill>
-                <a:latin typeface="Consolas"/>
-                <a:ea typeface="Consolas"/>
-                <a:cs typeface="Consolas"/>
-              </a:defRPr>
-            </a:pPr>
-            <a:r>
-              <a:rPr sz="1275" b="0" dirty="0">
-                <a:solidFill>
-                  <a:srgbClr val="EEEEEE"/>
-                </a:solidFill>
-                <a:latin typeface="Consolas"/>
-                <a:ea typeface="Consolas"/>
-                <a:cs typeface="Consolas"/>
-              </a:rPr>
-              <a:t>    .start())</a:t>
-            </a:r>
-          </a:p>
         </p:txBody>
       </p:sp>
       <p:sp>
@@ -33122,7 +33402,7 @@
           <p:cNvPr id="103" name="Rectangle 102">
             <a:extLst>
               <a:ext uri="{FF2B5EF4-FFF2-40B4-BE49-F238E27FC236}">
-                <a16:creationId xmlns:a16="http://schemas.microsoft.com/office/drawing/2014/main" id="{B76B8610-FDA6-4D3D-BBBE-642B8AB467DB}"/>
+                <a16:creationId xmlns:a16="http://schemas.microsoft.com/office/drawing/2014/main" id="{BECC7305-8AD1-0234-D1E4-DC63120BE654}"/>
               </a:ext>
             </a:extLst>
           </p:cNvPr>
@@ -33160,24 +33440,21 @@
                 <a:cs typeface="Calibri"/>
               </a:defRPr>
             </a:pPr>
-            <a:r>
-              <a:rPr sz="1200" b="0">
-                <a:solidFill>
-                  <a:srgbClr val="555555"/>
-                </a:solidFill>
-                <a:latin typeface="Calibri"/>
-                <a:ea typeface="Calibri"/>
-                <a:cs typeface="Calibri"/>
-              </a:rPr>
-              <a:t>Réservé au TP : la table grossit en mémoire et ne garantit pas de reprise durable.</a:t>
-            </a:r>
+            <a:endParaRPr sz="1200" b="0" dirty="0">
+              <a:solidFill>
+                <a:srgbClr val="555555"/>
+              </a:solidFill>
+              <a:latin typeface="Calibri"/>
+              <a:ea typeface="Calibri"/>
+              <a:cs typeface="Calibri"/>
+            </a:endParaRPr>
           </a:p>
         </p:txBody>
       </p:sp>
     </p:spTree>
     <p:extLst>
       <p:ext uri="{BB962C8B-B14F-4D97-AF65-F5344CB8AC3E}">
-        <p14:creationId xmlns:p14="http://schemas.microsoft.com/office/powerpoint/2010/main" val="3068620206"/>
+        <p14:creationId xmlns:p14="http://schemas.microsoft.com/office/powerpoint/2010/main" val="3827239009"/>
       </p:ext>
     </p:extLst>
   </p:cSld>
@@ -33446,7 +33723,7 @@
           <p:cNvPr id="100" name="Rectangle 99">
             <a:extLst>
               <a:ext uri="{FF2B5EF4-FFF2-40B4-BE49-F238E27FC236}">
-                <a16:creationId xmlns:a16="http://schemas.microsoft.com/office/drawing/2014/main" id="{A17F8A1A-6E80-49E2-8FB0-3FDC52606A22}"/>
+                <a16:creationId xmlns:a16="http://schemas.microsoft.com/office/drawing/2014/main" id="{6727AA39-6598-4C8F-8F74-2E5089DD61F9}"/>
               </a:ext>
             </a:extLst>
           </p:cNvPr>
@@ -33493,7 +33770,7 @@
                 <a:ea typeface="Calibri"/>
                 <a:cs typeface="Calibri"/>
               </a:rPr>
-              <a:t>9. Observation des résultats</a:t>
+              <a:t>8. Affichage dans le notebook</a:t>
             </a:r>
           </a:p>
         </p:txBody>
@@ -33503,7 +33780,7 @@
           <p:cNvPr id="101" name="Rectangle 100">
             <a:extLst>
               <a:ext uri="{FF2B5EF4-FFF2-40B4-BE49-F238E27FC236}">
-                <a16:creationId xmlns:a16="http://schemas.microsoft.com/office/drawing/2014/main" id="{6951EB86-9B21-4034-8C56-65B1DBE8FFD7}"/>
+                <a16:creationId xmlns:a16="http://schemas.microsoft.com/office/drawing/2014/main" id="{92D12F72-D32E-469D-BA4C-7AC6BE4B3926}"/>
               </a:ext>
             </a:extLst>
           </p:cNvPr>
@@ -33550,7 +33827,7 @@
                 <a:ea typeface="Calibri"/>
                 <a:cs typeface="Calibri"/>
               </a:rPr>
-              <a:t>Après quelques secondes, exécuter cette cellule. Relancer la cellule pour actualiser.</a:t>
+              <a:t>Le sink memory crée une table SQL temporaire dans le driver.</a:t>
             </a:r>
           </a:p>
         </p:txBody>
@@ -33560,7 +33837,7 @@
           <p:cNvPr id="102" name="Rectangle 101">
             <a:extLst>
               <a:ext uri="{FF2B5EF4-FFF2-40B4-BE49-F238E27FC236}">
-                <a16:creationId xmlns:a16="http://schemas.microsoft.com/office/drawing/2014/main" id="{90C44415-80A1-4CDA-AC8C-784521CEA78A}"/>
+                <a16:creationId xmlns:a16="http://schemas.microsoft.com/office/drawing/2014/main" id="{215ED60E-C505-4E07-8F5D-ED26BEB4A812}"/>
               </a:ext>
             </a:extLst>
           </p:cNvPr>
@@ -33609,7 +33886,7 @@
                 <a:ea typeface="Consolas"/>
                 <a:cs typeface="Consolas"/>
               </a:rPr>
-              <a:t>spark.sql</a:t>
+              <a:t>q_mem</a:t>
             </a:r>
             <a:r>
               <a:rPr sz="1275" b="0" dirty="0">
@@ -33620,64 +33897,18 @@
                 <a:ea typeface="Consolas"/>
                 <a:cs typeface="Consolas"/>
               </a:rPr>
-              <a:t>("""</a:t>
-            </a:r>
-          </a:p>
-          <a:p>
-            <a:pPr>
-              <a:defRPr sz="1275" b="0">
+              <a:t> = (</a:t>
+            </a:r>
+            <a:r>
+              <a:rPr sz="1275" b="0" dirty="0" err="1">
                 <a:solidFill>
                   <a:srgbClr val="EEEEEE"/>
                 </a:solidFill>
                 <a:latin typeface="Consolas"/>
                 <a:ea typeface="Consolas"/>
                 <a:cs typeface="Consolas"/>
-              </a:defRPr>
-            </a:pPr>
-            <a:r>
-              <a:rPr sz="1275" b="0" dirty="0">
-                <a:solidFill>
-                  <a:srgbClr val="EEEEEE"/>
-                </a:solidFill>
-                <a:latin typeface="Consolas"/>
-                <a:ea typeface="Consolas"/>
-                <a:cs typeface="Consolas"/>
-              </a:rPr>
-              <a:t>    SELECT partition, offset, x1, x2, label</a:t>
-            </a:r>
-          </a:p>
-          <a:p>
-            <a:pPr>
-              <a:defRPr sz="1275" b="0">
-                <a:solidFill>
-                  <a:srgbClr val="EEEEEE"/>
-                </a:solidFill>
-                <a:latin typeface="Consolas"/>
-                <a:ea typeface="Consolas"/>
-                <a:cs typeface="Consolas"/>
-              </a:defRPr>
-            </a:pPr>
-            <a:r>
-              <a:rPr sz="1275" b="0" dirty="0">
-                <a:solidFill>
-                  <a:srgbClr val="EEEEEE"/>
-                </a:solidFill>
-                <a:latin typeface="Consolas"/>
-                <a:ea typeface="Consolas"/>
-                <a:cs typeface="Consolas"/>
-              </a:rPr>
-              <a:t>    FROM </a:t>
-            </a:r>
-            <a:r>
-              <a:rPr sz="1275" b="0" dirty="0" err="1">
-                <a:solidFill>
-                  <a:srgbClr val="EEEEEE"/>
-                </a:solidFill>
-                <a:latin typeface="Consolas"/>
-                <a:ea typeface="Consolas"/>
-                <a:cs typeface="Consolas"/>
-              </a:rPr>
-              <a:t>kafka_events</a:t>
+              </a:rPr>
+              <a:t>events.writeStream</a:t>
             </a:r>
             <a:endParaRPr sz="1275" b="0" dirty="0">
               <a:solidFill>
@@ -33708,7 +33939,7 @@
                 <a:ea typeface="Consolas"/>
                 <a:cs typeface="Consolas"/>
               </a:rPr>
-              <a:t>    ORDER BY partition, offset</a:t>
+              <a:t>    .format("memory")</a:t>
             </a:r>
           </a:p>
           <a:p>
@@ -33731,7 +33962,51 @@
                 <a:ea typeface="Consolas"/>
                 <a:cs typeface="Consolas"/>
               </a:rPr>
-              <a:t>    LIMIT 20</a:t>
+              <a:t>    .</a:t>
+            </a:r>
+            <a:r>
+              <a:rPr sz="1275" b="0" dirty="0" err="1">
+                <a:solidFill>
+                  <a:srgbClr val="EEEEEE"/>
+                </a:solidFill>
+                <a:latin typeface="Consolas"/>
+                <a:ea typeface="Consolas"/>
+                <a:cs typeface="Consolas"/>
+              </a:rPr>
+              <a:t>queryName</a:t>
+            </a:r>
+            <a:r>
+              <a:rPr sz="1275" b="0" dirty="0">
+                <a:solidFill>
+                  <a:srgbClr val="EEEEEE"/>
+                </a:solidFill>
+                <a:latin typeface="Consolas"/>
+                <a:ea typeface="Consolas"/>
+                <a:cs typeface="Consolas"/>
+              </a:rPr>
+              <a:t>("</a:t>
+            </a:r>
+            <a:r>
+              <a:rPr sz="1275" b="0" dirty="0" err="1">
+                <a:solidFill>
+                  <a:srgbClr val="EEEEEE"/>
+                </a:solidFill>
+                <a:latin typeface="Consolas"/>
+                <a:ea typeface="Consolas"/>
+                <a:cs typeface="Consolas"/>
+              </a:rPr>
+              <a:t>kafka_events</a:t>
+            </a:r>
+            <a:r>
+              <a:rPr sz="1275" b="0" dirty="0">
+                <a:solidFill>
+                  <a:srgbClr val="EEEEEE"/>
+                </a:solidFill>
+                <a:latin typeface="Consolas"/>
+                <a:ea typeface="Consolas"/>
+                <a:cs typeface="Consolas"/>
+              </a:rPr>
+              <a:t>")</a:t>
             </a:r>
           </a:p>
           <a:p>
@@ -33754,18 +34029,30 @@
                 <a:ea typeface="Consolas"/>
                 <a:cs typeface="Consolas"/>
               </a:rPr>
-              <a:t>""").show(truncate=False)</a:t>
-            </a:r>
-          </a:p>
-          <a:p>
-            <a:endParaRPr sz="1275" b="0" dirty="0">
-              <a:solidFill>
-                <a:srgbClr val="EEEEEE"/>
-              </a:solidFill>
-              <a:latin typeface="Consolas"/>
-              <a:ea typeface="Consolas"/>
-              <a:cs typeface="Consolas"/>
-            </a:endParaRPr>
+              <a:t>    .</a:t>
+            </a:r>
+            <a:r>
+              <a:rPr sz="1275" b="0" dirty="0" err="1">
+                <a:solidFill>
+                  <a:srgbClr val="EEEEEE"/>
+                </a:solidFill>
+                <a:latin typeface="Consolas"/>
+                <a:ea typeface="Consolas"/>
+                <a:cs typeface="Consolas"/>
+              </a:rPr>
+              <a:t>outputMode</a:t>
+            </a:r>
+            <a:r>
+              <a:rPr sz="1275" b="0" dirty="0">
+                <a:solidFill>
+                  <a:srgbClr val="EEEEEE"/>
+                </a:solidFill>
+                <a:latin typeface="Consolas"/>
+                <a:ea typeface="Consolas"/>
+                <a:cs typeface="Consolas"/>
+              </a:rPr>
+              <a:t>("append")</a:t>
+            </a:r>
           </a:p>
           <a:p>
             <a:pPr>
@@ -33779,7 +34066,7 @@
               </a:defRPr>
             </a:pPr>
             <a:r>
-              <a:rPr sz="1275" b="0" dirty="0" err="1">
+              <a:rPr sz="1275" b="0" dirty="0">
                 <a:solidFill>
                   <a:srgbClr val="EEEEEE"/>
                 </a:solidFill>
@@ -33787,10 +34074,10 @@
                 <a:ea typeface="Consolas"/>
                 <a:cs typeface="Consolas"/>
               </a:rPr>
-              <a:t>spark.sql</a:t>
-            </a:r>
-            <a:r>
-              <a:rPr sz="1275" b="0" dirty="0">
+              <a:t>    .trigger(</a:t>
+            </a:r>
+            <a:r>
+              <a:rPr sz="1275" b="0" dirty="0" err="1">
                 <a:solidFill>
                   <a:srgbClr val="EEEEEE"/>
                 </a:solidFill>
@@ -33798,7 +34085,18 @@
                 <a:ea typeface="Consolas"/>
                 <a:cs typeface="Consolas"/>
               </a:rPr>
-              <a:t>("""</a:t>
+              <a:t>processingTime</a:t>
+            </a:r>
+            <a:r>
+              <a:rPr sz="1275" b="0" dirty="0">
+                <a:solidFill>
+                  <a:srgbClr val="EEEEEE"/>
+                </a:solidFill>
+                <a:latin typeface="Consolas"/>
+                <a:ea typeface="Consolas"/>
+                <a:cs typeface="Consolas"/>
+              </a:rPr>
+              <a:t>="2 seconds")</a:t>
             </a:r>
           </a:p>
           <a:p>
@@ -33821,97 +34119,7 @@
                 <a:ea typeface="Consolas"/>
                 <a:cs typeface="Consolas"/>
               </a:rPr>
-              <a:t>    SELECT label, COUNT(*) AS </a:t>
-            </a:r>
-            <a:r>
-              <a:rPr sz="1275" b="0" dirty="0" err="1">
-                <a:solidFill>
-                  <a:srgbClr val="EEEEEE"/>
-                </a:solidFill>
-                <a:latin typeface="Consolas"/>
-                <a:ea typeface="Consolas"/>
-                <a:cs typeface="Consolas"/>
-              </a:rPr>
-              <a:t>nb</a:t>
-            </a:r>
-            <a:r>
-              <a:rPr sz="1275" b="0" dirty="0">
-                <a:solidFill>
-                  <a:srgbClr val="EEEEEE"/>
-                </a:solidFill>
-                <a:latin typeface="Consolas"/>
-                <a:ea typeface="Consolas"/>
-                <a:cs typeface="Consolas"/>
-              </a:rPr>
-              <a:t>, AVG(x1) AS moyenne_x1</a:t>
-            </a:r>
-          </a:p>
-          <a:p>
-            <a:pPr>
-              <a:defRPr sz="1275" b="0">
-                <a:solidFill>
-                  <a:srgbClr val="EEEEEE"/>
-                </a:solidFill>
-                <a:latin typeface="Consolas"/>
-                <a:ea typeface="Consolas"/>
-                <a:cs typeface="Consolas"/>
-              </a:defRPr>
-            </a:pPr>
-            <a:r>
-              <a:rPr sz="1275" b="0" dirty="0">
-                <a:solidFill>
-                  <a:srgbClr val="EEEEEE"/>
-                </a:solidFill>
-                <a:latin typeface="Consolas"/>
-                <a:ea typeface="Consolas"/>
-                <a:cs typeface="Consolas"/>
-              </a:rPr>
-              <a:t>    FROM </a:t>
-            </a:r>
-            <a:r>
-              <a:rPr sz="1275" b="0" dirty="0" err="1">
-                <a:solidFill>
-                  <a:srgbClr val="EEEEEE"/>
-                </a:solidFill>
-                <a:latin typeface="Consolas"/>
-                <a:ea typeface="Consolas"/>
-                <a:cs typeface="Consolas"/>
-              </a:rPr>
-              <a:t>kafka_events</a:t>
-            </a:r>
-            <a:r>
-              <a:rPr sz="1275" b="0" dirty="0">
-                <a:solidFill>
-                  <a:srgbClr val="EEEEEE"/>
-                </a:solidFill>
-                <a:latin typeface="Consolas"/>
-                <a:ea typeface="Consolas"/>
-                <a:cs typeface="Consolas"/>
-              </a:rPr>
-              <a:t> GROUP BY label ORDER BY label</a:t>
-            </a:r>
-          </a:p>
-          <a:p>
-            <a:pPr>
-              <a:defRPr sz="1275" b="0">
-                <a:solidFill>
-                  <a:srgbClr val="EEEEEE"/>
-                </a:solidFill>
-                <a:latin typeface="Consolas"/>
-                <a:ea typeface="Consolas"/>
-                <a:cs typeface="Consolas"/>
-              </a:defRPr>
-            </a:pPr>
-            <a:r>
-              <a:rPr sz="1275" b="0" dirty="0">
-                <a:solidFill>
-                  <a:srgbClr val="EEEEEE"/>
-                </a:solidFill>
-                <a:latin typeface="Consolas"/>
-                <a:ea typeface="Consolas"/>
-                <a:cs typeface="Consolas"/>
-              </a:rPr>
-              <a:t>""").show()</a:t>
+              <a:t>    .start())</a:t>
             </a:r>
           </a:p>
         </p:txBody>
@@ -33921,7 +34129,7 @@
           <p:cNvPr id="103" name="Rectangle 102">
             <a:extLst>
               <a:ext uri="{FF2B5EF4-FFF2-40B4-BE49-F238E27FC236}">
-                <a16:creationId xmlns:a16="http://schemas.microsoft.com/office/drawing/2014/main" id="{927570CF-09C6-4F2D-87A6-9942C4108D8F}"/>
+                <a16:creationId xmlns:a16="http://schemas.microsoft.com/office/drawing/2014/main" id="{B76B8610-FDA6-4D3D-BBBE-642B8AB467DB}"/>
               </a:ext>
             </a:extLst>
           </p:cNvPr>
@@ -33968,7 +34176,7 @@
                 <a:ea typeface="Calibri"/>
                 <a:cs typeface="Calibri"/>
               </a:rPr>
-              <a:t>Ces requêtes portent sur la table mémoire. events.show() est interdit sur le flux direct.</a:t>
+              <a:t>Réservé au TP : la table grossit en mémoire et ne garantit pas de reprise durable.</a:t>
             </a:r>
           </a:p>
         </p:txBody>
@@ -34245,7 +34453,7 @@
           <p:cNvPr id="100" name="Rectangle 99">
             <a:extLst>
               <a:ext uri="{FF2B5EF4-FFF2-40B4-BE49-F238E27FC236}">
-                <a16:creationId xmlns:a16="http://schemas.microsoft.com/office/drawing/2014/main" id="{4C896D5F-E699-481C-A917-5637E1EE1B7A}"/>
+                <a16:creationId xmlns:a16="http://schemas.microsoft.com/office/drawing/2014/main" id="{A17F8A1A-6E80-49E2-8FB0-3FDC52606A22}"/>
               </a:ext>
             </a:extLst>
           </p:cNvPr>
@@ -34292,7 +34500,7 @@
                 <a:ea typeface="Calibri"/>
                 <a:cs typeface="Calibri"/>
               </a:rPr>
-              <a:t>10. Test du flux et surveillance</a:t>
+              <a:t>9. Observation des résultats</a:t>
             </a:r>
           </a:p>
         </p:txBody>
@@ -34302,7 +34510,7 @@
           <p:cNvPr id="101" name="Rectangle 100">
             <a:extLst>
               <a:ext uri="{FF2B5EF4-FFF2-40B4-BE49-F238E27FC236}">
-                <a16:creationId xmlns:a16="http://schemas.microsoft.com/office/drawing/2014/main" id="{E0696A8A-9976-46FE-BA47-ADE38CBD24A1}"/>
+                <a16:creationId xmlns:a16="http://schemas.microsoft.com/office/drawing/2014/main" id="{6951EB86-9B21-4034-8C56-65B1DBE8FFD7}"/>
               </a:ext>
             </a:extLst>
           </p:cNvPr>
@@ -34349,30 +34557,7 @@
                 <a:ea typeface="Calibri"/>
                 <a:cs typeface="Calibri"/>
               </a:rPr>
-              <a:t>Dans un second notebook/kernel, relancer la boucle de Producer.ipynb.</a:t>
-            </a:r>
-          </a:p>
-          <a:p>
-            <a:pPr>
-              <a:defRPr sz="1350" b="0">
-                <a:solidFill>
-                  <a:srgbClr val="222222"/>
-                </a:solidFill>
-                <a:latin typeface="Calibri"/>
-                <a:ea typeface="Calibri"/>
-                <a:cs typeface="Calibri"/>
-              </a:defRPr>
-            </a:pPr>
-            <a:r>
-              <a:rPr sz="1350" b="0">
-                <a:solidFill>
-                  <a:srgbClr val="222222"/>
-                </a:solidFill>
-                <a:latin typeface="Calibri"/>
-                <a:ea typeface="Calibri"/>
-                <a:cs typeface="Calibri"/>
-              </a:rPr>
-              <a:t>Le nombre de lignes doit augmenter sans recréer la requête Spark.</a:t>
+              <a:t>Après quelques secondes, exécuter cette cellule. Relancer la cellule pour actualiser.</a:t>
             </a:r>
           </a:p>
         </p:txBody>
@@ -34382,7 +34567,7 @@
           <p:cNvPr id="102" name="Rectangle 101">
             <a:extLst>
               <a:ext uri="{FF2B5EF4-FFF2-40B4-BE49-F238E27FC236}">
-                <a16:creationId xmlns:a16="http://schemas.microsoft.com/office/drawing/2014/main" id="{81607EDC-7F72-4482-832B-6AF84523FFBC}"/>
+                <a16:creationId xmlns:a16="http://schemas.microsoft.com/office/drawing/2014/main" id="{90C44415-80A1-4CDA-AC8C-784521CEA78A}"/>
               </a:ext>
             </a:extLst>
           </p:cNvPr>
@@ -34423,7 +34608,7 @@
               </a:defRPr>
             </a:pPr>
             <a:r>
-              <a:rPr sz="1275" b="0" dirty="0">
+              <a:rPr sz="1275" b="0" dirty="0" err="1">
                 <a:solidFill>
                   <a:srgbClr val="EEEEEE"/>
                 </a:solidFill>
@@ -34431,10 +34616,10 @@
                 <a:ea typeface="Consolas"/>
                 <a:cs typeface="Consolas"/>
               </a:rPr>
-              <a:t>print("Active :", </a:t>
-            </a:r>
-            <a:r>
-              <a:rPr sz="1275" b="0" dirty="0" err="1">
+              <a:t>spark.sql</a:t>
+            </a:r>
+            <a:r>
+              <a:rPr sz="1275" b="0" dirty="0">
                 <a:solidFill>
                   <a:srgbClr val="EEEEEE"/>
                 </a:solidFill>
@@ -34442,18 +34627,7 @@
                 <a:ea typeface="Consolas"/>
                 <a:cs typeface="Consolas"/>
               </a:rPr>
-              <a:t>q_mem.isActive</a:t>
-            </a:r>
-            <a:r>
-              <a:rPr sz="1275" b="0" dirty="0">
-                <a:solidFill>
-                  <a:srgbClr val="EEEEEE"/>
-                </a:solidFill>
-                <a:latin typeface="Consolas"/>
-                <a:ea typeface="Consolas"/>
-                <a:cs typeface="Consolas"/>
-              </a:rPr>
-              <a:t>)</a:t>
+              <a:t>("""</a:t>
             </a:r>
           </a:p>
           <a:p>
@@ -34476,29 +34650,7 @@
                 <a:ea typeface="Consolas"/>
                 <a:cs typeface="Consolas"/>
               </a:rPr>
-              <a:t>print(</a:t>
-            </a:r>
-            <a:r>
-              <a:rPr sz="1275" b="0" dirty="0" err="1">
-                <a:solidFill>
-                  <a:srgbClr val="EEEEEE"/>
-                </a:solidFill>
-                <a:latin typeface="Consolas"/>
-                <a:ea typeface="Consolas"/>
-                <a:cs typeface="Consolas"/>
-              </a:rPr>
-              <a:t>q_mem.status</a:t>
-            </a:r>
-            <a:r>
-              <a:rPr sz="1275" b="0" dirty="0">
-                <a:solidFill>
-                  <a:srgbClr val="EEEEEE"/>
-                </a:solidFill>
-                <a:latin typeface="Consolas"/>
-                <a:ea typeface="Consolas"/>
-                <a:cs typeface="Consolas"/>
-              </a:rPr>
-              <a:t>)</a:t>
+              <a:t>    SELECT partition, offset, x1, x2, label</a:t>
             </a:r>
           </a:p>
           <a:p>
@@ -34521,7 +34673,7 @@
                 <a:ea typeface="Consolas"/>
                 <a:cs typeface="Consolas"/>
               </a:rPr>
-              <a:t>print(</a:t>
+              <a:t>    FROM </a:t>
             </a:r>
             <a:r>
               <a:rPr sz="1275" b="0" dirty="0" err="1">
@@ -34532,29 +34684,7 @@
                 <a:ea typeface="Consolas"/>
                 <a:cs typeface="Consolas"/>
               </a:rPr>
-              <a:t>q_mem.lastProgress</a:t>
-            </a:r>
-            <a:r>
-              <a:rPr sz="1275" b="0" dirty="0">
-                <a:solidFill>
-                  <a:srgbClr val="EEEEEE"/>
-                </a:solidFill>
-                <a:latin typeface="Consolas"/>
-                <a:ea typeface="Consolas"/>
-                <a:cs typeface="Consolas"/>
-              </a:rPr>
-              <a:t>)  # None avant le premier </a:t>
-            </a:r>
-            <a:r>
-              <a:rPr sz="1275" b="0" dirty="0" err="1">
-                <a:solidFill>
-                  <a:srgbClr val="EEEEEE"/>
-                </a:solidFill>
-                <a:latin typeface="Consolas"/>
-                <a:ea typeface="Consolas"/>
-                <a:cs typeface="Consolas"/>
-              </a:rPr>
-              <a:t>progrès</a:t>
+              <a:t>kafka_events</a:t>
             </a:r>
             <a:endParaRPr sz="1275" b="0" dirty="0">
               <a:solidFill>
@@ -34585,19 +34715,20 @@
                 <a:ea typeface="Consolas"/>
                 <a:cs typeface="Consolas"/>
               </a:rPr>
-              <a:t>print(</a:t>
-            </a:r>
-            <a:r>
-              <a:rPr sz="1275" b="0" dirty="0" err="1">
+              <a:t>    ORDER BY partition, offset</a:t>
+            </a:r>
+          </a:p>
+          <a:p>
+            <a:pPr>
+              <a:defRPr sz="1275" b="0">
                 <a:solidFill>
                   <a:srgbClr val="EEEEEE"/>
                 </a:solidFill>
                 <a:latin typeface="Consolas"/>
                 <a:ea typeface="Consolas"/>
                 <a:cs typeface="Consolas"/>
-              </a:rPr>
-              <a:t>q_mem.exception</a:t>
-            </a:r>
+              </a:defRPr>
+            </a:pPr>
             <a:r>
               <a:rPr sz="1275" b="0" dirty="0">
                 <a:solidFill>
@@ -34607,7 +34738,30 @@
                 <a:ea typeface="Consolas"/>
                 <a:cs typeface="Consolas"/>
               </a:rPr>
-              <a:t>())</a:t>
+              <a:t>    LIMIT 20</a:t>
+            </a:r>
+          </a:p>
+          <a:p>
+            <a:pPr>
+              <a:defRPr sz="1275" b="0">
+                <a:solidFill>
+                  <a:srgbClr val="EEEEEE"/>
+                </a:solidFill>
+                <a:latin typeface="Consolas"/>
+                <a:ea typeface="Consolas"/>
+                <a:cs typeface="Consolas"/>
+              </a:defRPr>
+            </a:pPr>
+            <a:r>
+              <a:rPr sz="1275" b="0" dirty="0">
+                <a:solidFill>
+                  <a:srgbClr val="EEEEEE"/>
+                </a:solidFill>
+                <a:latin typeface="Consolas"/>
+                <a:ea typeface="Consolas"/>
+                <a:cs typeface="Consolas"/>
+              </a:rPr>
+              <a:t>""").show(truncate=False)</a:t>
             </a:r>
           </a:p>
           <a:p>
@@ -34632,7 +34786,7 @@
               </a:defRPr>
             </a:pPr>
             <a:r>
-              <a:rPr sz="1275" b="0" dirty="0">
+              <a:rPr sz="1275" b="0" dirty="0" err="1">
                 <a:solidFill>
                   <a:srgbClr val="EEEEEE"/>
                 </a:solidFill>
@@ -34640,10 +34794,10 @@
                 <a:ea typeface="Consolas"/>
                 <a:cs typeface="Consolas"/>
               </a:rPr>
-              <a:t># Une </a:t>
-            </a:r>
-            <a:r>
-              <a:rPr sz="1275" b="0" dirty="0" err="1">
+              <a:t>spark.sql</a:t>
+            </a:r>
+            <a:r>
+              <a:rPr sz="1275" b="0" dirty="0">
                 <a:solidFill>
                   <a:srgbClr val="EEEEEE"/>
                 </a:solidFill>
@@ -34651,40 +34805,7 @@
                 <a:ea typeface="Consolas"/>
                 <a:cs typeface="Consolas"/>
               </a:rPr>
-              <a:t>fois</a:t>
-            </a:r>
-            <a:r>
-              <a:rPr sz="1275" b="0" dirty="0">
-                <a:solidFill>
-                  <a:srgbClr val="EEEEEE"/>
-                </a:solidFill>
-                <a:latin typeface="Consolas"/>
-                <a:ea typeface="Consolas"/>
-                <a:cs typeface="Consolas"/>
-              </a:rPr>
-              <a:t> le test </a:t>
-            </a:r>
-            <a:r>
-              <a:rPr sz="1275" b="0" dirty="0" err="1">
-                <a:solidFill>
-                  <a:srgbClr val="EEEEEE"/>
-                </a:solidFill>
-                <a:latin typeface="Consolas"/>
-                <a:ea typeface="Consolas"/>
-                <a:cs typeface="Consolas"/>
-              </a:rPr>
-              <a:t>terminé</a:t>
-            </a:r>
-            <a:r>
-              <a:rPr sz="1275" b="0" dirty="0">
-                <a:solidFill>
-                  <a:srgbClr val="EEEEEE"/>
-                </a:solidFill>
-                <a:latin typeface="Consolas"/>
-                <a:ea typeface="Consolas"/>
-                <a:cs typeface="Consolas"/>
-              </a:rPr>
-              <a:t> :</a:t>
+              <a:t>("""</a:t>
             </a:r>
           </a:p>
           <a:p>
@@ -34699,7 +34820,7 @@
               </a:defRPr>
             </a:pPr>
             <a:r>
-              <a:rPr sz="1275" b="0" dirty="0" err="1">
+              <a:rPr sz="1275" b="0" dirty="0">
                 <a:solidFill>
                   <a:srgbClr val="EEEEEE"/>
                 </a:solidFill>
@@ -34707,10 +34828,10 @@
                 <a:ea typeface="Consolas"/>
                 <a:cs typeface="Consolas"/>
               </a:rPr>
-              <a:t>q_mem.stop</a:t>
-            </a:r>
-            <a:r>
-              <a:rPr sz="1275" b="0" dirty="0">
+              <a:t>    SELECT label, COUNT(*) AS </a:t>
+            </a:r>
+            <a:r>
+              <a:rPr sz="1275" b="0" dirty="0" err="1">
                 <a:solidFill>
                   <a:srgbClr val="EEEEEE"/>
                 </a:solidFill>
@@ -34718,7 +34839,86 @@
                 <a:ea typeface="Consolas"/>
                 <a:cs typeface="Consolas"/>
               </a:rPr>
-              <a:t>()</a:t>
+              <a:t>nb</a:t>
+            </a:r>
+            <a:r>
+              <a:rPr sz="1275" b="0" dirty="0">
+                <a:solidFill>
+                  <a:srgbClr val="EEEEEE"/>
+                </a:solidFill>
+                <a:latin typeface="Consolas"/>
+                <a:ea typeface="Consolas"/>
+                <a:cs typeface="Consolas"/>
+              </a:rPr>
+              <a:t>, AVG(x1) AS moyenne_x1</a:t>
+            </a:r>
+          </a:p>
+          <a:p>
+            <a:pPr>
+              <a:defRPr sz="1275" b="0">
+                <a:solidFill>
+                  <a:srgbClr val="EEEEEE"/>
+                </a:solidFill>
+                <a:latin typeface="Consolas"/>
+                <a:ea typeface="Consolas"/>
+                <a:cs typeface="Consolas"/>
+              </a:defRPr>
+            </a:pPr>
+            <a:r>
+              <a:rPr sz="1275" b="0" dirty="0">
+                <a:solidFill>
+                  <a:srgbClr val="EEEEEE"/>
+                </a:solidFill>
+                <a:latin typeface="Consolas"/>
+                <a:ea typeface="Consolas"/>
+                <a:cs typeface="Consolas"/>
+              </a:rPr>
+              <a:t>    FROM </a:t>
+            </a:r>
+            <a:r>
+              <a:rPr sz="1275" b="0" dirty="0" err="1">
+                <a:solidFill>
+                  <a:srgbClr val="EEEEEE"/>
+                </a:solidFill>
+                <a:latin typeface="Consolas"/>
+                <a:ea typeface="Consolas"/>
+                <a:cs typeface="Consolas"/>
+              </a:rPr>
+              <a:t>kafka_events</a:t>
+            </a:r>
+            <a:r>
+              <a:rPr sz="1275" b="0" dirty="0">
+                <a:solidFill>
+                  <a:srgbClr val="EEEEEE"/>
+                </a:solidFill>
+                <a:latin typeface="Consolas"/>
+                <a:ea typeface="Consolas"/>
+                <a:cs typeface="Consolas"/>
+              </a:rPr>
+              <a:t> GROUP BY label ORDER BY label</a:t>
+            </a:r>
+          </a:p>
+          <a:p>
+            <a:pPr>
+              <a:defRPr sz="1275" b="0">
+                <a:solidFill>
+                  <a:srgbClr val="EEEEEE"/>
+                </a:solidFill>
+                <a:latin typeface="Consolas"/>
+                <a:ea typeface="Consolas"/>
+                <a:cs typeface="Consolas"/>
+              </a:defRPr>
+            </a:pPr>
+            <a:r>
+              <a:rPr sz="1275" b="0" dirty="0">
+                <a:solidFill>
+                  <a:srgbClr val="EEEEEE"/>
+                </a:solidFill>
+                <a:latin typeface="Consolas"/>
+                <a:ea typeface="Consolas"/>
+                <a:cs typeface="Consolas"/>
+              </a:rPr>
+              <a:t>""").show()</a:t>
             </a:r>
           </a:p>
         </p:txBody>
@@ -34728,7 +34928,7 @@
           <p:cNvPr id="103" name="Rectangle 102">
             <a:extLst>
               <a:ext uri="{FF2B5EF4-FFF2-40B4-BE49-F238E27FC236}">
-                <a16:creationId xmlns:a16="http://schemas.microsoft.com/office/drawing/2014/main" id="{F07A81C5-6FE8-4A0F-A6D4-8A29A568FB9F}"/>
+                <a16:creationId xmlns:a16="http://schemas.microsoft.com/office/drawing/2014/main" id="{927570CF-09C6-4F2D-87A6-9942C4108D8F}"/>
               </a:ext>
             </a:extLst>
           </p:cNvPr>
@@ -34775,7 +34975,7 @@
                 <a:ea typeface="Calibri"/>
                 <a:cs typeface="Calibri"/>
               </a:rPr>
-              <a:t>500 messages valides donnent 500 lignes si le topic était vide au départ.</a:t>
+              <a:t>Ces requêtes portent sur la table mémoire. events.show() est interdit sur le flux direct.</a:t>
             </a:r>
           </a:p>
         </p:txBody>
@@ -35052,7 +35252,7 @@
           <p:cNvPr id="100" name="Rectangle 99">
             <a:extLst>
               <a:ext uri="{FF2B5EF4-FFF2-40B4-BE49-F238E27FC236}">
-                <a16:creationId xmlns:a16="http://schemas.microsoft.com/office/drawing/2014/main" id="{1937F054-7519-498C-9650-C0D5B4D6C152}"/>
+                <a16:creationId xmlns:a16="http://schemas.microsoft.com/office/drawing/2014/main" id="{4C896D5F-E699-481C-A917-5637E1EE1B7A}"/>
               </a:ext>
             </a:extLst>
           </p:cNvPr>
@@ -35099,7 +35299,7 @@
                 <a:ea typeface="Calibri"/>
                 <a:cs typeface="Calibri"/>
               </a:rPr>
-              <a:t>11. Sauvegarde durable en Parquet</a:t>
+              <a:t>10. Test du flux et surveillance</a:t>
             </a:r>
           </a:p>
         </p:txBody>
@@ -35109,7 +35309,7 @@
           <p:cNvPr id="101" name="Rectangle 100">
             <a:extLst>
               <a:ext uri="{FF2B5EF4-FFF2-40B4-BE49-F238E27FC236}">
-                <a16:creationId xmlns:a16="http://schemas.microsoft.com/office/drawing/2014/main" id="{E89691E2-7B49-480D-9AED-CCD228F2FC38}"/>
+                <a16:creationId xmlns:a16="http://schemas.microsoft.com/office/drawing/2014/main" id="{E0696A8A-9976-46FE-BA47-ADE38CBD24A1}"/>
               </a:ext>
             </a:extLst>
           </p:cNvPr>
@@ -35156,7 +35356,7 @@
                 <a:ea typeface="Calibri"/>
                 <a:cs typeface="Calibri"/>
               </a:rPr>
-              <a:t>Cette deuxième requête relit le topic au premier lancement.</a:t>
+              <a:t>Dans un second notebook/kernel, relancer la boucle de Producer.ipynb.</a:t>
             </a:r>
           </a:p>
           <a:p>
@@ -35179,7 +35379,7 @@
                 <a:ea typeface="Calibri"/>
                 <a:cs typeface="Calibri"/>
               </a:rPr>
-              <a:t>Le volume ./notebooks conserve les données et le checkpoint côté hôte.</a:t>
+              <a:t>Le nombre de lignes doit augmenter sans recréer la requête Spark.</a:t>
             </a:r>
           </a:p>
         </p:txBody>
@@ -35189,7 +35389,7 @@
           <p:cNvPr id="102" name="Rectangle 101">
             <a:extLst>
               <a:ext uri="{FF2B5EF4-FFF2-40B4-BE49-F238E27FC236}">
-                <a16:creationId xmlns:a16="http://schemas.microsoft.com/office/drawing/2014/main" id="{6E406E10-4D20-4E24-93C9-0552056EC8C9}"/>
+                <a16:creationId xmlns:a16="http://schemas.microsoft.com/office/drawing/2014/main" id="{81607EDC-7F72-4482-832B-6AF84523FFBC}"/>
               </a:ext>
             </a:extLst>
           </p:cNvPr>
@@ -35238,7 +35438,7 @@
                 <a:ea typeface="Consolas"/>
                 <a:cs typeface="Consolas"/>
               </a:rPr>
-              <a:t>BASE = "/home/</a:t>
+              <a:t>print("Active :", </a:t>
             </a:r>
             <a:r>
               <a:rPr sz="1275" b="0" dirty="0" err="1">
@@ -35249,7 +35449,7 @@
                 <a:ea typeface="Consolas"/>
                 <a:cs typeface="Consolas"/>
               </a:rPr>
-              <a:t>jovyan</a:t>
+              <a:t>q_mem.isActive</a:t>
             </a:r>
             <a:r>
               <a:rPr sz="1275" b="0" dirty="0">
@@ -35260,29 +35460,7 @@
                 <a:ea typeface="Consolas"/>
                 <a:cs typeface="Consolas"/>
               </a:rPr>
-              <a:t>/work/</a:t>
-            </a:r>
-            <a:r>
-              <a:rPr sz="1275" b="0" dirty="0" err="1">
-                <a:solidFill>
-                  <a:srgbClr val="EEEEEE"/>
-                </a:solidFill>
-                <a:latin typeface="Consolas"/>
-                <a:ea typeface="Consolas"/>
-                <a:cs typeface="Consolas"/>
-              </a:rPr>
-              <a:t>spark_stream</a:t>
-            </a:r>
-            <a:r>
-              <a:rPr sz="1275" b="0" dirty="0">
-                <a:solidFill>
-                  <a:srgbClr val="EEEEEE"/>
-                </a:solidFill>
-                <a:latin typeface="Consolas"/>
-                <a:ea typeface="Consolas"/>
-                <a:cs typeface="Consolas"/>
-              </a:rPr>
-              <a:t>"</a:t>
+              <a:t>)</a:t>
             </a:r>
           </a:p>
           <a:p>
@@ -35305,7 +35483,29 @@
                 <a:ea typeface="Consolas"/>
                 <a:cs typeface="Consolas"/>
               </a:rPr>
-              <a:t>DATA = BASE + "/parquet"</a:t>
+              <a:t>print(</a:t>
+            </a:r>
+            <a:r>
+              <a:rPr sz="1275" b="0" dirty="0" err="1">
+                <a:solidFill>
+                  <a:srgbClr val="EEEEEE"/>
+                </a:solidFill>
+                <a:latin typeface="Consolas"/>
+                <a:ea typeface="Consolas"/>
+                <a:cs typeface="Consolas"/>
+              </a:rPr>
+              <a:t>q_mem.status</a:t>
+            </a:r>
+            <a:r>
+              <a:rPr sz="1275" b="0" dirty="0">
+                <a:solidFill>
+                  <a:srgbClr val="EEEEEE"/>
+                </a:solidFill>
+                <a:latin typeface="Consolas"/>
+                <a:ea typeface="Consolas"/>
+                <a:cs typeface="Consolas"/>
+              </a:rPr>
+              <a:t>)</a:t>
             </a:r>
           </a:p>
           <a:p>
@@ -35328,10 +35528,41 @@
                 <a:ea typeface="Consolas"/>
                 <a:cs typeface="Consolas"/>
               </a:rPr>
-              <a:t>CHECKPOINT = BASE + "/checkpoints/parquet"</a:t>
-            </a:r>
-          </a:p>
-          <a:p>
+              <a:t>print(</a:t>
+            </a:r>
+            <a:r>
+              <a:rPr sz="1275" b="0" dirty="0" err="1">
+                <a:solidFill>
+                  <a:srgbClr val="EEEEEE"/>
+                </a:solidFill>
+                <a:latin typeface="Consolas"/>
+                <a:ea typeface="Consolas"/>
+                <a:cs typeface="Consolas"/>
+              </a:rPr>
+              <a:t>q_mem.lastProgress</a:t>
+            </a:r>
+            <a:r>
+              <a:rPr sz="1275" b="0" dirty="0">
+                <a:solidFill>
+                  <a:srgbClr val="EEEEEE"/>
+                </a:solidFill>
+                <a:latin typeface="Consolas"/>
+                <a:ea typeface="Consolas"/>
+                <a:cs typeface="Consolas"/>
+              </a:rPr>
+              <a:t>)  # None avant le premier </a:t>
+            </a:r>
+            <a:r>
+              <a:rPr sz="1275" b="0" dirty="0" err="1">
+                <a:solidFill>
+                  <a:srgbClr val="EEEEEE"/>
+                </a:solidFill>
+                <a:latin typeface="Consolas"/>
+                <a:ea typeface="Consolas"/>
+                <a:cs typeface="Consolas"/>
+              </a:rPr>
+              <a:t>progrès</a:t>
+            </a:r>
             <a:endParaRPr sz="1275" b="0" dirty="0">
               <a:solidFill>
                 <a:srgbClr val="EEEEEE"/>
@@ -35353,7 +35584,7 @@
               </a:defRPr>
             </a:pPr>
             <a:r>
-              <a:rPr sz="1275" b="0" dirty="0" err="1">
+              <a:rPr sz="1275" b="0" dirty="0">
                 <a:solidFill>
                   <a:srgbClr val="EEEEEE"/>
                 </a:solidFill>
@@ -35361,10 +35592,10 @@
                 <a:ea typeface="Consolas"/>
                 <a:cs typeface="Consolas"/>
               </a:rPr>
-              <a:t>q_file</a:t>
-            </a:r>
-            <a:r>
-              <a:rPr sz="1275" b="0" dirty="0">
+              <a:t>print(</a:t>
+            </a:r>
+            <a:r>
+              <a:rPr sz="1275" b="0" dirty="0" err="1">
                 <a:solidFill>
                   <a:srgbClr val="EEEEEE"/>
                 </a:solidFill>
@@ -35372,10 +35603,10 @@
                 <a:ea typeface="Consolas"/>
                 <a:cs typeface="Consolas"/>
               </a:rPr>
-              <a:t> = (</a:t>
-            </a:r>
-            <a:r>
-              <a:rPr sz="1275" b="0" dirty="0" err="1">
+              <a:t>q_mem.exception</a:t>
+            </a:r>
+            <a:r>
+              <a:rPr sz="1275" b="0" dirty="0">
                 <a:solidFill>
                   <a:srgbClr val="EEEEEE"/>
                 </a:solidFill>
@@ -35383,8 +35614,10 @@
                 <a:ea typeface="Consolas"/>
                 <a:cs typeface="Consolas"/>
               </a:rPr>
-              <a:t>events.writeStream</a:t>
-            </a:r>
+              <a:t>())</a:t>
+            </a:r>
+          </a:p>
+          <a:p>
             <a:endParaRPr sz="1275" b="0" dirty="0">
               <a:solidFill>
                 <a:srgbClr val="EEEEEE"/>
@@ -35414,7 +35647,51 @@
                 <a:ea typeface="Consolas"/>
                 <a:cs typeface="Consolas"/>
               </a:rPr>
-              <a:t>    .format("parquet")</a:t>
+              <a:t># Une </a:t>
+            </a:r>
+            <a:r>
+              <a:rPr sz="1275" b="0" dirty="0" err="1">
+                <a:solidFill>
+                  <a:srgbClr val="EEEEEE"/>
+                </a:solidFill>
+                <a:latin typeface="Consolas"/>
+                <a:ea typeface="Consolas"/>
+                <a:cs typeface="Consolas"/>
+              </a:rPr>
+              <a:t>fois</a:t>
+            </a:r>
+            <a:r>
+              <a:rPr sz="1275" b="0" dirty="0">
+                <a:solidFill>
+                  <a:srgbClr val="EEEEEE"/>
+                </a:solidFill>
+                <a:latin typeface="Consolas"/>
+                <a:ea typeface="Consolas"/>
+                <a:cs typeface="Consolas"/>
+              </a:rPr>
+              <a:t> le test </a:t>
+            </a:r>
+            <a:r>
+              <a:rPr sz="1275" b="0" dirty="0" err="1">
+                <a:solidFill>
+                  <a:srgbClr val="EEEEEE"/>
+                </a:solidFill>
+                <a:latin typeface="Consolas"/>
+                <a:ea typeface="Consolas"/>
+                <a:cs typeface="Consolas"/>
+              </a:rPr>
+              <a:t>terminé</a:t>
+            </a:r>
+            <a:r>
+              <a:rPr sz="1275" b="0" dirty="0">
+                <a:solidFill>
+                  <a:srgbClr val="EEEEEE"/>
+                </a:solidFill>
+                <a:latin typeface="Consolas"/>
+                <a:ea typeface="Consolas"/>
+                <a:cs typeface="Consolas"/>
+              </a:rPr>
+              <a:t> :</a:t>
             </a:r>
           </a:p>
           <a:p>
@@ -35429,7 +35706,7 @@
               </a:defRPr>
             </a:pPr>
             <a:r>
-              <a:rPr sz="1275" b="0" dirty="0">
+              <a:rPr sz="1275" b="0" dirty="0" err="1">
                 <a:solidFill>
                   <a:srgbClr val="EEEEEE"/>
                 </a:solidFill>
@@ -35437,10 +35714,10 @@
                 <a:ea typeface="Consolas"/>
                 <a:cs typeface="Consolas"/>
               </a:rPr>
-              <a:t>    .</a:t>
-            </a:r>
-            <a:r>
-              <a:rPr sz="1275" b="0" dirty="0" err="1">
+              <a:t>q_mem.stop</a:t>
+            </a:r>
+            <a:r>
+              <a:rPr sz="1275" b="0" dirty="0">
                 <a:solidFill>
                   <a:srgbClr val="EEEEEE"/>
                 </a:solidFill>
@@ -35448,154 +35725,7 @@
                 <a:ea typeface="Consolas"/>
                 <a:cs typeface="Consolas"/>
               </a:rPr>
-              <a:t>outputMode</a:t>
-            </a:r>
-            <a:r>
-              <a:rPr sz="1275" b="0" dirty="0">
-                <a:solidFill>
-                  <a:srgbClr val="EEEEEE"/>
-                </a:solidFill>
-                <a:latin typeface="Consolas"/>
-                <a:ea typeface="Consolas"/>
-                <a:cs typeface="Consolas"/>
-              </a:rPr>
-              <a:t>("append")</a:t>
-            </a:r>
-          </a:p>
-          <a:p>
-            <a:pPr>
-              <a:defRPr sz="1275" b="0">
-                <a:solidFill>
-                  <a:srgbClr val="EEEEEE"/>
-                </a:solidFill>
-                <a:latin typeface="Consolas"/>
-                <a:ea typeface="Consolas"/>
-                <a:cs typeface="Consolas"/>
-              </a:defRPr>
-            </a:pPr>
-            <a:r>
-              <a:rPr sz="1275" b="0" dirty="0">
-                <a:solidFill>
-                  <a:srgbClr val="EEEEEE"/>
-                </a:solidFill>
-                <a:latin typeface="Consolas"/>
-                <a:ea typeface="Consolas"/>
-                <a:cs typeface="Consolas"/>
-              </a:rPr>
-              <a:t>    .option("path", DATA)</a:t>
-            </a:r>
-          </a:p>
-          <a:p>
-            <a:pPr>
-              <a:defRPr sz="1275" b="0">
-                <a:solidFill>
-                  <a:srgbClr val="EEEEEE"/>
-                </a:solidFill>
-                <a:latin typeface="Consolas"/>
-                <a:ea typeface="Consolas"/>
-                <a:cs typeface="Consolas"/>
-              </a:defRPr>
-            </a:pPr>
-            <a:r>
-              <a:rPr sz="1275" b="0" dirty="0">
-                <a:solidFill>
-                  <a:srgbClr val="EEEEEE"/>
-                </a:solidFill>
-                <a:latin typeface="Consolas"/>
-                <a:ea typeface="Consolas"/>
-                <a:cs typeface="Consolas"/>
-              </a:rPr>
-              <a:t>    .option("</a:t>
-            </a:r>
-            <a:r>
-              <a:rPr sz="1275" b="0" dirty="0" err="1">
-                <a:solidFill>
-                  <a:srgbClr val="EEEEEE"/>
-                </a:solidFill>
-                <a:latin typeface="Consolas"/>
-                <a:ea typeface="Consolas"/>
-                <a:cs typeface="Consolas"/>
-              </a:rPr>
-              <a:t>checkpointLocation</a:t>
-            </a:r>
-            <a:r>
-              <a:rPr sz="1275" b="0" dirty="0">
-                <a:solidFill>
-                  <a:srgbClr val="EEEEEE"/>
-                </a:solidFill>
-                <a:latin typeface="Consolas"/>
-                <a:ea typeface="Consolas"/>
-                <a:cs typeface="Consolas"/>
-              </a:rPr>
-              <a:t>", CHECKPOINT)</a:t>
-            </a:r>
-          </a:p>
-          <a:p>
-            <a:pPr>
-              <a:defRPr sz="1275" b="0">
-                <a:solidFill>
-                  <a:srgbClr val="EEEEEE"/>
-                </a:solidFill>
-                <a:latin typeface="Consolas"/>
-                <a:ea typeface="Consolas"/>
-                <a:cs typeface="Consolas"/>
-              </a:defRPr>
-            </a:pPr>
-            <a:r>
-              <a:rPr sz="1275" b="0" dirty="0">
-                <a:solidFill>
-                  <a:srgbClr val="EEEEEE"/>
-                </a:solidFill>
-                <a:latin typeface="Consolas"/>
-                <a:ea typeface="Consolas"/>
-                <a:cs typeface="Consolas"/>
-              </a:rPr>
-              <a:t>    .trigger(</a:t>
-            </a:r>
-            <a:r>
-              <a:rPr sz="1275" b="0" dirty="0" err="1">
-                <a:solidFill>
-                  <a:srgbClr val="EEEEEE"/>
-                </a:solidFill>
-                <a:latin typeface="Consolas"/>
-                <a:ea typeface="Consolas"/>
-                <a:cs typeface="Consolas"/>
-              </a:rPr>
-              <a:t>processingTime</a:t>
-            </a:r>
-            <a:r>
-              <a:rPr sz="1275" b="0" dirty="0">
-                <a:solidFill>
-                  <a:srgbClr val="EEEEEE"/>
-                </a:solidFill>
-                <a:latin typeface="Consolas"/>
-                <a:ea typeface="Consolas"/>
-                <a:cs typeface="Consolas"/>
-              </a:rPr>
-              <a:t>="5 seconds")</a:t>
-            </a:r>
-          </a:p>
-          <a:p>
-            <a:pPr>
-              <a:defRPr sz="1275" b="0">
-                <a:solidFill>
-                  <a:srgbClr val="EEEEEE"/>
-                </a:solidFill>
-                <a:latin typeface="Consolas"/>
-                <a:ea typeface="Consolas"/>
-                <a:cs typeface="Consolas"/>
-              </a:defRPr>
-            </a:pPr>
-            <a:r>
-              <a:rPr sz="1275" b="0" dirty="0">
-                <a:solidFill>
-                  <a:srgbClr val="EEEEEE"/>
-                </a:solidFill>
-                <a:latin typeface="Consolas"/>
-                <a:ea typeface="Consolas"/>
-                <a:cs typeface="Consolas"/>
-              </a:rPr>
-              <a:t>    .start())</a:t>
+              <a:t>()</a:t>
             </a:r>
           </a:p>
         </p:txBody>
@@ -35605,7 +35735,7 @@
           <p:cNvPr id="103" name="Rectangle 102">
             <a:extLst>
               <a:ext uri="{FF2B5EF4-FFF2-40B4-BE49-F238E27FC236}">
-                <a16:creationId xmlns:a16="http://schemas.microsoft.com/office/drawing/2014/main" id="{E3606898-B041-49A7-9DCD-50D73971C958}"/>
+                <a16:creationId xmlns:a16="http://schemas.microsoft.com/office/drawing/2014/main" id="{F07A81C5-6FE8-4A0F-A6D4-8A29A568FB9F}"/>
               </a:ext>
             </a:extLst>
           </p:cNvPr>
@@ -35652,7 +35782,7 @@
                 <a:ea typeface="Calibri"/>
                 <a:cs typeface="Calibri"/>
               </a:rPr>
-              <a:t>Une requête = un checkpoint propre. Ne pas partager ce dossier avec le sink memory.</a:t>
+              <a:t>500 messages valides donnent 500 lignes si le topic était vide au départ.</a:t>
             </a:r>
           </a:p>
         </p:txBody>
@@ -36236,7 +36366,7 @@
           <p:cNvPr id="100" name="Rectangle 99">
             <a:extLst>
               <a:ext uri="{FF2B5EF4-FFF2-40B4-BE49-F238E27FC236}">
-                <a16:creationId xmlns:a16="http://schemas.microsoft.com/office/drawing/2014/main" id="{86CAE71B-36DC-43A6-9B2C-9F0E6D48D554}"/>
+                <a16:creationId xmlns:a16="http://schemas.microsoft.com/office/drawing/2014/main" id="{1937F054-7519-498C-9650-C0D5B4D6C152}"/>
               </a:ext>
             </a:extLst>
           </p:cNvPr>
@@ -36283,7 +36413,7 @@
                 <a:ea typeface="Calibri"/>
                 <a:cs typeface="Calibri"/>
               </a:rPr>
-              <a:t>12. Arrêt et reprise de la lecture</a:t>
+              <a:t>11. Sauvegarde durable en Parquet</a:t>
             </a:r>
           </a:p>
         </p:txBody>
@@ -36293,7 +36423,7 @@
           <p:cNvPr id="101" name="Rectangle 100">
             <a:extLst>
               <a:ext uri="{FF2B5EF4-FFF2-40B4-BE49-F238E27FC236}">
-                <a16:creationId xmlns:a16="http://schemas.microsoft.com/office/drawing/2014/main" id="{15E7B30A-C94D-48F1-9D7A-DE1EE49BC91D}"/>
+                <a16:creationId xmlns:a16="http://schemas.microsoft.com/office/drawing/2014/main" id="{E89691E2-7B49-480D-9AED-CCD228F2FC38}"/>
               </a:ext>
             </a:extLst>
           </p:cNvPr>
@@ -36340,7 +36470,30 @@
                 <a:ea typeface="Calibri"/>
                 <a:cs typeface="Calibri"/>
               </a:rPr>
-              <a:t>Après l’écriture du premier lot, arrêter puis consulter les fichiers.</a:t>
+              <a:t>Cette deuxième requête relit le topic au premier lancement.</a:t>
+            </a:r>
+          </a:p>
+          <a:p>
+            <a:pPr>
+              <a:defRPr sz="1350" b="0">
+                <a:solidFill>
+                  <a:srgbClr val="222222"/>
+                </a:solidFill>
+                <a:latin typeface="Calibri"/>
+                <a:ea typeface="Calibri"/>
+                <a:cs typeface="Calibri"/>
+              </a:defRPr>
+            </a:pPr>
+            <a:r>
+              <a:rPr sz="1350" b="0">
+                <a:solidFill>
+                  <a:srgbClr val="222222"/>
+                </a:solidFill>
+                <a:latin typeface="Calibri"/>
+                <a:ea typeface="Calibri"/>
+                <a:cs typeface="Calibri"/>
+              </a:rPr>
+              <a:t>Le volume ./notebooks conserve les données et le checkpoint côté hôte.</a:t>
             </a:r>
           </a:p>
         </p:txBody>
@@ -36350,7 +36503,7 @@
           <p:cNvPr id="102" name="Rectangle 101">
             <a:extLst>
               <a:ext uri="{FF2B5EF4-FFF2-40B4-BE49-F238E27FC236}">
-                <a16:creationId xmlns:a16="http://schemas.microsoft.com/office/drawing/2014/main" id="{DA7EF5D1-3931-4429-8A94-952163B7BB5F}"/>
+                <a16:creationId xmlns:a16="http://schemas.microsoft.com/office/drawing/2014/main" id="{6E406E10-4D20-4E24-93C9-0552056EC8C9}"/>
               </a:ext>
             </a:extLst>
           </p:cNvPr>
@@ -36399,7 +36552,7 @@
                 <a:ea typeface="Consolas"/>
                 <a:cs typeface="Consolas"/>
               </a:rPr>
-              <a:t>print(</a:t>
+              <a:t>BASE = "/home/</a:t>
             </a:r>
             <a:r>
               <a:rPr sz="1275" b="0" dirty="0" err="1">
@@ -36410,7 +36563,7 @@
                 <a:ea typeface="Consolas"/>
                 <a:cs typeface="Consolas"/>
               </a:rPr>
-              <a:t>q_file.lastProgress</a:t>
+              <a:t>jovyan</a:t>
             </a:r>
             <a:r>
               <a:rPr sz="1275" b="0" dirty="0">
@@ -36421,7 +36574,29 @@
                 <a:ea typeface="Consolas"/>
                 <a:cs typeface="Consolas"/>
               </a:rPr>
-              <a:t>)</a:t>
+              <a:t>/work/</a:t>
+            </a:r>
+            <a:r>
+              <a:rPr sz="1275" b="0" dirty="0" err="1">
+                <a:solidFill>
+                  <a:srgbClr val="EEEEEE"/>
+                </a:solidFill>
+                <a:latin typeface="Consolas"/>
+                <a:ea typeface="Consolas"/>
+                <a:cs typeface="Consolas"/>
+              </a:rPr>
+              <a:t>spark_stream</a:t>
+            </a:r>
+            <a:r>
+              <a:rPr sz="1275" b="0" dirty="0">
+                <a:solidFill>
+                  <a:srgbClr val="EEEEEE"/>
+                </a:solidFill>
+                <a:latin typeface="Consolas"/>
+                <a:ea typeface="Consolas"/>
+                <a:cs typeface="Consolas"/>
+              </a:rPr>
+              <a:t>"</a:t>
             </a:r>
           </a:p>
           <a:p>
@@ -36436,7 +36611,7 @@
               </a:defRPr>
             </a:pPr>
             <a:r>
-              <a:rPr sz="1275" b="0" dirty="0" err="1">
+              <a:rPr sz="1275" b="0" dirty="0">
                 <a:solidFill>
                   <a:srgbClr val="EEEEEE"/>
                 </a:solidFill>
@@ -36444,18 +36619,7 @@
                 <a:ea typeface="Consolas"/>
                 <a:cs typeface="Consolas"/>
               </a:rPr>
-              <a:t>q_file.stop</a:t>
-            </a:r>
-            <a:r>
-              <a:rPr sz="1275" b="0" dirty="0">
-                <a:solidFill>
-                  <a:srgbClr val="EEEEEE"/>
-                </a:solidFill>
-                <a:latin typeface="Consolas"/>
-                <a:ea typeface="Consolas"/>
-                <a:cs typeface="Consolas"/>
-              </a:rPr>
-              <a:t>()</a:t>
+              <a:t>DATA = BASE + "/parquet"</a:t>
             </a:r>
           </a:p>
           <a:p>
@@ -36470,7 +36634,7 @@
               </a:defRPr>
             </a:pPr>
             <a:r>
-              <a:rPr sz="1275" b="0" dirty="0" err="1">
+              <a:rPr sz="1275" b="0" dirty="0">
                 <a:solidFill>
                   <a:srgbClr val="EEEEEE"/>
                 </a:solidFill>
@@ -36478,18 +36642,7 @@
                 <a:ea typeface="Consolas"/>
                 <a:cs typeface="Consolas"/>
               </a:rPr>
-              <a:t>spark.read.parquet</a:t>
-            </a:r>
-            <a:r>
-              <a:rPr sz="1275" b="0" dirty="0">
-                <a:solidFill>
-                  <a:srgbClr val="EEEEEE"/>
-                </a:solidFill>
-                <a:latin typeface="Consolas"/>
-                <a:ea typeface="Consolas"/>
-                <a:cs typeface="Consolas"/>
-              </a:rPr>
-              <a:t>(DATA).show(20, truncate=False)</a:t>
+              <a:t>CHECKPOINT = BASE + "/checkpoints/parquet"</a:t>
             </a:r>
           </a:p>
           <a:p>
@@ -36514,7 +36667,7 @@
               </a:defRPr>
             </a:pPr>
             <a:r>
-              <a:rPr sz="1275" b="0" dirty="0">
+              <a:rPr sz="1275" b="0" dirty="0" err="1">
                 <a:solidFill>
                   <a:srgbClr val="EEEEEE"/>
                 </a:solidFill>
@@ -36522,10 +36675,10 @@
                 <a:ea typeface="Consolas"/>
                 <a:cs typeface="Consolas"/>
               </a:rPr>
-              <a:t># À la fin de la séance </a:t>
-            </a:r>
-            <a:r>
-              <a:rPr sz="1275" b="0" dirty="0" err="1">
+              <a:t>q_file</a:t>
+            </a:r>
+            <a:r>
+              <a:rPr sz="1275" b="0" dirty="0">
                 <a:solidFill>
                   <a:srgbClr val="EEEEEE"/>
                 </a:solidFill>
@@ -36533,10 +36686,10 @@
                 <a:ea typeface="Consolas"/>
                 <a:cs typeface="Consolas"/>
               </a:rPr>
-              <a:t>seulement</a:t>
-            </a:r>
-            <a:r>
-              <a:rPr sz="1275" b="0" dirty="0">
+              <a:t> = (</a:t>
+            </a:r>
+            <a:r>
+              <a:rPr sz="1275" b="0" dirty="0" err="1">
                 <a:solidFill>
                   <a:srgbClr val="EEEEEE"/>
                 </a:solidFill>
@@ -36544,8 +36697,16 @@
                 <a:ea typeface="Consolas"/>
                 <a:cs typeface="Consolas"/>
               </a:rPr>
-              <a:t> :</a:t>
-            </a:r>
+              <a:t>events.writeStream</a:t>
+            </a:r>
+            <a:endParaRPr sz="1275" b="0" dirty="0">
+              <a:solidFill>
+                <a:srgbClr val="EEEEEE"/>
+              </a:solidFill>
+              <a:latin typeface="Consolas"/>
+              <a:ea typeface="Consolas"/>
+              <a:cs typeface="Consolas"/>
+            </a:endParaRPr>
           </a:p>
           <a:p>
             <a:pPr>
@@ -36559,7 +36720,7 @@
               </a:defRPr>
             </a:pPr>
             <a:r>
-              <a:rPr sz="1275" b="0" dirty="0" err="1">
+              <a:rPr sz="1275" b="0" dirty="0">
                 <a:solidFill>
                   <a:srgbClr val="EEEEEE"/>
                 </a:solidFill>
@@ -36567,18 +36728,188 @@
                 <a:ea typeface="Consolas"/>
                 <a:cs typeface="Consolas"/>
               </a:rPr>
-              <a:t>spark.stop</a:t>
-            </a:r>
-            <a:r>
-              <a:rPr sz="1275" b="0" dirty="0">
+              <a:t>    .format("parquet")</a:t>
+            </a:r>
+          </a:p>
+          <a:p>
+            <a:pPr>
+              <a:defRPr sz="1275" b="0">
                 <a:solidFill>
                   <a:srgbClr val="EEEEEE"/>
                 </a:solidFill>
                 <a:latin typeface="Consolas"/>
                 <a:ea typeface="Consolas"/>
                 <a:cs typeface="Consolas"/>
-              </a:rPr>
-              <a:t>()</a:t>
+              </a:defRPr>
+            </a:pPr>
+            <a:r>
+              <a:rPr sz="1275" b="0" dirty="0">
+                <a:solidFill>
+                  <a:srgbClr val="EEEEEE"/>
+                </a:solidFill>
+                <a:latin typeface="Consolas"/>
+                <a:ea typeface="Consolas"/>
+                <a:cs typeface="Consolas"/>
+              </a:rPr>
+              <a:t>    .</a:t>
+            </a:r>
+            <a:r>
+              <a:rPr sz="1275" b="0" dirty="0" err="1">
+                <a:solidFill>
+                  <a:srgbClr val="EEEEEE"/>
+                </a:solidFill>
+                <a:latin typeface="Consolas"/>
+                <a:ea typeface="Consolas"/>
+                <a:cs typeface="Consolas"/>
+              </a:rPr>
+              <a:t>outputMode</a:t>
+            </a:r>
+            <a:r>
+              <a:rPr sz="1275" b="0" dirty="0">
+                <a:solidFill>
+                  <a:srgbClr val="EEEEEE"/>
+                </a:solidFill>
+                <a:latin typeface="Consolas"/>
+                <a:ea typeface="Consolas"/>
+                <a:cs typeface="Consolas"/>
+              </a:rPr>
+              <a:t>("append")</a:t>
+            </a:r>
+          </a:p>
+          <a:p>
+            <a:pPr>
+              <a:defRPr sz="1275" b="0">
+                <a:solidFill>
+                  <a:srgbClr val="EEEEEE"/>
+                </a:solidFill>
+                <a:latin typeface="Consolas"/>
+                <a:ea typeface="Consolas"/>
+                <a:cs typeface="Consolas"/>
+              </a:defRPr>
+            </a:pPr>
+            <a:r>
+              <a:rPr sz="1275" b="0" dirty="0">
+                <a:solidFill>
+                  <a:srgbClr val="EEEEEE"/>
+                </a:solidFill>
+                <a:latin typeface="Consolas"/>
+                <a:ea typeface="Consolas"/>
+                <a:cs typeface="Consolas"/>
+              </a:rPr>
+              <a:t>    .option("path", DATA)</a:t>
+            </a:r>
+          </a:p>
+          <a:p>
+            <a:pPr>
+              <a:defRPr sz="1275" b="0">
+                <a:solidFill>
+                  <a:srgbClr val="EEEEEE"/>
+                </a:solidFill>
+                <a:latin typeface="Consolas"/>
+                <a:ea typeface="Consolas"/>
+                <a:cs typeface="Consolas"/>
+              </a:defRPr>
+            </a:pPr>
+            <a:r>
+              <a:rPr sz="1275" b="0" dirty="0">
+                <a:solidFill>
+                  <a:srgbClr val="EEEEEE"/>
+                </a:solidFill>
+                <a:latin typeface="Consolas"/>
+                <a:ea typeface="Consolas"/>
+                <a:cs typeface="Consolas"/>
+              </a:rPr>
+              <a:t>    .option("</a:t>
+            </a:r>
+            <a:r>
+              <a:rPr sz="1275" b="0" dirty="0" err="1">
+                <a:solidFill>
+                  <a:srgbClr val="EEEEEE"/>
+                </a:solidFill>
+                <a:latin typeface="Consolas"/>
+                <a:ea typeface="Consolas"/>
+                <a:cs typeface="Consolas"/>
+              </a:rPr>
+              <a:t>checkpointLocation</a:t>
+            </a:r>
+            <a:r>
+              <a:rPr sz="1275" b="0" dirty="0">
+                <a:solidFill>
+                  <a:srgbClr val="EEEEEE"/>
+                </a:solidFill>
+                <a:latin typeface="Consolas"/>
+                <a:ea typeface="Consolas"/>
+                <a:cs typeface="Consolas"/>
+              </a:rPr>
+              <a:t>", CHECKPOINT)</a:t>
+            </a:r>
+          </a:p>
+          <a:p>
+            <a:pPr>
+              <a:defRPr sz="1275" b="0">
+                <a:solidFill>
+                  <a:srgbClr val="EEEEEE"/>
+                </a:solidFill>
+                <a:latin typeface="Consolas"/>
+                <a:ea typeface="Consolas"/>
+                <a:cs typeface="Consolas"/>
+              </a:defRPr>
+            </a:pPr>
+            <a:r>
+              <a:rPr sz="1275" b="0" dirty="0">
+                <a:solidFill>
+                  <a:srgbClr val="EEEEEE"/>
+                </a:solidFill>
+                <a:latin typeface="Consolas"/>
+                <a:ea typeface="Consolas"/>
+                <a:cs typeface="Consolas"/>
+              </a:rPr>
+              <a:t>    .trigger(</a:t>
+            </a:r>
+            <a:r>
+              <a:rPr sz="1275" b="0" dirty="0" err="1">
+                <a:solidFill>
+                  <a:srgbClr val="EEEEEE"/>
+                </a:solidFill>
+                <a:latin typeface="Consolas"/>
+                <a:ea typeface="Consolas"/>
+                <a:cs typeface="Consolas"/>
+              </a:rPr>
+              <a:t>processingTime</a:t>
+            </a:r>
+            <a:r>
+              <a:rPr sz="1275" b="0" dirty="0">
+                <a:solidFill>
+                  <a:srgbClr val="EEEEEE"/>
+                </a:solidFill>
+                <a:latin typeface="Consolas"/>
+                <a:ea typeface="Consolas"/>
+                <a:cs typeface="Consolas"/>
+              </a:rPr>
+              <a:t>="5 seconds")</a:t>
+            </a:r>
+          </a:p>
+          <a:p>
+            <a:pPr>
+              <a:defRPr sz="1275" b="0">
+                <a:solidFill>
+                  <a:srgbClr val="EEEEEE"/>
+                </a:solidFill>
+                <a:latin typeface="Consolas"/>
+                <a:ea typeface="Consolas"/>
+                <a:cs typeface="Consolas"/>
+              </a:defRPr>
+            </a:pPr>
+            <a:r>
+              <a:rPr sz="1275" b="0" dirty="0">
+                <a:solidFill>
+                  <a:srgbClr val="EEEEEE"/>
+                </a:solidFill>
+                <a:latin typeface="Consolas"/>
+                <a:ea typeface="Consolas"/>
+                <a:cs typeface="Consolas"/>
+              </a:rPr>
+              <a:t>    .start())</a:t>
             </a:r>
           </a:p>
         </p:txBody>
@@ -36588,7 +36919,7 @@
           <p:cNvPr id="103" name="Rectangle 102">
             <a:extLst>
               <a:ext uri="{FF2B5EF4-FFF2-40B4-BE49-F238E27FC236}">
-                <a16:creationId xmlns:a16="http://schemas.microsoft.com/office/drawing/2014/main" id="{CAE9F183-298F-44B6-86ED-15A366E17DF8}"/>
+                <a16:creationId xmlns:a16="http://schemas.microsoft.com/office/drawing/2014/main" id="{E3606898-B041-49A7-9DCD-50D73971C958}"/>
               </a:ext>
             </a:extLst>
           </p:cNvPr>
@@ -36635,30 +36966,7 @@
                 <a:ea typeface="Calibri"/>
                 <a:cs typeface="Calibri"/>
               </a:rPr>
-              <a:t>Reprise : recréer la session et les DataFrames si besoin, puis relancer l’étape 11</a:t>
-            </a:r>
-          </a:p>
-          <a:p>
-            <a:pPr>
-              <a:defRPr sz="1200" b="0">
-                <a:solidFill>
-                  <a:srgbClr val="555555"/>
-                </a:solidFill>
-                <a:latin typeface="Calibri"/>
-                <a:ea typeface="Calibri"/>
-                <a:cs typeface="Calibri"/>
-              </a:defRPr>
-            </a:pPr>
-            <a:r>
-              <a:rPr sz="1200" b="0">
-                <a:solidFill>
-                  <a:srgbClr val="555555"/>
-                </a:solidFill>
-                <a:latin typeface="Calibri"/>
-                <a:ea typeface="Calibri"/>
-                <a:cs typeface="Calibri"/>
-              </a:rPr>
-              <a:t>avec les mêmes DATA et CHECKPOINT. Ne pas supprimer leurs dossiers.</a:t>
+              <a:t>Une requête = un checkpoint propre. Ne pas partager ce dossier avec le sink memory.</a:t>
             </a:r>
           </a:p>
         </p:txBody>
@@ -36935,7 +37243,7 @@
           <p:cNvPr id="100" name="Rectangle 99">
             <a:extLst>
               <a:ext uri="{FF2B5EF4-FFF2-40B4-BE49-F238E27FC236}">
-                <a16:creationId xmlns:a16="http://schemas.microsoft.com/office/drawing/2014/main" id="{196B7EC7-7374-44BB-A792-E3887D0AD940}"/>
+                <a16:creationId xmlns:a16="http://schemas.microsoft.com/office/drawing/2014/main" id="{86CAE71B-36DC-43A6-9B2C-9F0E6D48D554}"/>
               </a:ext>
             </a:extLst>
           </p:cNvPr>
@@ -36982,7 +37290,7 @@
                 <a:ea typeface="Calibri"/>
                 <a:cs typeface="Calibri"/>
               </a:rPr>
-              <a:t>13. Vérification de la reprise</a:t>
+              <a:t>12. Arrêt et reprise de la lecture</a:t>
             </a:r>
           </a:p>
         </p:txBody>
@@ -36992,7 +37300,7 @@
           <p:cNvPr id="101" name="Rectangle 100">
             <a:extLst>
               <a:ext uri="{FF2B5EF4-FFF2-40B4-BE49-F238E27FC236}">
-                <a16:creationId xmlns:a16="http://schemas.microsoft.com/office/drawing/2014/main" id="{43C4C538-E15B-463C-AD0D-23D44F89BB00}"/>
+                <a16:creationId xmlns:a16="http://schemas.microsoft.com/office/drawing/2014/main" id="{15E7B30A-C94D-48F1-9D7A-DE1EE49BC91D}"/>
               </a:ext>
             </a:extLst>
           </p:cNvPr>
@@ -37004,7 +37312,7 @@
         <p:spPr>
           <a:xfrm>
             <a:off x="809625" y="1171575"/>
-            <a:ext cx="7620000" cy="3095625"/>
+            <a:ext cx="7620000" cy="638175"/>
           </a:xfrm>
           <a:prstGeom prst="rect">
             <a:avLst/>
@@ -37021,7 +37329,7 @@
           <a:lstStyle/>
           <a:p>
             <a:pPr>
-              <a:defRPr sz="1575" b="0">
+              <a:defRPr sz="1350" b="0">
                 <a:solidFill>
                   <a:srgbClr val="222222"/>
                 </a:solidFill>
@@ -37031,7 +37339,7 @@
               </a:defRPr>
             </a:pPr>
             <a:r>
-              <a:rPr sz="1575" b="0">
+              <a:rPr sz="1350" b="0">
                 <a:solidFill>
                   <a:srgbClr val="222222"/>
                 </a:solidFill>
@@ -37039,132 +37347,7 @@
                 <a:ea typeface="Calibri"/>
                 <a:cs typeface="Calibri"/>
               </a:rPr>
-              <a:t>1. Noter le nombre de lignes Parquet après arrêt.</a:t>
-            </a:r>
-          </a:p>
-          <a:p>
-            <a:pPr>
-              <a:defRPr sz="1575" b="0">
-                <a:solidFill>
-                  <a:srgbClr val="222222"/>
-                </a:solidFill>
-                <a:latin typeface="Calibri"/>
-                <a:ea typeface="Calibri"/>
-                <a:cs typeface="Calibri"/>
-              </a:defRPr>
-            </a:pPr>
-            <a:r>
-              <a:rPr sz="1575" b="0">
-                <a:solidFill>
-                  <a:srgbClr val="222222"/>
-                </a:solidFill>
-                <a:latin typeface="Calibri"/>
-                <a:ea typeface="Calibri"/>
-                <a:cs typeface="Calibri"/>
-              </a:rPr>
-              <a:t>2. Envoyer 100 messages supplémentaires avec Producer.ipynb.</a:t>
-            </a:r>
-          </a:p>
-          <a:p>
-            <a:pPr>
-              <a:defRPr sz="1575" b="0">
-                <a:solidFill>
-                  <a:srgbClr val="222222"/>
-                </a:solidFill>
-                <a:latin typeface="Calibri"/>
-                <a:ea typeface="Calibri"/>
-                <a:cs typeface="Calibri"/>
-              </a:defRPr>
-            </a:pPr>
-            <a:r>
-              <a:rPr sz="1575" b="0">
-                <a:solidFill>
-                  <a:srgbClr val="222222"/>
-                </a:solidFill>
-                <a:latin typeface="Calibri"/>
-                <a:ea typeface="Calibri"/>
-                <a:cs typeface="Calibri"/>
-              </a:rPr>
-              <a:t>3. Relancer la requête Parquet avec le même checkpoint.</a:t>
-            </a:r>
-          </a:p>
-          <a:p>
-            <a:pPr>
-              <a:defRPr sz="1575" b="0">
-                <a:solidFill>
-                  <a:srgbClr val="222222"/>
-                </a:solidFill>
-                <a:latin typeface="Calibri"/>
-                <a:ea typeface="Calibri"/>
-                <a:cs typeface="Calibri"/>
-              </a:defRPr>
-            </a:pPr>
-            <a:r>
-              <a:rPr sz="1575" b="0">
-                <a:solidFill>
-                  <a:srgbClr val="222222"/>
-                </a:solidFill>
-                <a:latin typeface="Calibri"/>
-                <a:ea typeface="Calibri"/>
-                <a:cs typeface="Calibri"/>
-              </a:rPr>
-              <a:t>4. Attendre un lot terminé, arrêter et recompter.</a:t>
-            </a:r>
-          </a:p>
-          <a:p>
-            <a:endParaRPr sz="1575" b="0">
-              <a:solidFill>
-                <a:srgbClr val="222222"/>
-              </a:solidFill>
-              <a:latin typeface="Calibri"/>
-              <a:ea typeface="Calibri"/>
-              <a:cs typeface="Calibri"/>
-            </a:endParaRPr>
-          </a:p>
-          <a:p>
-            <a:pPr>
-              <a:defRPr sz="1575" b="0">
-                <a:solidFill>
-                  <a:srgbClr val="222222"/>
-                </a:solidFill>
-                <a:latin typeface="Calibri"/>
-                <a:ea typeface="Calibri"/>
-                <a:cs typeface="Calibri"/>
-              </a:defRPr>
-            </a:pPr>
-            <a:r>
-              <a:rPr sz="1575" b="0">
-                <a:solidFill>
-                  <a:srgbClr val="222222"/>
-                </a:solidFill>
-                <a:latin typeface="Calibri"/>
-                <a:ea typeface="Calibri"/>
-                <a:cs typeface="Calibri"/>
-              </a:rPr>
-              <a:t>Résultat attendu : +100 lignes valides, sans rejouer l’historique.</a:t>
-            </a:r>
-          </a:p>
-          <a:p>
-            <a:pPr>
-              <a:defRPr sz="1575" b="0">
-                <a:solidFill>
-                  <a:srgbClr val="222222"/>
-                </a:solidFill>
-                <a:latin typeface="Calibri"/>
-                <a:ea typeface="Calibri"/>
-                <a:cs typeface="Calibri"/>
-              </a:defRPr>
-            </a:pPr>
-            <a:r>
-              <a:rPr sz="1575" b="0">
-                <a:solidFill>
-                  <a:srgbClr val="222222"/>
-                </a:solidFill>
-                <a:latin typeface="Calibri"/>
-                <a:ea typeface="Calibri"/>
-                <a:cs typeface="Calibri"/>
-              </a:rPr>
-              <a:t>Le checkpoint fixe la reprise, même avec startingOffsets="earliest".</a:t>
+              <a:t>Après l’écriture du premier lot, arrêter puis consulter les fichiers.</a:t>
             </a:r>
           </a:p>
         </p:txBody>
@@ -37174,7 +37357,245 @@
           <p:cNvPr id="102" name="Rectangle 101">
             <a:extLst>
               <a:ext uri="{FF2B5EF4-FFF2-40B4-BE49-F238E27FC236}">
-                <a16:creationId xmlns:a16="http://schemas.microsoft.com/office/drawing/2014/main" id="{669B64EE-428F-431D-9F40-76D08EE6261C}"/>
+                <a16:creationId xmlns:a16="http://schemas.microsoft.com/office/drawing/2014/main" id="{DA7EF5D1-3931-4429-8A94-952163B7BB5F}"/>
+              </a:ext>
+            </a:extLst>
+          </p:cNvPr>
+          <p:cNvSpPr>
+            <a:spLocks noGrp="1"/>
+          </p:cNvSpPr>
+          <p:nvPr/>
+        </p:nvSpPr>
+        <p:spPr>
+          <a:xfrm>
+            <a:off x="809625" y="1885950"/>
+            <a:ext cx="7620000" cy="2476500"/>
+          </a:xfrm>
+          <a:prstGeom prst="rect">
+            <a:avLst/>
+          </a:prstGeom>
+          <a:solidFill>
+            <a:srgbClr val="181818"/>
+          </a:solidFill>
+          <a:ln w="0">
+            <a:noFill/>
+          </a:ln>
+        </p:spPr>
+        <p:txBody>
+          <a:bodyPr>
+            <a:noAutofit/>
+          </a:bodyPr>
+          <a:lstStyle/>
+          <a:p>
+            <a:pPr>
+              <a:defRPr sz="1275" b="0">
+                <a:solidFill>
+                  <a:srgbClr val="EEEEEE"/>
+                </a:solidFill>
+                <a:latin typeface="Consolas"/>
+                <a:ea typeface="Consolas"/>
+                <a:cs typeface="Consolas"/>
+              </a:defRPr>
+            </a:pPr>
+            <a:r>
+              <a:rPr sz="1275" b="0" dirty="0">
+                <a:solidFill>
+                  <a:srgbClr val="EEEEEE"/>
+                </a:solidFill>
+                <a:latin typeface="Consolas"/>
+                <a:ea typeface="Consolas"/>
+                <a:cs typeface="Consolas"/>
+              </a:rPr>
+              <a:t>print(</a:t>
+            </a:r>
+            <a:r>
+              <a:rPr sz="1275" b="0" dirty="0" err="1">
+                <a:solidFill>
+                  <a:srgbClr val="EEEEEE"/>
+                </a:solidFill>
+                <a:latin typeface="Consolas"/>
+                <a:ea typeface="Consolas"/>
+                <a:cs typeface="Consolas"/>
+              </a:rPr>
+              <a:t>q_file.lastProgress</a:t>
+            </a:r>
+            <a:r>
+              <a:rPr sz="1275" b="0" dirty="0">
+                <a:solidFill>
+                  <a:srgbClr val="EEEEEE"/>
+                </a:solidFill>
+                <a:latin typeface="Consolas"/>
+                <a:ea typeface="Consolas"/>
+                <a:cs typeface="Consolas"/>
+              </a:rPr>
+              <a:t>)</a:t>
+            </a:r>
+          </a:p>
+          <a:p>
+            <a:pPr>
+              <a:defRPr sz="1275" b="0">
+                <a:solidFill>
+                  <a:srgbClr val="EEEEEE"/>
+                </a:solidFill>
+                <a:latin typeface="Consolas"/>
+                <a:ea typeface="Consolas"/>
+                <a:cs typeface="Consolas"/>
+              </a:defRPr>
+            </a:pPr>
+            <a:r>
+              <a:rPr sz="1275" b="0" dirty="0" err="1">
+                <a:solidFill>
+                  <a:srgbClr val="EEEEEE"/>
+                </a:solidFill>
+                <a:latin typeface="Consolas"/>
+                <a:ea typeface="Consolas"/>
+                <a:cs typeface="Consolas"/>
+              </a:rPr>
+              <a:t>q_file.stop</a:t>
+            </a:r>
+            <a:r>
+              <a:rPr sz="1275" b="0" dirty="0">
+                <a:solidFill>
+                  <a:srgbClr val="EEEEEE"/>
+                </a:solidFill>
+                <a:latin typeface="Consolas"/>
+                <a:ea typeface="Consolas"/>
+                <a:cs typeface="Consolas"/>
+              </a:rPr>
+              <a:t>()</a:t>
+            </a:r>
+          </a:p>
+          <a:p>
+            <a:pPr>
+              <a:defRPr sz="1275" b="0">
+                <a:solidFill>
+                  <a:srgbClr val="EEEEEE"/>
+                </a:solidFill>
+                <a:latin typeface="Consolas"/>
+                <a:ea typeface="Consolas"/>
+                <a:cs typeface="Consolas"/>
+              </a:defRPr>
+            </a:pPr>
+            <a:r>
+              <a:rPr sz="1275" b="0" dirty="0" err="1">
+                <a:solidFill>
+                  <a:srgbClr val="EEEEEE"/>
+                </a:solidFill>
+                <a:latin typeface="Consolas"/>
+                <a:ea typeface="Consolas"/>
+                <a:cs typeface="Consolas"/>
+              </a:rPr>
+              <a:t>spark.read.parquet</a:t>
+            </a:r>
+            <a:r>
+              <a:rPr sz="1275" b="0" dirty="0">
+                <a:solidFill>
+                  <a:srgbClr val="EEEEEE"/>
+                </a:solidFill>
+                <a:latin typeface="Consolas"/>
+                <a:ea typeface="Consolas"/>
+                <a:cs typeface="Consolas"/>
+              </a:rPr>
+              <a:t>(DATA).show(20, truncate=False)</a:t>
+            </a:r>
+          </a:p>
+          <a:p>
+            <a:endParaRPr sz="1275" b="0" dirty="0">
+              <a:solidFill>
+                <a:srgbClr val="EEEEEE"/>
+              </a:solidFill>
+              <a:latin typeface="Consolas"/>
+              <a:ea typeface="Consolas"/>
+              <a:cs typeface="Consolas"/>
+            </a:endParaRPr>
+          </a:p>
+          <a:p>
+            <a:pPr>
+              <a:defRPr sz="1275" b="0">
+                <a:solidFill>
+                  <a:srgbClr val="EEEEEE"/>
+                </a:solidFill>
+                <a:latin typeface="Consolas"/>
+                <a:ea typeface="Consolas"/>
+                <a:cs typeface="Consolas"/>
+              </a:defRPr>
+            </a:pPr>
+            <a:r>
+              <a:rPr sz="1275" b="0" dirty="0">
+                <a:solidFill>
+                  <a:srgbClr val="EEEEEE"/>
+                </a:solidFill>
+                <a:latin typeface="Consolas"/>
+                <a:ea typeface="Consolas"/>
+                <a:cs typeface="Consolas"/>
+              </a:rPr>
+              <a:t># À la fin de la séance </a:t>
+            </a:r>
+            <a:r>
+              <a:rPr sz="1275" b="0" dirty="0" err="1">
+                <a:solidFill>
+                  <a:srgbClr val="EEEEEE"/>
+                </a:solidFill>
+                <a:latin typeface="Consolas"/>
+                <a:ea typeface="Consolas"/>
+                <a:cs typeface="Consolas"/>
+              </a:rPr>
+              <a:t>seulement</a:t>
+            </a:r>
+            <a:r>
+              <a:rPr sz="1275" b="0" dirty="0">
+                <a:solidFill>
+                  <a:srgbClr val="EEEEEE"/>
+                </a:solidFill>
+                <a:latin typeface="Consolas"/>
+                <a:ea typeface="Consolas"/>
+                <a:cs typeface="Consolas"/>
+              </a:rPr>
+              <a:t> :</a:t>
+            </a:r>
+          </a:p>
+          <a:p>
+            <a:pPr>
+              <a:defRPr sz="1275" b="0">
+                <a:solidFill>
+                  <a:srgbClr val="EEEEEE"/>
+                </a:solidFill>
+                <a:latin typeface="Consolas"/>
+                <a:ea typeface="Consolas"/>
+                <a:cs typeface="Consolas"/>
+              </a:defRPr>
+            </a:pPr>
+            <a:r>
+              <a:rPr sz="1275" b="0" dirty="0" err="1">
+                <a:solidFill>
+                  <a:srgbClr val="EEEEEE"/>
+                </a:solidFill>
+                <a:latin typeface="Consolas"/>
+                <a:ea typeface="Consolas"/>
+                <a:cs typeface="Consolas"/>
+              </a:rPr>
+              <a:t>spark.stop</a:t>
+            </a:r>
+            <a:r>
+              <a:rPr sz="1275" b="0" dirty="0">
+                <a:solidFill>
+                  <a:srgbClr val="EEEEEE"/>
+                </a:solidFill>
+                <a:latin typeface="Consolas"/>
+                <a:ea typeface="Consolas"/>
+                <a:cs typeface="Consolas"/>
+              </a:rPr>
+              <a:t>()</a:t>
+            </a:r>
+          </a:p>
+        </p:txBody>
+      </p:sp>
+      <p:sp>
+        <p:nvSpPr>
+          <p:cNvPr id="103" name="Rectangle 102">
+            <a:extLst>
+              <a:ext uri="{FF2B5EF4-FFF2-40B4-BE49-F238E27FC236}">
+                <a16:creationId xmlns:a16="http://schemas.microsoft.com/office/drawing/2014/main" id="{CAE9F183-298F-44B6-86ED-15A366E17DF8}"/>
               </a:ext>
             </a:extLst>
           </p:cNvPr>
@@ -37221,7 +37642,30 @@
                 <a:ea typeface="Calibri"/>
                 <a:cs typeface="Calibri"/>
               </a:rPr>
-              <a:t>Pour rejouer tout le TP, choisir deux nouveaux dossiers : données ET checkpoint.</a:t>
+              <a:t>Reprise : recréer la session et les DataFrames si besoin, puis relancer l’étape 11</a:t>
+            </a:r>
+          </a:p>
+          <a:p>
+            <a:pPr>
+              <a:defRPr sz="1200" b="0">
+                <a:solidFill>
+                  <a:srgbClr val="555555"/>
+                </a:solidFill>
+                <a:latin typeface="Calibri"/>
+                <a:ea typeface="Calibri"/>
+                <a:cs typeface="Calibri"/>
+              </a:defRPr>
+            </a:pPr>
+            <a:r>
+              <a:rPr sz="1200" b="0">
+                <a:solidFill>
+                  <a:srgbClr val="555555"/>
+                </a:solidFill>
+                <a:latin typeface="Calibri"/>
+                <a:ea typeface="Calibri"/>
+                <a:cs typeface="Calibri"/>
+              </a:rPr>
+              <a:t>avec les mêmes DATA et CHECKPOINT. Ne pas supprimer leurs dossiers.</a:t>
             </a:r>
           </a:p>
         </p:txBody>
@@ -37498,6 +37942,569 @@
           <p:cNvPr id="100" name="Rectangle 99">
             <a:extLst>
               <a:ext uri="{FF2B5EF4-FFF2-40B4-BE49-F238E27FC236}">
+                <a16:creationId xmlns:a16="http://schemas.microsoft.com/office/drawing/2014/main" id="{196B7EC7-7374-44BB-A792-E3887D0AD940}"/>
+              </a:ext>
+            </a:extLst>
+          </p:cNvPr>
+          <p:cNvSpPr>
+            <a:spLocks noGrp="1"/>
+          </p:cNvSpPr>
+          <p:nvPr/>
+        </p:nvSpPr>
+        <p:spPr>
+          <a:xfrm>
+            <a:off x="895350" y="342900"/>
+            <a:ext cx="7524750" cy="495300"/>
+          </a:xfrm>
+          <a:prstGeom prst="rect">
+            <a:avLst/>
+          </a:prstGeom>
+          <a:noFill/>
+          <a:ln w="0">
+            <a:noFill/>
+          </a:ln>
+        </p:spPr>
+        <p:txBody>
+          <a:bodyPr>
+            <a:noAutofit/>
+          </a:bodyPr>
+          <a:lstStyle/>
+          <a:p>
+            <a:pPr>
+              <a:defRPr sz="2175" b="1">
+                <a:solidFill>
+                  <a:srgbClr val="FFFFFF"/>
+                </a:solidFill>
+                <a:latin typeface="Calibri"/>
+                <a:ea typeface="Calibri"/>
+                <a:cs typeface="Calibri"/>
+              </a:defRPr>
+            </a:pPr>
+            <a:r>
+              <a:rPr sz="2175" b="1">
+                <a:solidFill>
+                  <a:srgbClr val="FFFFFF"/>
+                </a:solidFill>
+                <a:latin typeface="Calibri"/>
+                <a:ea typeface="Calibri"/>
+                <a:cs typeface="Calibri"/>
+              </a:rPr>
+              <a:t>13. Vérification de la reprise</a:t>
+            </a:r>
+          </a:p>
+        </p:txBody>
+      </p:sp>
+      <p:sp>
+        <p:nvSpPr>
+          <p:cNvPr id="101" name="Rectangle 100">
+            <a:extLst>
+              <a:ext uri="{FF2B5EF4-FFF2-40B4-BE49-F238E27FC236}">
+                <a16:creationId xmlns:a16="http://schemas.microsoft.com/office/drawing/2014/main" id="{43C4C538-E15B-463C-AD0D-23D44F89BB00}"/>
+              </a:ext>
+            </a:extLst>
+          </p:cNvPr>
+          <p:cNvSpPr>
+            <a:spLocks noGrp="1"/>
+          </p:cNvSpPr>
+          <p:nvPr/>
+        </p:nvSpPr>
+        <p:spPr>
+          <a:xfrm>
+            <a:off x="809625" y="1171575"/>
+            <a:ext cx="7620000" cy="3095625"/>
+          </a:xfrm>
+          <a:prstGeom prst="rect">
+            <a:avLst/>
+          </a:prstGeom>
+          <a:noFill/>
+          <a:ln w="0">
+            <a:noFill/>
+          </a:ln>
+        </p:spPr>
+        <p:txBody>
+          <a:bodyPr>
+            <a:noAutofit/>
+          </a:bodyPr>
+          <a:lstStyle/>
+          <a:p>
+            <a:pPr>
+              <a:defRPr sz="1575" b="0">
+                <a:solidFill>
+                  <a:srgbClr val="222222"/>
+                </a:solidFill>
+                <a:latin typeface="Calibri"/>
+                <a:ea typeface="Calibri"/>
+                <a:cs typeface="Calibri"/>
+              </a:defRPr>
+            </a:pPr>
+            <a:r>
+              <a:rPr sz="1575" b="0">
+                <a:solidFill>
+                  <a:srgbClr val="222222"/>
+                </a:solidFill>
+                <a:latin typeface="Calibri"/>
+                <a:ea typeface="Calibri"/>
+                <a:cs typeface="Calibri"/>
+              </a:rPr>
+              <a:t>1. Noter le nombre de lignes Parquet après arrêt.</a:t>
+            </a:r>
+          </a:p>
+          <a:p>
+            <a:pPr>
+              <a:defRPr sz="1575" b="0">
+                <a:solidFill>
+                  <a:srgbClr val="222222"/>
+                </a:solidFill>
+                <a:latin typeface="Calibri"/>
+                <a:ea typeface="Calibri"/>
+                <a:cs typeface="Calibri"/>
+              </a:defRPr>
+            </a:pPr>
+            <a:r>
+              <a:rPr sz="1575" b="0">
+                <a:solidFill>
+                  <a:srgbClr val="222222"/>
+                </a:solidFill>
+                <a:latin typeface="Calibri"/>
+                <a:ea typeface="Calibri"/>
+                <a:cs typeface="Calibri"/>
+              </a:rPr>
+              <a:t>2. Envoyer 100 messages supplémentaires avec Producer.ipynb.</a:t>
+            </a:r>
+          </a:p>
+          <a:p>
+            <a:pPr>
+              <a:defRPr sz="1575" b="0">
+                <a:solidFill>
+                  <a:srgbClr val="222222"/>
+                </a:solidFill>
+                <a:latin typeface="Calibri"/>
+                <a:ea typeface="Calibri"/>
+                <a:cs typeface="Calibri"/>
+              </a:defRPr>
+            </a:pPr>
+            <a:r>
+              <a:rPr sz="1575" b="0">
+                <a:solidFill>
+                  <a:srgbClr val="222222"/>
+                </a:solidFill>
+                <a:latin typeface="Calibri"/>
+                <a:ea typeface="Calibri"/>
+                <a:cs typeface="Calibri"/>
+              </a:rPr>
+              <a:t>3. Relancer la requête Parquet avec le même checkpoint.</a:t>
+            </a:r>
+          </a:p>
+          <a:p>
+            <a:pPr>
+              <a:defRPr sz="1575" b="0">
+                <a:solidFill>
+                  <a:srgbClr val="222222"/>
+                </a:solidFill>
+                <a:latin typeface="Calibri"/>
+                <a:ea typeface="Calibri"/>
+                <a:cs typeface="Calibri"/>
+              </a:defRPr>
+            </a:pPr>
+            <a:r>
+              <a:rPr sz="1575" b="0">
+                <a:solidFill>
+                  <a:srgbClr val="222222"/>
+                </a:solidFill>
+                <a:latin typeface="Calibri"/>
+                <a:ea typeface="Calibri"/>
+                <a:cs typeface="Calibri"/>
+              </a:rPr>
+              <a:t>4. Attendre un lot terminé, arrêter et recompter.</a:t>
+            </a:r>
+          </a:p>
+          <a:p>
+            <a:endParaRPr sz="1575" b="0">
+              <a:solidFill>
+                <a:srgbClr val="222222"/>
+              </a:solidFill>
+              <a:latin typeface="Calibri"/>
+              <a:ea typeface="Calibri"/>
+              <a:cs typeface="Calibri"/>
+            </a:endParaRPr>
+          </a:p>
+          <a:p>
+            <a:pPr>
+              <a:defRPr sz="1575" b="0">
+                <a:solidFill>
+                  <a:srgbClr val="222222"/>
+                </a:solidFill>
+                <a:latin typeface="Calibri"/>
+                <a:ea typeface="Calibri"/>
+                <a:cs typeface="Calibri"/>
+              </a:defRPr>
+            </a:pPr>
+            <a:r>
+              <a:rPr sz="1575" b="0">
+                <a:solidFill>
+                  <a:srgbClr val="222222"/>
+                </a:solidFill>
+                <a:latin typeface="Calibri"/>
+                <a:ea typeface="Calibri"/>
+                <a:cs typeface="Calibri"/>
+              </a:rPr>
+              <a:t>Résultat attendu : +100 lignes valides, sans rejouer l’historique.</a:t>
+            </a:r>
+          </a:p>
+          <a:p>
+            <a:pPr>
+              <a:defRPr sz="1575" b="0">
+                <a:solidFill>
+                  <a:srgbClr val="222222"/>
+                </a:solidFill>
+                <a:latin typeface="Calibri"/>
+                <a:ea typeface="Calibri"/>
+                <a:cs typeface="Calibri"/>
+              </a:defRPr>
+            </a:pPr>
+            <a:r>
+              <a:rPr sz="1575" b="0">
+                <a:solidFill>
+                  <a:srgbClr val="222222"/>
+                </a:solidFill>
+                <a:latin typeface="Calibri"/>
+                <a:ea typeface="Calibri"/>
+                <a:cs typeface="Calibri"/>
+              </a:rPr>
+              <a:t>Le checkpoint fixe la reprise, même avec startingOffsets="earliest".</a:t>
+            </a:r>
+          </a:p>
+        </p:txBody>
+      </p:sp>
+      <p:sp>
+        <p:nvSpPr>
+          <p:cNvPr id="102" name="Rectangle 101">
+            <a:extLst>
+              <a:ext uri="{FF2B5EF4-FFF2-40B4-BE49-F238E27FC236}">
+                <a16:creationId xmlns:a16="http://schemas.microsoft.com/office/drawing/2014/main" id="{669B64EE-428F-431D-9F40-76D08EE6261C}"/>
+              </a:ext>
+            </a:extLst>
+          </p:cNvPr>
+          <p:cNvSpPr>
+            <a:spLocks noGrp="1"/>
+          </p:cNvSpPr>
+          <p:nvPr/>
+        </p:nvSpPr>
+        <p:spPr>
+          <a:xfrm>
+            <a:off x="809625" y="4505325"/>
+            <a:ext cx="7715250" cy="514350"/>
+          </a:xfrm>
+          <a:prstGeom prst="rect">
+            <a:avLst/>
+          </a:prstGeom>
+          <a:noFill/>
+          <a:ln w="0">
+            <a:noFill/>
+          </a:ln>
+        </p:spPr>
+        <p:txBody>
+          <a:bodyPr>
+            <a:noAutofit/>
+          </a:bodyPr>
+          <a:lstStyle/>
+          <a:p>
+            <a:pPr>
+              <a:defRPr sz="1200" b="0">
+                <a:solidFill>
+                  <a:srgbClr val="555555"/>
+                </a:solidFill>
+                <a:latin typeface="Calibri"/>
+                <a:ea typeface="Calibri"/>
+                <a:cs typeface="Calibri"/>
+              </a:defRPr>
+            </a:pPr>
+            <a:r>
+              <a:rPr sz="1200" b="0">
+                <a:solidFill>
+                  <a:srgbClr val="555555"/>
+                </a:solidFill>
+                <a:latin typeface="Calibri"/>
+                <a:ea typeface="Calibri"/>
+                <a:cs typeface="Calibri"/>
+              </a:rPr>
+              <a:t>Pour rejouer tout le TP, choisir deux nouveaux dossiers : données ET checkpoint.</a:t>
+            </a:r>
+          </a:p>
+        </p:txBody>
+      </p:sp>
+    </p:spTree>
+    <p:extLst>
+      <p:ext uri="{BB962C8B-B14F-4D97-AF65-F5344CB8AC3E}">
+        <p14:creationId xmlns:p14="http://schemas.microsoft.com/office/powerpoint/2010/main" val="3068620206"/>
+      </p:ext>
+    </p:extLst>
+  </p:cSld>
+  <p:clrMapOvr>
+    <a:masterClrMapping/>
+  </p:clrMapOvr>
+</p:sld>
+</file>
+
+<file path=ppt/slides/slide43.xml><?xml version="1.0" encoding="utf-8"?>
+<p:sld xmlns:a="http://schemas.openxmlformats.org/drawingml/2006/main" xmlns:r="http://schemas.openxmlformats.org/officeDocument/2006/relationships" xmlns:p="http://schemas.openxmlformats.org/presentationml/2006/main">
+  <p:cSld>
+    <p:spTree>
+      <p:nvGrpSpPr>
+        <p:cNvPr id="1" name="">
+          <a:extLst>
+            <a:ext uri="{FF2B5EF4-FFF2-40B4-BE49-F238E27FC236}">
+              <a16:creationId xmlns:a16="http://schemas.microsoft.com/office/drawing/2014/main" id="{43AD5479-2065-6145-2A05-8EC6DC7CA978}"/>
+            </a:ext>
+          </a:extLst>
+        </p:cNvPr>
+        <p:cNvGrpSpPr/>
+        <p:nvPr/>
+      </p:nvGrpSpPr>
+      <p:grpSpPr>
+        <a:xfrm>
+          <a:off x="0" y="0"/>
+          <a:ext cx="0" cy="0"/>
+          <a:chOff x="0" y="0"/>
+          <a:chExt cx="0" cy="0"/>
+        </a:xfrm>
+      </p:grpSpPr>
+      <p:sp>
+        <p:nvSpPr>
+          <p:cNvPr id="46" name="Google Shape;230;p17">
+            <a:extLst>
+              <a:ext uri="{FF2B5EF4-FFF2-40B4-BE49-F238E27FC236}">
+                <a16:creationId xmlns:a16="http://schemas.microsoft.com/office/drawing/2014/main" id="{39AECA5A-8C39-F8C1-6EF6-59414223C75E}"/>
+              </a:ext>
+            </a:extLst>
+          </p:cNvPr>
+          <p:cNvSpPr/>
+          <p:nvPr/>
+        </p:nvSpPr>
+        <p:spPr>
+          <a:xfrm>
+            <a:off x="728524" y="58794"/>
+            <a:ext cx="7865349" cy="952920"/>
+          </a:xfrm>
+          <a:custGeom>
+            <a:avLst/>
+            <a:gdLst/>
+            <a:ahLst/>
+            <a:cxnLst/>
+            <a:rect l="l" t="t" r="r" b="b"/>
+            <a:pathLst>
+              <a:path w="12451" h="8780" extrusionOk="0">
+                <a:moveTo>
+                  <a:pt x="0" y="0"/>
+                </a:moveTo>
+                <a:lnTo>
+                  <a:pt x="0" y="8780"/>
+                </a:lnTo>
+                <a:lnTo>
+                  <a:pt x="12101" y="8780"/>
+                </a:lnTo>
+                <a:cubicBezTo>
+                  <a:pt x="12289" y="8780"/>
+                  <a:pt x="12451" y="8618"/>
+                  <a:pt x="12451" y="8428"/>
+                </a:cubicBezTo>
+                <a:lnTo>
+                  <a:pt x="12451" y="378"/>
+                </a:lnTo>
+                <a:cubicBezTo>
+                  <a:pt x="12451" y="162"/>
+                  <a:pt x="12289" y="0"/>
+                  <a:pt x="12101" y="0"/>
+                </a:cubicBezTo>
+                <a:close/>
+              </a:path>
+            </a:pathLst>
+          </a:custGeom>
+          <a:solidFill>
+            <a:srgbClr val="E89D06"/>
+          </a:solidFill>
+          <a:ln>
+            <a:noFill/>
+          </a:ln>
+          <a:effectLst>
+            <a:outerShdw blurRad="85725" dist="57150" dir="1200000" algn="bl" rotWithShape="0">
+              <a:srgbClr val="000000">
+                <a:alpha val="20000"/>
+              </a:srgbClr>
+            </a:outerShdw>
+          </a:effectLst>
+        </p:spPr>
+        <p:txBody>
+          <a:bodyPr spcFirstLastPara="1" wrap="square" lIns="91425" tIns="91425" rIns="91425" bIns="91425" anchor="ctr" anchorCtr="0">
+            <a:noAutofit/>
+          </a:bodyPr>
+          <a:lstStyle/>
+          <a:p>
+            <a:pPr marL="0" lvl="0" indent="0" algn="l" rtl="0">
+              <a:spcBef>
+                <a:spcPts val="0"/>
+              </a:spcBef>
+              <a:spcAft>
+                <a:spcPts val="0"/>
+              </a:spcAft>
+              <a:buNone/>
+            </a:pPr>
+            <a:endParaRPr/>
+          </a:p>
+        </p:txBody>
+      </p:sp>
+      <p:sp>
+        <p:nvSpPr>
+          <p:cNvPr id="47" name="Google Shape;231;p17">
+            <a:extLst>
+              <a:ext uri="{FF2B5EF4-FFF2-40B4-BE49-F238E27FC236}">
+                <a16:creationId xmlns:a16="http://schemas.microsoft.com/office/drawing/2014/main" id="{657F4BE4-4C92-240D-33C9-9737EE91F3AA}"/>
+              </a:ext>
+            </a:extLst>
+          </p:cNvPr>
+          <p:cNvSpPr/>
+          <p:nvPr/>
+        </p:nvSpPr>
+        <p:spPr>
+          <a:xfrm>
+            <a:off x="253089" y="58794"/>
+            <a:ext cx="530346" cy="952920"/>
+          </a:xfrm>
+          <a:custGeom>
+            <a:avLst/>
+            <a:gdLst/>
+            <a:ahLst/>
+            <a:cxnLst/>
+            <a:rect l="l" t="t" r="r" b="b"/>
+            <a:pathLst>
+              <a:path w="3325" h="6646" extrusionOk="0">
+                <a:moveTo>
+                  <a:pt x="3324" y="1"/>
+                </a:moveTo>
+                <a:cubicBezTo>
+                  <a:pt x="1488" y="1"/>
+                  <a:pt x="1" y="1487"/>
+                  <a:pt x="1" y="3324"/>
+                </a:cubicBezTo>
+                <a:cubicBezTo>
+                  <a:pt x="1" y="5161"/>
+                  <a:pt x="1488" y="6645"/>
+                  <a:pt x="3324" y="6645"/>
+                </a:cubicBezTo>
+                <a:lnTo>
+                  <a:pt x="3324" y="1"/>
+                </a:lnTo>
+                <a:close/>
+              </a:path>
+            </a:pathLst>
+          </a:custGeom>
+          <a:solidFill>
+            <a:srgbClr val="E89D06"/>
+          </a:solidFill>
+          <a:ln>
+            <a:noFill/>
+          </a:ln>
+          <a:effectLst>
+            <a:outerShdw blurRad="71438" dist="57150" dir="1140000" algn="bl" rotWithShape="0">
+              <a:schemeClr val="dk1">
+                <a:alpha val="20000"/>
+              </a:schemeClr>
+            </a:outerShdw>
+          </a:effectLst>
+        </p:spPr>
+        <p:txBody>
+          <a:bodyPr spcFirstLastPara="1" wrap="square" lIns="91425" tIns="91425" rIns="91425" bIns="91425" anchor="ctr" anchorCtr="0">
+            <a:noAutofit/>
+          </a:bodyPr>
+          <a:lstStyle/>
+          <a:p>
+            <a:pPr marL="0" lvl="0" indent="0" algn="l" rtl="0">
+              <a:spcBef>
+                <a:spcPts val="0"/>
+              </a:spcBef>
+              <a:spcAft>
+                <a:spcPts val="0"/>
+              </a:spcAft>
+              <a:buNone/>
+            </a:pPr>
+            <a:endParaRPr/>
+          </a:p>
+        </p:txBody>
+      </p:sp>
+      <p:sp>
+        <p:nvSpPr>
+          <p:cNvPr id="48" name="Google Shape;232;p17">
+            <a:extLst>
+              <a:ext uri="{FF2B5EF4-FFF2-40B4-BE49-F238E27FC236}">
+                <a16:creationId xmlns:a16="http://schemas.microsoft.com/office/drawing/2014/main" id="{8B27055A-ED19-9A9D-501B-46AC08C4550D}"/>
+              </a:ext>
+            </a:extLst>
+          </p:cNvPr>
+          <p:cNvSpPr txBox="1"/>
+          <p:nvPr/>
+        </p:nvSpPr>
+        <p:spPr>
+          <a:xfrm>
+            <a:off x="398524" y="346314"/>
+            <a:ext cx="330000" cy="387300"/>
+          </a:xfrm>
+          <a:prstGeom prst="rect">
+            <a:avLst/>
+          </a:prstGeom>
+          <a:solidFill>
+            <a:srgbClr val="E89D06"/>
+          </a:solidFill>
+          <a:ln>
+            <a:noFill/>
+          </a:ln>
+        </p:spPr>
+        <p:txBody>
+          <a:bodyPr spcFirstLastPara="1" wrap="square" lIns="91425" tIns="91425" rIns="91425" bIns="91425" anchor="ctr" anchorCtr="0">
+            <a:noAutofit/>
+          </a:bodyPr>
+          <a:lstStyle/>
+          <a:p>
+            <a:pPr marL="0" lvl="0" indent="0" algn="l" rtl="0">
+              <a:lnSpc>
+                <a:spcPct val="100000"/>
+              </a:lnSpc>
+              <a:spcBef>
+                <a:spcPts val="0"/>
+              </a:spcBef>
+              <a:spcAft>
+                <a:spcPts val="0"/>
+              </a:spcAft>
+              <a:buNone/>
+            </a:pPr>
+            <a:r>
+              <a:rPr lang="en" sz="2000" b="1">
+                <a:solidFill>
+                  <a:schemeClr val="lt1"/>
+                </a:solidFill>
+                <a:latin typeface="Roboto"/>
+                <a:ea typeface="Roboto"/>
+                <a:cs typeface="Roboto"/>
+                <a:sym typeface="Roboto"/>
+              </a:rPr>
+              <a:t>+</a:t>
+            </a:r>
+            <a:endParaRPr sz="2000" b="1">
+              <a:solidFill>
+                <a:schemeClr val="lt1"/>
+              </a:solidFill>
+              <a:latin typeface="Roboto"/>
+              <a:ea typeface="Roboto"/>
+              <a:cs typeface="Roboto"/>
+              <a:sym typeface="Roboto"/>
+            </a:endParaRPr>
+          </a:p>
+        </p:txBody>
+      </p:sp>
+      <p:sp>
+        <p:nvSpPr>
+          <p:cNvPr id="100" name="Rectangle 99">
+            <a:extLst>
+              <a:ext uri="{FF2B5EF4-FFF2-40B4-BE49-F238E27FC236}">
                 <a16:creationId xmlns:a16="http://schemas.microsoft.com/office/drawing/2014/main" id="{94515607-4AEA-468D-B505-AC6199D72966}"/>
               </a:ext>
             </a:extLst>
@@ -37891,7 +38898,7 @@
 </p:sld>
 </file>
 
-<file path=ppt/slides/slide43.xml><?xml version="1.0" encoding="utf-8"?>
+<file path=ppt/slides/slide44.xml><?xml version="1.0" encoding="utf-8"?>
 <p:sld xmlns:a="http://schemas.openxmlformats.org/drawingml/2006/main" xmlns:r="http://schemas.openxmlformats.org/officeDocument/2006/relationships" xmlns:p="http://schemas.openxmlformats.org/presentationml/2006/main">
   <p:cSld>
     <p:spTree>
@@ -46762,6 +47769,30 @@
 </file>
 
 <file path=customXml/item1.xml><?xml version="1.0" encoding="utf-8"?>
+<?mso-contentType ?>
+<FormTemplates xmlns="http://schemas.microsoft.com/sharepoint/v3/contenttype/forms">
+  <Display>DocumentLibraryForm</Display>
+  <Edit>DocumentLibraryForm</Edit>
+  <New>DocumentLibraryForm</New>
+</FormTemplates>
+</file>
+
+<file path=customXml/item2.xml><?xml version="1.0" encoding="utf-8"?>
+<p:properties xmlns:p="http://schemas.microsoft.com/office/2006/metadata/properties" xmlns:xsi="http://www.w3.org/2001/XMLSchema-instance" xmlns:pc="http://schemas.microsoft.com/office/infopath/2007/PartnerControls">
+  <documentManagement>
+    <SharedWithUsers xmlns="73eca01c-4ea5-40c8-83fd-b296bd340025">
+      <UserInfo>
+        <DisplayName>Abir GUENICH - Ingénieure d’affaire</DisplayName>
+        <AccountId>246</AccountId>
+        <AccountType/>
+      </UserInfo>
+    </SharedWithUsers>
+    <_activity xmlns="6f1b3788-58c0-46a5-9604-64d97c7fc47c" xsi:nil="true"/>
+  </documentManagement>
+</p:properties>
+</file>
+
+<file path=customXml/item3.xml><?xml version="1.0" encoding="utf-8"?>
 <ct:contentTypeSchema xmlns:ct="http://schemas.microsoft.com/office/2006/metadata/contentType" xmlns:ma="http://schemas.microsoft.com/office/2006/metadata/properties/metaAttributes" ct:_="" ma:_="" ma:contentTypeName="Document" ma:contentTypeID="0x01010058419B1710D3DF4A9DAA9ADF73C802B5" ma:contentTypeVersion="14" ma:contentTypeDescription="Crée un document." ma:contentTypeScope="" ma:versionID="d45f398bd182fafaec1e6b20d8a38b6f">
   <xsd:schema xmlns:xsd="http://www.w3.org/2001/XMLSchema" xmlns:xs="http://www.w3.org/2001/XMLSchema" xmlns:p="http://schemas.microsoft.com/office/2006/metadata/properties" xmlns:ns3="6f1b3788-58c0-46a5-9604-64d97c7fc47c" xmlns:ns4="73eca01c-4ea5-40c8-83fd-b296bd340025" targetNamespace="http://schemas.microsoft.com/office/2006/metadata/properties" ma:root="true" ma:fieldsID="de746a5257d740f042749d495693305b" ns3:_="" ns4:_="">
     <xsd:import namespace="6f1b3788-58c0-46a5-9604-64d97c7fc47c"/>
@@ -46986,31 +48017,32 @@
 </ct:contentTypeSchema>
 </file>
 
-<file path=customXml/item2.xml><?xml version="1.0" encoding="utf-8"?>
-<?mso-contentType ?>
-<FormTemplates xmlns="http://schemas.microsoft.com/sharepoint/v3/contenttype/forms">
-  <Display>DocumentLibraryForm</Display>
-  <Edit>DocumentLibraryForm</Edit>
-  <New>DocumentLibraryForm</New>
-</FormTemplates>
+<file path=customXml/itemProps1.xml><?xml version="1.0" encoding="utf-8"?>
+<ds:datastoreItem xmlns:ds="http://schemas.openxmlformats.org/officeDocument/2006/customXml" ds:itemID="{EBAA46D8-DF31-4768-AD82-8F485C82E644}">
+  <ds:schemaRefs>
+    <ds:schemaRef ds:uri="http://schemas.microsoft.com/sharepoint/v3/contenttype/forms"/>
+  </ds:schemaRefs>
+</ds:datastoreItem>
 </file>
 
-<file path=customXml/item3.xml><?xml version="1.0" encoding="utf-8"?>
-<p:properties xmlns:p="http://schemas.microsoft.com/office/2006/metadata/properties" xmlns:xsi="http://www.w3.org/2001/XMLSchema-instance" xmlns:pc="http://schemas.microsoft.com/office/infopath/2007/PartnerControls">
-  <documentManagement>
-    <SharedWithUsers xmlns="73eca01c-4ea5-40c8-83fd-b296bd340025">
-      <UserInfo>
-        <DisplayName>Abir GUENICH - Ingénieure d’affaire</DisplayName>
-        <AccountId>246</AccountId>
-        <AccountType/>
-      </UserInfo>
-    </SharedWithUsers>
-    <_activity xmlns="6f1b3788-58c0-46a5-9604-64d97c7fc47c" xsi:nil="true"/>
-  </documentManagement>
-</p:properties>
+<file path=customXml/itemProps2.xml><?xml version="1.0" encoding="utf-8"?>
+<ds:datastoreItem xmlns:ds="http://schemas.openxmlformats.org/officeDocument/2006/customXml" ds:itemID="{40C00205-F11F-4D61-9572-D162BE7CE022}">
+  <ds:schemaRefs>
+    <ds:schemaRef ds:uri="http://schemas.microsoft.com/office/infopath/2007/PartnerControls"/>
+    <ds:schemaRef ds:uri="http://purl.org/dc/terms/"/>
+    <ds:schemaRef ds:uri="http://purl.org/dc/elements/1.1/"/>
+    <ds:schemaRef ds:uri="6f1b3788-58c0-46a5-9604-64d97c7fc47c"/>
+    <ds:schemaRef ds:uri="73eca01c-4ea5-40c8-83fd-b296bd340025"/>
+    <ds:schemaRef ds:uri="http://purl.org/dc/dcmitype/"/>
+    <ds:schemaRef ds:uri="http://schemas.openxmlformats.org/package/2006/metadata/core-properties"/>
+    <ds:schemaRef ds:uri="http://schemas.microsoft.com/office/2006/documentManagement/types"/>
+    <ds:schemaRef ds:uri="http://www.w3.org/XML/1998/namespace"/>
+    <ds:schemaRef ds:uri="http://schemas.microsoft.com/office/2006/metadata/properties"/>
+  </ds:schemaRefs>
+</ds:datastoreItem>
 </file>
 
-<file path=customXml/itemProps1.xml><?xml version="1.0" encoding="utf-8"?>
+<file path=customXml/itemProps3.xml><?xml version="1.0" encoding="utf-8"?>
 <ds:datastoreItem xmlns:ds="http://schemas.openxmlformats.org/officeDocument/2006/customXml" ds:itemID="{13D40C7A-64C6-4B3B-A1B6-9CB64BC75662}">
   <ds:schemaRefs>
     <ds:schemaRef ds:uri="http://schemas.microsoft.com/office/2006/metadata/contentType"/>
@@ -47027,29 +48059,4 @@
     <ds:schemaRef ds:uri="http://schemas.microsoft.com/internal/obd"/>
   </ds:schemaRefs>
 </ds:datastoreItem>
-</file>
-
-<file path=customXml/itemProps2.xml><?xml version="1.0" encoding="utf-8"?>
-<ds:datastoreItem xmlns:ds="http://schemas.openxmlformats.org/officeDocument/2006/customXml" ds:itemID="{EBAA46D8-DF31-4768-AD82-8F485C82E644}">
-  <ds:schemaRefs>
-    <ds:schemaRef ds:uri="http://schemas.microsoft.com/sharepoint/v3/contenttype/forms"/>
-  </ds:schemaRefs>
-</ds:datastoreItem>
-</file>
-
-<file path=customXml/itemProps3.xml><?xml version="1.0" encoding="utf-8"?>
-<ds:datastoreItem xmlns:ds="http://schemas.openxmlformats.org/officeDocument/2006/customXml" ds:itemID="{40C00205-F11F-4D61-9572-D162BE7CE022}">
-  <ds:schemaRefs>
-    <ds:schemaRef ds:uri="http://schemas.microsoft.com/office/infopath/2007/PartnerControls"/>
-    <ds:schemaRef ds:uri="http://purl.org/dc/terms/"/>
-    <ds:schemaRef ds:uri="http://purl.org/dc/elements/1.1/"/>
-    <ds:schemaRef ds:uri="6f1b3788-58c0-46a5-9604-64d97c7fc47c"/>
-    <ds:schemaRef ds:uri="73eca01c-4ea5-40c8-83fd-b296bd340025"/>
-    <ds:schemaRef ds:uri="http://purl.org/dc/dcmitype/"/>
-    <ds:schemaRef ds:uri="http://schemas.openxmlformats.org/package/2006/metadata/core-properties"/>
-    <ds:schemaRef ds:uri="http://schemas.microsoft.com/office/2006/documentManagement/types"/>
-    <ds:schemaRef ds:uri="http://www.w3.org/XML/1998/namespace"/>
-    <ds:schemaRef ds:uri="http://schemas.microsoft.com/office/2006/metadata/properties"/>
-  </ds:schemaRefs>
-</ds:datastoreItem>
 </file>